--- a/dfu.pptx
+++ b/dfu.pptx
@@ -5,8 +5,11 @@
     <p:sldMasterId id="2147483648" r:id="rId1"/>
   </p:sldMasterIdLst>
   <p:sldIdLst>
-    <p:sldId id="257" r:id="rId2"/>
-    <p:sldId id="258" r:id="rId3"/>
+    <p:sldId id="259" r:id="rId2"/>
+    <p:sldId id="257" r:id="rId3"/>
+    <p:sldId id="262" r:id="rId4"/>
+    <p:sldId id="261" r:id="rId5"/>
+    <p:sldId id="258" r:id="rId6"/>
   </p:sldIdLst>
   <p:sldSz cx="12192000" cy="6858000"/>
   <p:notesSz cx="6858000" cy="9144000"/>
@@ -260,7 +263,7 @@
           <a:p>
             <a:fld id="{0DDFD6A2-D5DE-4F01-98AB-687AA1F19E50}" type="datetimeFigureOut">
               <a:rPr lang="en-US" smtClean="0"/>
-              <a:t>5/5/2026</a:t>
+              <a:t>5/10/2026</a:t>
             </a:fld>
             <a:endParaRPr lang="en-US"/>
           </a:p>
@@ -458,7 +461,7 @@
           <a:p>
             <a:fld id="{0DDFD6A2-D5DE-4F01-98AB-687AA1F19E50}" type="datetimeFigureOut">
               <a:rPr lang="en-US" smtClean="0"/>
-              <a:t>5/5/2026</a:t>
+              <a:t>5/10/2026</a:t>
             </a:fld>
             <a:endParaRPr lang="en-US"/>
           </a:p>
@@ -666,7 +669,7 @@
           <a:p>
             <a:fld id="{0DDFD6A2-D5DE-4F01-98AB-687AA1F19E50}" type="datetimeFigureOut">
               <a:rPr lang="en-US" smtClean="0"/>
-              <a:t>5/5/2026</a:t>
+              <a:t>5/10/2026</a:t>
             </a:fld>
             <a:endParaRPr lang="en-US"/>
           </a:p>
@@ -864,7 +867,7 @@
           <a:p>
             <a:fld id="{0DDFD6A2-D5DE-4F01-98AB-687AA1F19E50}" type="datetimeFigureOut">
               <a:rPr lang="en-US" smtClean="0"/>
-              <a:t>5/5/2026</a:t>
+              <a:t>5/10/2026</a:t>
             </a:fld>
             <a:endParaRPr lang="en-US"/>
           </a:p>
@@ -1139,7 +1142,7 @@
           <a:p>
             <a:fld id="{0DDFD6A2-D5DE-4F01-98AB-687AA1F19E50}" type="datetimeFigureOut">
               <a:rPr lang="en-US" smtClean="0"/>
-              <a:t>5/5/2026</a:t>
+              <a:t>5/10/2026</a:t>
             </a:fld>
             <a:endParaRPr lang="en-US"/>
           </a:p>
@@ -1404,7 +1407,7 @@
           <a:p>
             <a:fld id="{0DDFD6A2-D5DE-4F01-98AB-687AA1F19E50}" type="datetimeFigureOut">
               <a:rPr lang="en-US" smtClean="0"/>
-              <a:t>5/5/2026</a:t>
+              <a:t>5/10/2026</a:t>
             </a:fld>
             <a:endParaRPr lang="en-US"/>
           </a:p>
@@ -1816,7 +1819,7 @@
           <a:p>
             <a:fld id="{0DDFD6A2-D5DE-4F01-98AB-687AA1F19E50}" type="datetimeFigureOut">
               <a:rPr lang="en-US" smtClean="0"/>
-              <a:t>5/5/2026</a:t>
+              <a:t>5/10/2026</a:t>
             </a:fld>
             <a:endParaRPr lang="en-US"/>
           </a:p>
@@ -1957,7 +1960,7 @@
           <a:p>
             <a:fld id="{0DDFD6A2-D5DE-4F01-98AB-687AA1F19E50}" type="datetimeFigureOut">
               <a:rPr lang="en-US" smtClean="0"/>
-              <a:t>5/5/2026</a:t>
+              <a:t>5/10/2026</a:t>
             </a:fld>
             <a:endParaRPr lang="en-US"/>
           </a:p>
@@ -2070,7 +2073,7 @@
           <a:p>
             <a:fld id="{0DDFD6A2-D5DE-4F01-98AB-687AA1F19E50}" type="datetimeFigureOut">
               <a:rPr lang="en-US" smtClean="0"/>
-              <a:t>5/5/2026</a:t>
+              <a:t>5/10/2026</a:t>
             </a:fld>
             <a:endParaRPr lang="en-US"/>
           </a:p>
@@ -2381,7 +2384,7 @@
           <a:p>
             <a:fld id="{0DDFD6A2-D5DE-4F01-98AB-687AA1F19E50}" type="datetimeFigureOut">
               <a:rPr lang="en-US" smtClean="0"/>
-              <a:t>5/5/2026</a:t>
+              <a:t>5/10/2026</a:t>
             </a:fld>
             <a:endParaRPr lang="en-US"/>
           </a:p>
@@ -2669,7 +2672,7 @@
           <a:p>
             <a:fld id="{0DDFD6A2-D5DE-4F01-98AB-687AA1F19E50}" type="datetimeFigureOut">
               <a:rPr lang="en-US" smtClean="0"/>
-              <a:t>5/5/2026</a:t>
+              <a:t>5/10/2026</a:t>
             </a:fld>
             <a:endParaRPr lang="en-US"/>
           </a:p>
@@ -2910,7 +2913,7 @@
           <a:p>
             <a:fld id="{0DDFD6A2-D5DE-4F01-98AB-687AA1F19E50}" type="datetimeFigureOut">
               <a:rPr lang="en-US" smtClean="0"/>
-              <a:t>5/5/2026</a:t>
+              <a:t>5/10/2026</a:t>
             </a:fld>
             <a:endParaRPr lang="en-US"/>
           </a:p>
@@ -3327,79 +3330,136 @@
           <a:chExt cx="0" cy="0"/>
         </a:xfrm>
       </p:grpSpPr>
-      <p:sp>
-        <p:nvSpPr>
-          <p:cNvPr id="30" name="Rectangle 29">
-            <a:extLst>
-              <a:ext uri="{FF2B5EF4-FFF2-40B4-BE49-F238E27FC236}">
-                <a16:creationId xmlns:a16="http://schemas.microsoft.com/office/drawing/2014/main" id="{24D9B6F2-37D3-7734-69DF-117A6B00331D}"/>
-              </a:ext>
-            </a:extLst>
-          </p:cNvPr>
-          <p:cNvSpPr>
-            <a:spLocks/>
-          </p:cNvSpPr>
-          <p:nvPr/>
-        </p:nvSpPr>
-        <p:spPr>
-          <a:xfrm>
-            <a:off x="2459631" y="523588"/>
-            <a:ext cx="4328557" cy="1142749"/>
+      <p:pic>
+        <p:nvPicPr>
+          <p:cNvPr id="35" name="Picture 34" descr="A diagram of a data flow&#10;&#10;AI-generated content may be incorrect.">
+            <a:extLst>
+              <a:ext uri="{FF2B5EF4-FFF2-40B4-BE49-F238E27FC236}">
+                <a16:creationId xmlns:a16="http://schemas.microsoft.com/office/drawing/2014/main" id="{1E862BD5-0A03-7E15-D6CE-305AC9E083D4}"/>
+              </a:ext>
+            </a:extLst>
+          </p:cNvPr>
+          <p:cNvPicPr>
+            <a:picLocks noChangeAspect="1"/>
+          </p:cNvPicPr>
+          <p:nvPr/>
+        </p:nvPicPr>
+        <p:blipFill>
+          <a:blip r:embed="rId2">
+            <a:extLst>
+              <a:ext uri="{28A0092B-C50C-407E-A947-70E740481C1C}">
+                <a14:useLocalDpi xmlns:a14="http://schemas.microsoft.com/office/drawing/2010/main" val="0"/>
+              </a:ext>
+            </a:extLst>
+          </a:blip>
+          <a:stretch>
+            <a:fillRect/>
+          </a:stretch>
+        </p:blipFill>
+        <p:spPr>
+          <a:xfrm>
+            <a:off x="8320864" y="918210"/>
+            <a:ext cx="3364062" cy="5783580"/>
           </a:xfrm>
           <a:prstGeom prst="rect">
+            <a:avLst/>
+          </a:prstGeom>
+        </p:spPr>
+      </p:pic>
+      <p:pic>
+        <p:nvPicPr>
+          <p:cNvPr id="37" name="Picture 36" descr="A diagram of a data flow&#10;&#10;AI-generated content may be incorrect.">
+            <a:extLst>
+              <a:ext uri="{FF2B5EF4-FFF2-40B4-BE49-F238E27FC236}">
+                <a16:creationId xmlns:a16="http://schemas.microsoft.com/office/drawing/2014/main" id="{BAFBCDE3-876C-13D8-B3C0-33EDFC443295}"/>
+              </a:ext>
+            </a:extLst>
+          </p:cNvPr>
+          <p:cNvPicPr>
+            <a:picLocks noChangeAspect="1"/>
+          </p:cNvPicPr>
+          <p:nvPr/>
+        </p:nvPicPr>
+        <p:blipFill>
+          <a:blip r:embed="rId3">
+            <a:extLst>
+              <a:ext uri="{28A0092B-C50C-407E-A947-70E740481C1C}">
+                <a14:useLocalDpi xmlns:a14="http://schemas.microsoft.com/office/drawing/2010/main" val="0"/>
+              </a:ext>
+            </a:extLst>
+          </a:blip>
+          <a:stretch>
+            <a:fillRect/>
+          </a:stretch>
+        </p:blipFill>
+        <p:spPr>
+          <a:xfrm>
+            <a:off x="446586" y="918210"/>
+            <a:ext cx="3424549" cy="5783580"/>
+          </a:xfrm>
+          <a:prstGeom prst="rect">
+            <a:avLst/>
+          </a:prstGeom>
+        </p:spPr>
+      </p:pic>
+      <p:pic>
+        <p:nvPicPr>
+          <p:cNvPr id="39" name="Picture 38" descr="A diagram of a data flow&#10;&#10;AI-generated content may be incorrect.">
+            <a:extLst>
+              <a:ext uri="{FF2B5EF4-FFF2-40B4-BE49-F238E27FC236}">
+                <a16:creationId xmlns:a16="http://schemas.microsoft.com/office/drawing/2014/main" id="{C29FABF3-812E-0FA9-1940-536139945963}"/>
+              </a:ext>
+            </a:extLst>
+          </p:cNvPr>
+          <p:cNvPicPr>
+            <a:picLocks noChangeAspect="1"/>
+          </p:cNvPicPr>
+          <p:nvPr/>
+        </p:nvPicPr>
+        <p:blipFill>
+          <a:blip r:embed="rId4">
+            <a:extLst>
+              <a:ext uri="{28A0092B-C50C-407E-A947-70E740481C1C}">
+                <a14:useLocalDpi xmlns:a14="http://schemas.microsoft.com/office/drawing/2010/main" val="0"/>
+              </a:ext>
+            </a:extLst>
+          </a:blip>
+          <a:stretch>
+            <a:fillRect/>
+          </a:stretch>
+        </p:blipFill>
+        <p:spPr>
+          <a:xfrm>
+            <a:off x="4383725" y="918210"/>
+            <a:ext cx="3424549" cy="5783580"/>
+          </a:xfrm>
+          <a:prstGeom prst="rect">
+            <a:avLst/>
+          </a:prstGeom>
+        </p:spPr>
+      </p:pic>
+      <p:cxnSp>
+        <p:nvCxnSpPr>
+          <p:cNvPr id="41" name="Straight Connector 40">
+            <a:extLst>
+              <a:ext uri="{FF2B5EF4-FFF2-40B4-BE49-F238E27FC236}">
+                <a16:creationId xmlns:a16="http://schemas.microsoft.com/office/drawing/2014/main" id="{41D6BB05-0BD9-D184-B252-D5682F80A079}"/>
+              </a:ext>
+            </a:extLst>
+          </p:cNvPr>
+          <p:cNvCxnSpPr/>
+          <p:nvPr/>
+        </p:nvCxnSpPr>
+        <p:spPr>
+          <a:xfrm>
+            <a:off x="205740" y="2301240"/>
+            <a:ext cx="11780520" cy="0"/>
+          </a:xfrm>
+          <a:prstGeom prst="line">
             <a:avLst/>
           </a:prstGeom>
           <a:ln>
             <a:prstDash val="sysDash"/>
-          </a:ln>
-        </p:spPr>
-        <p:style>
-          <a:lnRef idx="2">
-            <a:schemeClr val="dk1"/>
-          </a:lnRef>
-          <a:fillRef idx="1">
-            <a:schemeClr val="lt1"/>
-          </a:fillRef>
-          <a:effectRef idx="0">
-            <a:schemeClr val="dk1"/>
-          </a:effectRef>
-          <a:fontRef idx="minor">
-            <a:schemeClr val="dk1"/>
-          </a:fontRef>
-        </p:style>
-        <p:txBody>
-          <a:bodyPr rtlCol="0" anchor="ctr"/>
-          <a:lstStyle/>
-          <a:p>
-            <a:pPr algn="ctr"/>
-            <a:endParaRPr lang="en-US"/>
-          </a:p>
-        </p:txBody>
-      </p:sp>
-      <p:cxnSp>
-        <p:nvCxnSpPr>
-          <p:cNvPr id="27" name="Straight Arrow Connector 26">
-            <a:extLst>
-              <a:ext uri="{FF2B5EF4-FFF2-40B4-BE49-F238E27FC236}">
-                <a16:creationId xmlns:a16="http://schemas.microsoft.com/office/drawing/2014/main" id="{364A479F-BC19-CBAA-822A-1648D1BB1EDA}"/>
-              </a:ext>
-            </a:extLst>
-          </p:cNvPr>
-          <p:cNvCxnSpPr>
-            <a:cxnSpLocks/>
-          </p:cNvCxnSpPr>
-          <p:nvPr/>
-        </p:nvCxnSpPr>
-        <p:spPr>
-          <a:xfrm>
-            <a:off x="4504178" y="3993360"/>
-            <a:ext cx="548769" cy="0"/>
-          </a:xfrm>
-          <a:prstGeom prst="straightConnector1">
-            <a:avLst/>
-          </a:prstGeom>
-          <a:ln w="57150">
-            <a:tailEnd type="triangle"/>
           </a:ln>
         </p:spPr>
         <p:style>
@@ -3419,44 +3479,37 @@
       </p:cxnSp>
       <p:cxnSp>
         <p:nvCxnSpPr>
-          <p:cNvPr id="372" name="Connector: Elbow 371">
-            <a:extLst>
-              <a:ext uri="{FF2B5EF4-FFF2-40B4-BE49-F238E27FC236}">
-                <a16:creationId xmlns:a16="http://schemas.microsoft.com/office/drawing/2014/main" id="{267B0ACE-B949-682E-9B50-EE81F39C7C8F}"/>
-              </a:ext>
-            </a:extLst>
-          </p:cNvPr>
-          <p:cNvCxnSpPr>
-            <a:cxnSpLocks/>
-            <a:stCxn id="4" idx="4"/>
-            <a:endCxn id="9" idx="2"/>
-          </p:cNvCxnSpPr>
+          <p:cNvPr id="42" name="Straight Connector 41">
+            <a:extLst>
+              <a:ext uri="{FF2B5EF4-FFF2-40B4-BE49-F238E27FC236}">
+                <a16:creationId xmlns:a16="http://schemas.microsoft.com/office/drawing/2014/main" id="{7257D390-00BE-FDAF-434F-BB01F9AFA01A}"/>
+              </a:ext>
+            </a:extLst>
+          </p:cNvPr>
+          <p:cNvCxnSpPr/>
           <p:nvPr/>
         </p:nvCxnSpPr>
         <p:spPr>
-          <a:xfrm flipV="1">
-            <a:off x="3774723" y="1371516"/>
-            <a:ext cx="3936070" cy="4385897"/>
-          </a:xfrm>
-          <a:prstGeom prst="bentConnector2">
-            <a:avLst/>
-          </a:prstGeom>
-          <a:ln w="57150">
-            <a:solidFill>
-              <a:schemeClr val="tx1"/>
-            </a:solidFill>
-            <a:tailEnd type="triangle"/>
+          <a:xfrm>
+            <a:off x="205739" y="1577340"/>
+            <a:ext cx="11780520" cy="0"/>
+          </a:xfrm>
+          <a:prstGeom prst="line">
+            <a:avLst/>
+          </a:prstGeom>
+          <a:ln>
+            <a:prstDash val="sysDash"/>
           </a:ln>
         </p:spPr>
         <p:style>
           <a:lnRef idx="2">
-            <a:schemeClr val="accent1"/>
+            <a:schemeClr val="dk1"/>
           </a:lnRef>
           <a:fillRef idx="0">
-            <a:schemeClr val="accent1"/>
+            <a:schemeClr val="dk1"/>
           </a:fillRef>
           <a:effectRef idx="1">
-            <a:schemeClr val="accent1"/>
+            <a:schemeClr val="dk1"/>
           </a:effectRef>
           <a:fontRef idx="minor">
             <a:schemeClr val="tx1"/>
@@ -3465,10 +3518,10 @@
       </p:cxnSp>
       <p:cxnSp>
         <p:nvCxnSpPr>
-          <p:cNvPr id="231" name="Straight Arrow Connector 230">
-            <a:extLst>
-              <a:ext uri="{FF2B5EF4-FFF2-40B4-BE49-F238E27FC236}">
-                <a16:creationId xmlns:a16="http://schemas.microsoft.com/office/drawing/2014/main" id="{F8E29193-21E0-C7A7-B532-5AD2B98A37D1}"/>
+          <p:cNvPr id="43" name="Straight Connector 42">
+            <a:extLst>
+              <a:ext uri="{FF2B5EF4-FFF2-40B4-BE49-F238E27FC236}">
+                <a16:creationId xmlns:a16="http://schemas.microsoft.com/office/drawing/2014/main" id="{F8F88B62-4A9E-BB16-2286-15304A4F5BF9}"/>
               </a:ext>
             </a:extLst>
           </p:cNvPr>
@@ -3479,14 +3532,14 @@
         </p:nvCxnSpPr>
         <p:spPr>
           <a:xfrm>
-            <a:off x="4470511" y="1155268"/>
-            <a:ext cx="336175" cy="0"/>
-          </a:xfrm>
-          <a:prstGeom prst="straightConnector1">
-            <a:avLst/>
-          </a:prstGeom>
-          <a:ln w="57150">
-            <a:tailEnd type="triangle"/>
+            <a:off x="4082391" y="716280"/>
+            <a:ext cx="0" cy="6111240"/>
+          </a:xfrm>
+          <a:prstGeom prst="line">
+            <a:avLst/>
+          </a:prstGeom>
+          <a:ln>
+            <a:prstDash val="sysDash"/>
           </a:ln>
         </p:spPr>
         <p:style>
@@ -3506,10 +3559,10 @@
       </p:cxnSp>
       <p:cxnSp>
         <p:nvCxnSpPr>
-          <p:cNvPr id="237" name="Straight Arrow Connector 236">
-            <a:extLst>
-              <a:ext uri="{FF2B5EF4-FFF2-40B4-BE49-F238E27FC236}">
-                <a16:creationId xmlns:a16="http://schemas.microsoft.com/office/drawing/2014/main" id="{D72EAF38-5B7A-2270-AA4A-0A29382397CE}"/>
+          <p:cNvPr id="49" name="Straight Connector 48">
+            <a:extLst>
+              <a:ext uri="{FF2B5EF4-FFF2-40B4-BE49-F238E27FC236}">
+                <a16:creationId xmlns:a16="http://schemas.microsoft.com/office/drawing/2014/main" id="{16BCED21-9891-DB1C-E629-75EAE9E94256}"/>
               </a:ext>
             </a:extLst>
           </p:cNvPr>
@@ -3520,14 +3573,14 @@
         </p:nvCxnSpPr>
         <p:spPr>
           <a:xfrm>
-            <a:off x="1553824" y="1161490"/>
-            <a:ext cx="1156392" cy="0"/>
-          </a:xfrm>
-          <a:prstGeom prst="straightConnector1">
-            <a:avLst/>
-          </a:prstGeom>
-          <a:ln w="57150">
-            <a:tailEnd type="triangle"/>
+            <a:off x="8067651" y="754380"/>
+            <a:ext cx="0" cy="6111240"/>
+          </a:xfrm>
+          <a:prstGeom prst="line">
+            <a:avLst/>
+          </a:prstGeom>
+          <a:ln>
+            <a:prstDash val="sysDash"/>
           </a:ln>
         </p:spPr>
         <p:style>
@@ -3547,57 +3600,10 @@
       </p:cxnSp>
       <p:sp>
         <p:nvSpPr>
-          <p:cNvPr id="4" name="Flowchart: Magnetic Disk 3">
-            <a:extLst>
-              <a:ext uri="{FF2B5EF4-FFF2-40B4-BE49-F238E27FC236}">
-                <a16:creationId xmlns:a16="http://schemas.microsoft.com/office/drawing/2014/main" id="{B15B1171-252B-47F1-F099-9463350302DA}"/>
-              </a:ext>
-            </a:extLst>
-          </p:cNvPr>
-          <p:cNvSpPr/>
-          <p:nvPr/>
-        </p:nvSpPr>
-        <p:spPr>
-          <a:xfrm>
-            <a:off x="2459631" y="5243705"/>
-            <a:ext cx="1315092" cy="1027415"/>
-          </a:xfrm>
-          <a:prstGeom prst="flowChartMagneticDisk">
-            <a:avLst/>
-          </a:prstGeom>
-        </p:spPr>
-        <p:style>
-          <a:lnRef idx="2">
-            <a:schemeClr val="dk1"/>
-          </a:lnRef>
-          <a:fillRef idx="1">
-            <a:schemeClr val="lt1"/>
-          </a:fillRef>
-          <a:effectRef idx="0">
-            <a:schemeClr val="dk1"/>
-          </a:effectRef>
-          <a:fontRef idx="minor">
-            <a:schemeClr val="dk1"/>
-          </a:fontRef>
-        </p:style>
-        <p:txBody>
-          <a:bodyPr rtlCol="0" anchor="ctr"/>
-          <a:lstStyle/>
-          <a:p>
-            <a:pPr algn="ctr"/>
-            <a:endParaRPr lang="en-US" sz="1200" dirty="0">
-              <a:latin typeface="Poppins" panose="00000800000000000000" pitchFamily="2" charset="0"/>
-              <a:cs typeface="Poppins" panose="00000800000000000000" pitchFamily="2" charset="0"/>
-            </a:endParaRPr>
-          </a:p>
-        </p:txBody>
-      </p:sp>
-      <p:sp>
-        <p:nvSpPr>
-          <p:cNvPr id="5" name="TextBox 4">
-            <a:extLst>
-              <a:ext uri="{FF2B5EF4-FFF2-40B4-BE49-F238E27FC236}">
-                <a16:creationId xmlns:a16="http://schemas.microsoft.com/office/drawing/2014/main" id="{F6A668AB-9C81-9C36-6EF0-E9B7BB6D2090}"/>
+          <p:cNvPr id="50" name="TextBox 49">
+            <a:extLst>
+              <a:ext uri="{FF2B5EF4-FFF2-40B4-BE49-F238E27FC236}">
+                <a16:creationId xmlns:a16="http://schemas.microsoft.com/office/drawing/2014/main" id="{2A0B98FD-0C18-03AE-1090-95DEB623139F}"/>
               </a:ext>
             </a:extLst>
           </p:cNvPr>
@@ -3606,8 +3612,8 @@
         </p:nvSpPr>
         <p:spPr>
           <a:xfrm>
-            <a:off x="1974016" y="6357902"/>
-            <a:ext cx="2286321" cy="461665"/>
+            <a:off x="2916966" y="156210"/>
+            <a:ext cx="6358065" cy="584775"/>
           </a:xfrm>
           <a:prstGeom prst="rect">
             <a:avLst/>
@@ -3622,1833 +3628,19 @@
           <a:p>
             <a:pPr algn="ctr"/>
             <a:r>
-              <a:rPr lang="en-US" sz="1200" dirty="0">
-                <a:latin typeface="Poppins" panose="00000800000000000000" pitchFamily="2" charset="0"/>
-                <a:cs typeface="Poppins" panose="00000800000000000000" pitchFamily="2" charset="0"/>
-              </a:rPr>
-              <a:t>Plantar Pressure images </a:t>
-            </a:r>
-          </a:p>
-          <a:p>
-            <a:pPr algn="ctr"/>
-            <a:r>
-              <a:rPr lang="en-US" sz="1200" dirty="0">
-                <a:latin typeface="Poppins" panose="00000800000000000000" pitchFamily="2" charset="0"/>
-                <a:cs typeface="Poppins" panose="00000800000000000000" pitchFamily="2" charset="0"/>
-              </a:rPr>
-              <a:t>Dataset </a:t>
-            </a:r>
-          </a:p>
-        </p:txBody>
-      </p:sp>
-      <p:cxnSp>
-        <p:nvCxnSpPr>
-          <p:cNvPr id="7" name="Straight Arrow Connector 6">
-            <a:extLst>
-              <a:ext uri="{FF2B5EF4-FFF2-40B4-BE49-F238E27FC236}">
-                <a16:creationId xmlns:a16="http://schemas.microsoft.com/office/drawing/2014/main" id="{C995AEB9-C39F-757A-94B8-1DEDE6FB29C7}"/>
-              </a:ext>
-            </a:extLst>
-          </p:cNvPr>
-          <p:cNvCxnSpPr>
-            <a:cxnSpLocks/>
-            <a:stCxn id="4" idx="2"/>
-            <a:endCxn id="8" idx="3"/>
-          </p:cNvCxnSpPr>
-          <p:nvPr/>
-        </p:nvCxnSpPr>
-        <p:spPr>
-          <a:xfrm flipH="1" flipV="1">
-            <a:off x="1958945" y="5739126"/>
-            <a:ext cx="500686" cy="18287"/>
-          </a:xfrm>
-          <a:prstGeom prst="straightConnector1">
-            <a:avLst/>
-          </a:prstGeom>
-          <a:ln w="57150">
-            <a:tailEnd type="triangle"/>
-          </a:ln>
-        </p:spPr>
-        <p:style>
-          <a:lnRef idx="2">
-            <a:schemeClr val="dk1"/>
-          </a:lnRef>
-          <a:fillRef idx="0">
-            <a:schemeClr val="dk1"/>
-          </a:fillRef>
-          <a:effectRef idx="1">
-            <a:schemeClr val="dk1"/>
-          </a:effectRef>
-          <a:fontRef idx="minor">
-            <a:schemeClr val="tx1"/>
-          </a:fontRef>
-        </p:style>
-      </p:cxnSp>
-      <p:sp>
-        <p:nvSpPr>
-          <p:cNvPr id="8" name="Rectangle: Rounded Corners 7">
-            <a:extLst>
-              <a:ext uri="{FF2B5EF4-FFF2-40B4-BE49-F238E27FC236}">
-                <a16:creationId xmlns:a16="http://schemas.microsoft.com/office/drawing/2014/main" id="{716059DD-607C-DFCA-E0F6-25CE59EBDEB8}"/>
-              </a:ext>
-            </a:extLst>
-          </p:cNvPr>
-          <p:cNvSpPr/>
-          <p:nvPr/>
-        </p:nvSpPr>
-        <p:spPr>
-          <a:xfrm>
-            <a:off x="464917" y="5470716"/>
-            <a:ext cx="1494028" cy="536820"/>
-          </a:xfrm>
-          <a:prstGeom prst="roundRect">
-            <a:avLst/>
-          </a:prstGeom>
-          <a:ln w="19050"/>
-        </p:spPr>
-        <p:style>
-          <a:lnRef idx="2">
-            <a:schemeClr val="dk1"/>
-          </a:lnRef>
-          <a:fillRef idx="1">
-            <a:schemeClr val="lt1"/>
-          </a:fillRef>
-          <a:effectRef idx="0">
-            <a:schemeClr val="dk1"/>
-          </a:effectRef>
-          <a:fontRef idx="minor">
-            <a:schemeClr val="dk1"/>
-          </a:fontRef>
-        </p:style>
-        <p:txBody>
-          <a:bodyPr rtlCol="0" anchor="ctr"/>
-          <a:lstStyle/>
-          <a:p>
-            <a:pPr algn="ctr"/>
-            <a:r>
-              <a:rPr lang="en-US" sz="1200" dirty="0">
-                <a:latin typeface="Poppins" panose="00000800000000000000" pitchFamily="2" charset="0"/>
-                <a:cs typeface="Poppins" panose="00000800000000000000" pitchFamily="2" charset="0"/>
-              </a:rPr>
-              <a:t>Train set 80%</a:t>
-            </a:r>
-          </a:p>
-        </p:txBody>
-      </p:sp>
-      <p:sp>
-        <p:nvSpPr>
-          <p:cNvPr id="9" name="Rectangle: Rounded Corners 8">
-            <a:extLst>
-              <a:ext uri="{FF2B5EF4-FFF2-40B4-BE49-F238E27FC236}">
-                <a16:creationId xmlns:a16="http://schemas.microsoft.com/office/drawing/2014/main" id="{84B9088E-73D8-5531-35B5-031A2210B823}"/>
-              </a:ext>
-            </a:extLst>
-          </p:cNvPr>
-          <p:cNvSpPr/>
-          <p:nvPr/>
-        </p:nvSpPr>
-        <p:spPr>
-          <a:xfrm>
-            <a:off x="7056992" y="843296"/>
-            <a:ext cx="1307602" cy="528220"/>
-          </a:xfrm>
-          <a:prstGeom prst="roundRect">
-            <a:avLst/>
-          </a:prstGeom>
-          <a:ln w="19050"/>
-        </p:spPr>
-        <p:style>
-          <a:lnRef idx="2">
-            <a:schemeClr val="dk1"/>
-          </a:lnRef>
-          <a:fillRef idx="1">
-            <a:schemeClr val="lt1"/>
-          </a:fillRef>
-          <a:effectRef idx="0">
-            <a:schemeClr val="dk1"/>
-          </a:effectRef>
-          <a:fontRef idx="minor">
-            <a:schemeClr val="dk1"/>
-          </a:fontRef>
-        </p:style>
-        <p:txBody>
-          <a:bodyPr rtlCol="0" anchor="ctr"/>
-          <a:lstStyle/>
-          <a:p>
-            <a:pPr algn="ctr"/>
-            <a:r>
-              <a:rPr lang="en-US" sz="1200" dirty="0">
-                <a:latin typeface="Poppins" panose="00000800000000000000" pitchFamily="2" charset="0"/>
-                <a:cs typeface="Poppins" panose="00000800000000000000" pitchFamily="2" charset="0"/>
-              </a:rPr>
-              <a:t>Test set 20%</a:t>
-            </a:r>
-          </a:p>
-        </p:txBody>
-      </p:sp>
-      <p:sp>
-        <p:nvSpPr>
-          <p:cNvPr id="13" name="Rectangle 12">
-            <a:extLst>
-              <a:ext uri="{FF2B5EF4-FFF2-40B4-BE49-F238E27FC236}">
-                <a16:creationId xmlns:a16="http://schemas.microsoft.com/office/drawing/2014/main" id="{3F7AD8CC-B9CE-0793-5FB6-F28983A66092}"/>
-              </a:ext>
-            </a:extLst>
-          </p:cNvPr>
-          <p:cNvSpPr>
-            <a:spLocks/>
-          </p:cNvSpPr>
-          <p:nvPr/>
-        </p:nvSpPr>
-        <p:spPr>
-          <a:xfrm>
-            <a:off x="5052947" y="2345811"/>
-            <a:ext cx="5879628" cy="2775588"/>
-          </a:xfrm>
-          <a:prstGeom prst="rect">
-            <a:avLst/>
-          </a:prstGeom>
-          <a:ln>
-            <a:prstDash val="sysDash"/>
-          </a:ln>
-        </p:spPr>
-        <p:style>
-          <a:lnRef idx="2">
-            <a:schemeClr val="dk1"/>
-          </a:lnRef>
-          <a:fillRef idx="1">
-            <a:schemeClr val="lt1"/>
-          </a:fillRef>
-          <a:effectRef idx="0">
-            <a:schemeClr val="dk1"/>
-          </a:effectRef>
-          <a:fontRef idx="minor">
-            <a:schemeClr val="dk1"/>
-          </a:fontRef>
-        </p:style>
-        <p:txBody>
-          <a:bodyPr rtlCol="0" anchor="ctr"/>
-          <a:lstStyle/>
-          <a:p>
-            <a:pPr algn="ctr"/>
-            <a:endParaRPr lang="en-US"/>
-          </a:p>
-        </p:txBody>
-      </p:sp>
-      <p:sp>
-        <p:nvSpPr>
-          <p:cNvPr id="14" name="TextBox 13">
-            <a:extLst>
-              <a:ext uri="{FF2B5EF4-FFF2-40B4-BE49-F238E27FC236}">
-                <a16:creationId xmlns:a16="http://schemas.microsoft.com/office/drawing/2014/main" id="{5C9A29E6-B43E-741F-7C5F-394CFDBAAD96}"/>
-              </a:ext>
-            </a:extLst>
-          </p:cNvPr>
-          <p:cNvSpPr txBox="1"/>
-          <p:nvPr/>
-        </p:nvSpPr>
-        <p:spPr>
-          <a:xfrm>
-            <a:off x="7754043" y="6042135"/>
-            <a:ext cx="4306324" cy="584775"/>
-          </a:xfrm>
-          <a:prstGeom prst="rect">
-            <a:avLst/>
-          </a:prstGeom>
-          <a:noFill/>
-        </p:spPr>
-        <p:txBody>
-          <a:bodyPr wrap="square" rtlCol="0">
-            <a:spAutoFit/>
-          </a:bodyPr>
-          <a:lstStyle/>
-          <a:p>
-            <a:pPr algn="ctr"/>
-            <a:r>
               <a:rPr lang="en-US" sz="3200" dirty="0">
                 <a:latin typeface="Poppins" panose="00000800000000000000" pitchFamily="2" charset="0"/>
                 <a:cs typeface="Poppins" panose="00000800000000000000" pitchFamily="2" charset="0"/>
               </a:rPr>
-              <a:t>CNN Model Pipeline</a:t>
-            </a:r>
-          </a:p>
-        </p:txBody>
-      </p:sp>
-      <p:sp>
-        <p:nvSpPr>
-          <p:cNvPr id="15" name="Rectangle 14">
-            <a:extLst>
-              <a:ext uri="{FF2B5EF4-FFF2-40B4-BE49-F238E27FC236}">
-                <a16:creationId xmlns:a16="http://schemas.microsoft.com/office/drawing/2014/main" id="{D5A6BA5C-5583-E3A3-A9E0-CDB02E5343E5}"/>
-              </a:ext>
-            </a:extLst>
-          </p:cNvPr>
-          <p:cNvSpPr/>
-          <p:nvPr/>
-        </p:nvSpPr>
-        <p:spPr>
-          <a:xfrm>
-            <a:off x="5241641" y="2636800"/>
-            <a:ext cx="2593372" cy="1783902"/>
-          </a:xfrm>
-          <a:prstGeom prst="rect">
-            <a:avLst/>
-          </a:prstGeom>
-        </p:spPr>
-        <p:style>
-          <a:lnRef idx="2">
-            <a:schemeClr val="dk1"/>
-          </a:lnRef>
-          <a:fillRef idx="1">
-            <a:schemeClr val="lt1"/>
-          </a:fillRef>
-          <a:effectRef idx="0">
-            <a:schemeClr val="dk1"/>
-          </a:effectRef>
-          <a:fontRef idx="minor">
-            <a:schemeClr val="dk1"/>
-          </a:fontRef>
-        </p:style>
-        <p:txBody>
-          <a:bodyPr rtlCol="0" anchor="ctr"/>
-          <a:lstStyle/>
-          <a:p>
-            <a:pPr algn="ctr"/>
-            <a:endParaRPr lang="en-US"/>
-          </a:p>
-        </p:txBody>
-      </p:sp>
-      <p:sp>
-        <p:nvSpPr>
-          <p:cNvPr id="16" name="TextBox 15">
-            <a:extLst>
-              <a:ext uri="{FF2B5EF4-FFF2-40B4-BE49-F238E27FC236}">
-                <a16:creationId xmlns:a16="http://schemas.microsoft.com/office/drawing/2014/main" id="{9157B6E7-5C4F-F806-90FA-2999289DD111}"/>
-              </a:ext>
-            </a:extLst>
-          </p:cNvPr>
-          <p:cNvSpPr txBox="1"/>
-          <p:nvPr/>
-        </p:nvSpPr>
-        <p:spPr>
-          <a:xfrm>
-            <a:off x="5340102" y="4489057"/>
-            <a:ext cx="2350213" cy="523220"/>
-          </a:xfrm>
-          <a:prstGeom prst="rect">
-            <a:avLst/>
-          </a:prstGeom>
-          <a:noFill/>
-        </p:spPr>
-        <p:txBody>
-          <a:bodyPr wrap="square" rtlCol="0">
-            <a:spAutoFit/>
-          </a:bodyPr>
-          <a:lstStyle/>
-          <a:p>
-            <a:pPr algn="ctr"/>
-            <a:r>
-              <a:rPr lang="en-US" sz="1400" dirty="0">
-                <a:latin typeface="Poppins" panose="00000800000000000000" pitchFamily="2" charset="0"/>
-                <a:cs typeface="Poppins" panose="00000800000000000000" pitchFamily="2" charset="0"/>
-              </a:rPr>
-              <a:t>CNN Backbone </a:t>
-            </a:r>
-            <a:br>
-              <a:rPr lang="en-US" sz="1400" dirty="0">
-                <a:latin typeface="Poppins" panose="00000800000000000000" pitchFamily="2" charset="0"/>
-                <a:cs typeface="Poppins" panose="00000800000000000000" pitchFamily="2" charset="0"/>
-              </a:rPr>
-            </a:br>
-            <a:r>
-              <a:rPr lang="en-US" sz="1400" dirty="0">
-                <a:latin typeface="Poppins" panose="00000800000000000000" pitchFamily="2" charset="0"/>
-                <a:cs typeface="Poppins" panose="00000800000000000000" pitchFamily="2" charset="0"/>
-              </a:rPr>
-              <a:t>(Feature Extractor)</a:t>
-            </a:r>
-          </a:p>
-        </p:txBody>
-      </p:sp>
-      <p:sp>
-        <p:nvSpPr>
-          <p:cNvPr id="17" name="TextBox 16">
-            <a:extLst>
-              <a:ext uri="{FF2B5EF4-FFF2-40B4-BE49-F238E27FC236}">
-                <a16:creationId xmlns:a16="http://schemas.microsoft.com/office/drawing/2014/main" id="{1123F81B-F3F5-EAA8-7BF7-B52072F44763}"/>
-              </a:ext>
-            </a:extLst>
-          </p:cNvPr>
-          <p:cNvSpPr txBox="1"/>
-          <p:nvPr/>
-        </p:nvSpPr>
-        <p:spPr>
-          <a:xfrm>
-            <a:off x="5241641" y="2705294"/>
-            <a:ext cx="2585554" cy="1015663"/>
-          </a:xfrm>
-          <a:prstGeom prst="rect">
-            <a:avLst/>
-          </a:prstGeom>
-          <a:noFill/>
-        </p:spPr>
-        <p:txBody>
-          <a:bodyPr wrap="square" rtlCol="0">
-            <a:spAutoFit/>
-          </a:bodyPr>
-          <a:lstStyle/>
-          <a:p>
-            <a:pPr algn="ctr"/>
-            <a:r>
-              <a:rPr lang="en-US" sz="1200" dirty="0">
-                <a:solidFill>
-                  <a:srgbClr val="C00000"/>
-                </a:solidFill>
-                <a:latin typeface="Poppins" panose="00000800000000000000" pitchFamily="2" charset="0"/>
-                <a:cs typeface="Poppins" panose="00000800000000000000" pitchFamily="2" charset="0"/>
-              </a:rPr>
-              <a:t>Phase 1 Frozen layer</a:t>
-            </a:r>
-            <a:br>
-              <a:rPr lang="en-US" sz="1200" dirty="0">
-                <a:latin typeface="Poppins" panose="00000800000000000000" pitchFamily="2" charset="0"/>
-                <a:cs typeface="Poppins" panose="00000800000000000000" pitchFamily="2" charset="0"/>
-              </a:rPr>
-            </a:br>
-            <a:r>
-              <a:rPr lang="en-US" sz="1200" dirty="0">
-                <a:solidFill>
-                  <a:srgbClr val="C00000"/>
-                </a:solidFill>
-                <a:latin typeface="Poppins" panose="00000800000000000000" pitchFamily="2" charset="0"/>
-                <a:cs typeface="Poppins" panose="00000800000000000000" pitchFamily="2" charset="0"/>
-              </a:rPr>
-              <a:t>(Pre-trained with ImageNet)</a:t>
-            </a:r>
-          </a:p>
-          <a:p>
-            <a:pPr algn="ctr"/>
-            <a:r>
-              <a:rPr lang="en-US" sz="1200" dirty="0">
-                <a:latin typeface="Poppins" panose="00000800000000000000" pitchFamily="2" charset="0"/>
-                <a:cs typeface="Poppins" panose="00000800000000000000" pitchFamily="2" charset="0"/>
-              </a:rPr>
-              <a:t>Epochs = 50</a:t>
-            </a:r>
-          </a:p>
-          <a:p>
-            <a:pPr algn="ctr"/>
-            <a:r>
-              <a:rPr lang="en-US" sz="1200" dirty="0">
-                <a:latin typeface="Poppins" panose="00000800000000000000" pitchFamily="2" charset="0"/>
-                <a:cs typeface="Poppins" panose="00000800000000000000" pitchFamily="2" charset="0"/>
-              </a:rPr>
-              <a:t>Patience = 5</a:t>
-            </a:r>
-          </a:p>
-          <a:p>
-            <a:pPr algn="ctr"/>
-            <a:endParaRPr lang="en-US" sz="1200" dirty="0">
-              <a:latin typeface="Poppins" panose="00000800000000000000" pitchFamily="2" charset="0"/>
-              <a:cs typeface="Poppins" panose="00000800000000000000" pitchFamily="2" charset="0"/>
-            </a:endParaRPr>
-          </a:p>
-        </p:txBody>
-      </p:sp>
-      <p:sp>
-        <p:nvSpPr>
-          <p:cNvPr id="19" name="TextBox 18">
-            <a:extLst>
-              <a:ext uri="{FF2B5EF4-FFF2-40B4-BE49-F238E27FC236}">
-                <a16:creationId xmlns:a16="http://schemas.microsoft.com/office/drawing/2014/main" id="{C4FACD48-1960-D3A4-D4B8-0DFD1A99B423}"/>
-              </a:ext>
-            </a:extLst>
-          </p:cNvPr>
-          <p:cNvSpPr txBox="1"/>
-          <p:nvPr/>
-        </p:nvSpPr>
-        <p:spPr>
-          <a:xfrm>
-            <a:off x="5255611" y="3591766"/>
-            <a:ext cx="2579402" cy="830997"/>
-          </a:xfrm>
-          <a:prstGeom prst="rect">
-            <a:avLst/>
-          </a:prstGeom>
-          <a:noFill/>
-        </p:spPr>
-        <p:txBody>
-          <a:bodyPr wrap="square" rtlCol="0">
-            <a:spAutoFit/>
-          </a:bodyPr>
-          <a:lstStyle/>
-          <a:p>
-            <a:pPr algn="ctr"/>
-            <a:r>
-              <a:rPr lang="en-US" sz="1200" dirty="0">
-                <a:solidFill>
-                  <a:srgbClr val="7030A0"/>
-                </a:solidFill>
-                <a:latin typeface="Poppins" panose="00000800000000000000" pitchFamily="2" charset="0"/>
-                <a:cs typeface="Poppins" panose="00000800000000000000" pitchFamily="2" charset="0"/>
-              </a:rPr>
-              <a:t>Phase 2 Unfreeze Top 30% </a:t>
-            </a:r>
-            <a:br>
-              <a:rPr lang="en-US" sz="1200" dirty="0">
-                <a:latin typeface="Poppins" panose="00000800000000000000" pitchFamily="2" charset="0"/>
-                <a:cs typeface="Poppins" panose="00000800000000000000" pitchFamily="2" charset="0"/>
-              </a:rPr>
-            </a:br>
-            <a:r>
-              <a:rPr lang="en-US" sz="1200" dirty="0">
-                <a:solidFill>
-                  <a:srgbClr val="7030A0"/>
-                </a:solidFill>
-                <a:latin typeface="Poppins" panose="00000800000000000000" pitchFamily="2" charset="0"/>
-                <a:cs typeface="Poppins" panose="00000800000000000000" pitchFamily="2" charset="0"/>
-              </a:rPr>
-              <a:t>layer (Fine-tuning)</a:t>
-            </a:r>
-          </a:p>
-          <a:p>
-            <a:pPr algn="ctr"/>
-            <a:r>
-              <a:rPr lang="en-US" sz="1200" dirty="0">
-                <a:latin typeface="Poppins" panose="00000800000000000000" pitchFamily="2" charset="0"/>
-                <a:cs typeface="Poppins" panose="00000800000000000000" pitchFamily="2" charset="0"/>
-              </a:rPr>
-              <a:t>Epochs = 50</a:t>
-            </a:r>
-          </a:p>
-          <a:p>
-            <a:pPr algn="ctr"/>
-            <a:r>
-              <a:rPr lang="en-US" sz="1200" dirty="0">
-                <a:latin typeface="Poppins" panose="00000800000000000000" pitchFamily="2" charset="0"/>
-                <a:cs typeface="Poppins" panose="00000800000000000000" pitchFamily="2" charset="0"/>
-              </a:rPr>
-              <a:t>Patience = 15</a:t>
-            </a:r>
-          </a:p>
-        </p:txBody>
-      </p:sp>
-      <p:cxnSp>
-        <p:nvCxnSpPr>
-          <p:cNvPr id="21" name="Straight Connector 20">
-            <a:extLst>
-              <a:ext uri="{FF2B5EF4-FFF2-40B4-BE49-F238E27FC236}">
-                <a16:creationId xmlns:a16="http://schemas.microsoft.com/office/drawing/2014/main" id="{7F2473FB-F6C9-E4A5-F677-D5EFE06BB503}"/>
-              </a:ext>
-            </a:extLst>
-          </p:cNvPr>
-          <p:cNvCxnSpPr>
-            <a:cxnSpLocks/>
-          </p:cNvCxnSpPr>
-          <p:nvPr/>
-        </p:nvCxnSpPr>
-        <p:spPr>
-          <a:xfrm>
-            <a:off x="5378630" y="3545607"/>
-            <a:ext cx="2319393" cy="0"/>
-          </a:xfrm>
-          <a:prstGeom prst="line">
-            <a:avLst/>
-          </a:prstGeom>
-          <a:ln>
-            <a:prstDash val="solid"/>
-          </a:ln>
-        </p:spPr>
-        <p:style>
-          <a:lnRef idx="2">
-            <a:schemeClr val="dk1"/>
-          </a:lnRef>
-          <a:fillRef idx="0">
-            <a:schemeClr val="dk1"/>
-          </a:fillRef>
-          <a:effectRef idx="1">
-            <a:schemeClr val="dk1"/>
-          </a:effectRef>
-          <a:fontRef idx="minor">
-            <a:schemeClr val="tx1"/>
-          </a:fontRef>
-        </p:style>
-      </p:cxnSp>
-      <p:cxnSp>
-        <p:nvCxnSpPr>
-          <p:cNvPr id="38" name="Straight Connector 37">
-            <a:extLst>
-              <a:ext uri="{FF2B5EF4-FFF2-40B4-BE49-F238E27FC236}">
-                <a16:creationId xmlns:a16="http://schemas.microsoft.com/office/drawing/2014/main" id="{89002E39-D0E1-6D81-41D4-99D563043749}"/>
-              </a:ext>
-            </a:extLst>
-          </p:cNvPr>
-          <p:cNvCxnSpPr>
-            <a:cxnSpLocks/>
-          </p:cNvCxnSpPr>
-          <p:nvPr/>
-        </p:nvCxnSpPr>
-        <p:spPr>
-          <a:xfrm flipH="1">
-            <a:off x="7960149" y="2458427"/>
-            <a:ext cx="15410" cy="2535763"/>
-          </a:xfrm>
-          <a:prstGeom prst="line">
-            <a:avLst/>
-          </a:prstGeom>
-          <a:ln>
-            <a:prstDash val="dash"/>
-          </a:ln>
-        </p:spPr>
-        <p:style>
-          <a:lnRef idx="2">
-            <a:schemeClr val="dk1"/>
-          </a:lnRef>
-          <a:fillRef idx="0">
-            <a:schemeClr val="dk1"/>
-          </a:fillRef>
-          <a:effectRef idx="1">
-            <a:schemeClr val="dk1"/>
-          </a:effectRef>
-          <a:fontRef idx="minor">
-            <a:schemeClr val="tx1"/>
-          </a:fontRef>
-        </p:style>
-      </p:cxnSp>
-      <p:sp>
-        <p:nvSpPr>
-          <p:cNvPr id="39" name="Rectangle 38">
-            <a:extLst>
-              <a:ext uri="{FF2B5EF4-FFF2-40B4-BE49-F238E27FC236}">
-                <a16:creationId xmlns:a16="http://schemas.microsoft.com/office/drawing/2014/main" id="{2048D14A-2236-C159-D71B-EA2E15F8F53D}"/>
-              </a:ext>
-            </a:extLst>
-          </p:cNvPr>
-          <p:cNvSpPr/>
-          <p:nvPr/>
-        </p:nvSpPr>
-        <p:spPr>
-          <a:xfrm>
-            <a:off x="8102399" y="2636800"/>
-            <a:ext cx="2632573" cy="1783902"/>
-          </a:xfrm>
-          <a:prstGeom prst="rect">
-            <a:avLst/>
-          </a:prstGeom>
-        </p:spPr>
-        <p:style>
-          <a:lnRef idx="2">
-            <a:schemeClr val="dk1"/>
-          </a:lnRef>
-          <a:fillRef idx="1">
-            <a:schemeClr val="lt1"/>
-          </a:fillRef>
-          <a:effectRef idx="0">
-            <a:schemeClr val="dk1"/>
-          </a:effectRef>
-          <a:fontRef idx="minor">
-            <a:schemeClr val="dk1"/>
-          </a:fontRef>
-        </p:style>
-        <p:txBody>
-          <a:bodyPr rtlCol="0" anchor="ctr"/>
-          <a:lstStyle/>
-          <a:p>
-            <a:pPr algn="ctr"/>
-            <a:endParaRPr lang="en-US"/>
-          </a:p>
-        </p:txBody>
-      </p:sp>
-      <p:sp>
-        <p:nvSpPr>
-          <p:cNvPr id="41" name="TextBox 40">
-            <a:extLst>
-              <a:ext uri="{FF2B5EF4-FFF2-40B4-BE49-F238E27FC236}">
-                <a16:creationId xmlns:a16="http://schemas.microsoft.com/office/drawing/2014/main" id="{38ED5D2C-441F-DE0A-1BDA-910F00BFD6D2}"/>
-              </a:ext>
-            </a:extLst>
-          </p:cNvPr>
-          <p:cNvSpPr txBox="1"/>
-          <p:nvPr/>
-        </p:nvSpPr>
-        <p:spPr>
-          <a:xfrm>
-            <a:off x="8218420" y="3077965"/>
-            <a:ext cx="2395038" cy="1066959"/>
-          </a:xfrm>
-          <a:prstGeom prst="rect">
-            <a:avLst/>
-          </a:prstGeom>
-          <a:noFill/>
-        </p:spPr>
-        <p:txBody>
-          <a:bodyPr wrap="square" rtlCol="0">
-            <a:spAutoFit/>
-          </a:bodyPr>
-          <a:lstStyle/>
-          <a:p>
-            <a:pPr algn="ctr">
-              <a:spcAft>
-                <a:spcPts val="130"/>
-              </a:spcAft>
-            </a:pPr>
-            <a:r>
-              <a:rPr lang="en-US" sz="1200" dirty="0">
-                <a:latin typeface="Poppins" panose="00000800000000000000" pitchFamily="2" charset="0"/>
-                <a:cs typeface="Poppins" panose="00000800000000000000" pitchFamily="2" charset="0"/>
-              </a:rPr>
-              <a:t>Global Average Pooling 2D</a:t>
-            </a:r>
-          </a:p>
-          <a:p>
-            <a:pPr algn="ctr">
-              <a:spcAft>
-                <a:spcPts val="130"/>
-              </a:spcAft>
-            </a:pPr>
-            <a:r>
-              <a:rPr lang="en-US" sz="1200" dirty="0">
-                <a:latin typeface="Poppins" panose="00000800000000000000" pitchFamily="2" charset="0"/>
-                <a:cs typeface="Poppins" panose="00000800000000000000" pitchFamily="2" charset="0"/>
-              </a:rPr>
-              <a:t>Dense (ReLU) + L2 + Dropout</a:t>
-            </a:r>
-          </a:p>
-          <a:p>
-            <a:pPr algn="ctr">
-              <a:spcAft>
-                <a:spcPts val="130"/>
-              </a:spcAft>
-            </a:pPr>
-            <a:r>
-              <a:rPr lang="en-US" sz="1200" dirty="0">
-                <a:latin typeface="Poppins" panose="00000800000000000000" pitchFamily="2" charset="0"/>
-                <a:cs typeface="Poppins" panose="00000800000000000000" pitchFamily="2" charset="0"/>
-              </a:rPr>
-              <a:t>Dense (ReLU) + L2 + Dropout</a:t>
-            </a:r>
-          </a:p>
-          <a:p>
-            <a:pPr algn="ctr">
-              <a:spcAft>
-                <a:spcPts val="130"/>
-              </a:spcAft>
-            </a:pPr>
-            <a:r>
-              <a:rPr lang="en-US" sz="1200" dirty="0">
-                <a:latin typeface="Poppins" panose="00000800000000000000" pitchFamily="2" charset="0"/>
-                <a:cs typeface="Poppins" panose="00000800000000000000" pitchFamily="2" charset="0"/>
-              </a:rPr>
-              <a:t>Dense (1, Sigmoid)</a:t>
-            </a:r>
-          </a:p>
-          <a:p>
-            <a:pPr algn="ctr">
-              <a:spcAft>
-                <a:spcPts val="130"/>
-              </a:spcAft>
-            </a:pPr>
-            <a:endParaRPr lang="en-US" sz="1200" dirty="0">
-              <a:latin typeface="Poppins" panose="00000800000000000000" pitchFamily="2" charset="0"/>
-              <a:cs typeface="Poppins" panose="00000800000000000000" pitchFamily="2" charset="0"/>
-            </a:endParaRPr>
-          </a:p>
-        </p:txBody>
-      </p:sp>
-      <p:sp>
-        <p:nvSpPr>
-          <p:cNvPr id="44" name="TextBox 43">
-            <a:extLst>
-              <a:ext uri="{FF2B5EF4-FFF2-40B4-BE49-F238E27FC236}">
-                <a16:creationId xmlns:a16="http://schemas.microsoft.com/office/drawing/2014/main" id="{38FF6E07-7966-A52C-7E3C-945E96A6E5B3}"/>
-              </a:ext>
-            </a:extLst>
-          </p:cNvPr>
-          <p:cNvSpPr txBox="1"/>
-          <p:nvPr/>
-        </p:nvSpPr>
-        <p:spPr>
-          <a:xfrm>
-            <a:off x="8650595" y="4532200"/>
-            <a:ext cx="1705959" cy="307777"/>
-          </a:xfrm>
-          <a:prstGeom prst="rect">
-            <a:avLst/>
-          </a:prstGeom>
-          <a:noFill/>
-        </p:spPr>
-        <p:txBody>
-          <a:bodyPr wrap="square" rtlCol="0">
-            <a:spAutoFit/>
-          </a:bodyPr>
-          <a:lstStyle/>
-          <a:p>
-            <a:r>
-              <a:rPr lang="en-US" sz="1400" dirty="0">
-                <a:latin typeface="Poppins" panose="00000800000000000000" pitchFamily="2" charset="0"/>
-                <a:cs typeface="Poppins" panose="00000800000000000000" pitchFamily="2" charset="0"/>
-              </a:rPr>
-              <a:t>Classifier Head</a:t>
-            </a:r>
-          </a:p>
-        </p:txBody>
-      </p:sp>
-      <p:cxnSp>
-        <p:nvCxnSpPr>
-          <p:cNvPr id="45" name="Straight Arrow Connector 44">
-            <a:extLst>
-              <a:ext uri="{FF2B5EF4-FFF2-40B4-BE49-F238E27FC236}">
-                <a16:creationId xmlns:a16="http://schemas.microsoft.com/office/drawing/2014/main" id="{270EE531-2786-9359-1681-B18F2B5D84FD}"/>
-              </a:ext>
-            </a:extLst>
-          </p:cNvPr>
-          <p:cNvCxnSpPr>
-            <a:cxnSpLocks/>
-          </p:cNvCxnSpPr>
-          <p:nvPr/>
-        </p:nvCxnSpPr>
-        <p:spPr>
-          <a:xfrm flipH="1" flipV="1">
-            <a:off x="2213467" y="2458427"/>
-            <a:ext cx="2845055" cy="2958"/>
-          </a:xfrm>
-          <a:prstGeom prst="straightConnector1">
-            <a:avLst/>
-          </a:prstGeom>
-          <a:ln w="57150">
-            <a:tailEnd type="triangle"/>
-          </a:ln>
-        </p:spPr>
-        <p:style>
-          <a:lnRef idx="2">
-            <a:schemeClr val="dk1"/>
-          </a:lnRef>
-          <a:fillRef idx="0">
-            <a:schemeClr val="dk1"/>
-          </a:fillRef>
-          <a:effectRef idx="1">
-            <a:schemeClr val="dk1"/>
-          </a:effectRef>
-          <a:fontRef idx="minor">
-            <a:schemeClr val="tx1"/>
-          </a:fontRef>
-        </p:style>
-      </p:cxnSp>
-      <p:sp>
-        <p:nvSpPr>
-          <p:cNvPr id="47" name="Rectangle: Rounded Corners 46">
-            <a:extLst>
-              <a:ext uri="{FF2B5EF4-FFF2-40B4-BE49-F238E27FC236}">
-                <a16:creationId xmlns:a16="http://schemas.microsoft.com/office/drawing/2014/main" id="{7C1F6072-42B6-7CF2-1DFD-0D0E542F09A6}"/>
-              </a:ext>
-            </a:extLst>
-          </p:cNvPr>
-          <p:cNvSpPr/>
-          <p:nvPr/>
-        </p:nvSpPr>
-        <p:spPr>
-          <a:xfrm>
-            <a:off x="356213" y="2144910"/>
-            <a:ext cx="1846220" cy="820159"/>
-          </a:xfrm>
-          <a:prstGeom prst="roundRect">
-            <a:avLst/>
-          </a:prstGeom>
-          <a:ln w="19050"/>
-        </p:spPr>
-        <p:style>
-          <a:lnRef idx="2">
-            <a:schemeClr val="dk1"/>
-          </a:lnRef>
-          <a:fillRef idx="1">
-            <a:schemeClr val="lt1"/>
-          </a:fillRef>
-          <a:effectRef idx="0">
-            <a:schemeClr val="dk1"/>
-          </a:effectRef>
-          <a:fontRef idx="minor">
-            <a:schemeClr val="dk1"/>
-          </a:fontRef>
-        </p:style>
-        <p:txBody>
-          <a:bodyPr rtlCol="0" anchor="ctr"/>
-          <a:lstStyle/>
-          <a:p>
-            <a:pPr algn="ctr"/>
-            <a:r>
-              <a:rPr lang="en-US" sz="1200" dirty="0">
-                <a:latin typeface="Poppins" panose="00000800000000000000" pitchFamily="2" charset="0"/>
-                <a:cs typeface="Poppins" panose="00000800000000000000" pitchFamily="2" charset="0"/>
-              </a:rPr>
-              <a:t>Backbone Selection</a:t>
-            </a:r>
-            <a:br>
-              <a:rPr lang="en-US" sz="1200" dirty="0">
-                <a:latin typeface="Poppins" panose="00000800000000000000" pitchFamily="2" charset="0"/>
-                <a:cs typeface="Poppins" panose="00000800000000000000" pitchFamily="2" charset="0"/>
-              </a:rPr>
-            </a:br>
-            <a:r>
-              <a:rPr lang="en-US" sz="1200" dirty="0">
-                <a:latin typeface="Poppins" panose="00000800000000000000" pitchFamily="2" charset="0"/>
-                <a:cs typeface="Poppins" panose="00000800000000000000" pitchFamily="2" charset="0"/>
-              </a:rPr>
-              <a:t>(EfficientNetB0, Resnet50 and ConvNeXt-Tiny)</a:t>
-            </a:r>
-          </a:p>
-        </p:txBody>
-      </p:sp>
-      <p:sp>
-        <p:nvSpPr>
-          <p:cNvPr id="52" name="Rectangle: Rounded Corners 51">
-            <a:extLst>
-              <a:ext uri="{FF2B5EF4-FFF2-40B4-BE49-F238E27FC236}">
-                <a16:creationId xmlns:a16="http://schemas.microsoft.com/office/drawing/2014/main" id="{3C6860B1-23BA-83EA-147C-C363CB12F20A}"/>
-              </a:ext>
-            </a:extLst>
-          </p:cNvPr>
-          <p:cNvSpPr/>
-          <p:nvPr/>
-        </p:nvSpPr>
-        <p:spPr>
-          <a:xfrm>
-            <a:off x="2710216" y="757568"/>
-            <a:ext cx="1760295" cy="719695"/>
-          </a:xfrm>
-          <a:prstGeom prst="roundRect">
-            <a:avLst/>
-          </a:prstGeom>
-          <a:ln w="19050"/>
-        </p:spPr>
-        <p:style>
-          <a:lnRef idx="2">
-            <a:schemeClr val="dk1"/>
-          </a:lnRef>
-          <a:fillRef idx="1">
-            <a:schemeClr val="lt1"/>
-          </a:fillRef>
-          <a:effectRef idx="0">
-            <a:schemeClr val="dk1"/>
-          </a:effectRef>
-          <a:fontRef idx="minor">
-            <a:schemeClr val="dk1"/>
-          </a:fontRef>
-        </p:style>
-        <p:txBody>
-          <a:bodyPr rtlCol="0" anchor="ctr"/>
-          <a:lstStyle/>
-          <a:p>
-            <a:pPr algn="ctr"/>
-            <a:r>
-              <a:rPr lang="en-US" sz="1200" dirty="0">
-                <a:latin typeface="Poppins" panose="00000800000000000000" pitchFamily="2" charset="0"/>
-                <a:cs typeface="Poppins" panose="00000800000000000000" pitchFamily="2" charset="0"/>
-              </a:rPr>
-              <a:t>Average optimal Threshold from Youden Index</a:t>
-            </a:r>
-          </a:p>
-        </p:txBody>
-      </p:sp>
-      <p:cxnSp>
-        <p:nvCxnSpPr>
-          <p:cNvPr id="53" name="Straight Arrow Connector 52">
-            <a:extLst>
-              <a:ext uri="{FF2B5EF4-FFF2-40B4-BE49-F238E27FC236}">
-                <a16:creationId xmlns:a16="http://schemas.microsoft.com/office/drawing/2014/main" id="{7EAC1788-1FF9-DF00-F2CD-B90BC2DEDFE6}"/>
-              </a:ext>
-            </a:extLst>
-          </p:cNvPr>
-          <p:cNvCxnSpPr>
-            <a:cxnSpLocks/>
-            <a:stCxn id="47" idx="0"/>
-            <a:endCxn id="143" idx="2"/>
-          </p:cNvCxnSpPr>
-          <p:nvPr/>
-        </p:nvCxnSpPr>
-        <p:spPr>
-          <a:xfrm flipH="1" flipV="1">
-            <a:off x="1277584" y="1807327"/>
-            <a:ext cx="1739" cy="337583"/>
-          </a:xfrm>
-          <a:prstGeom prst="straightConnector1">
-            <a:avLst/>
-          </a:prstGeom>
-          <a:ln w="57150">
-            <a:tailEnd type="triangle"/>
-          </a:ln>
-        </p:spPr>
-        <p:style>
-          <a:lnRef idx="2">
-            <a:schemeClr val="dk1"/>
-          </a:lnRef>
-          <a:fillRef idx="0">
-            <a:schemeClr val="dk1"/>
-          </a:fillRef>
-          <a:effectRef idx="1">
-            <a:schemeClr val="dk1"/>
-          </a:effectRef>
-          <a:fontRef idx="minor">
-            <a:schemeClr val="tx1"/>
-          </a:fontRef>
-        </p:style>
-      </p:cxnSp>
-      <p:sp>
-        <p:nvSpPr>
-          <p:cNvPr id="59" name="Rectangle: Rounded Corners 58">
-            <a:extLst>
-              <a:ext uri="{FF2B5EF4-FFF2-40B4-BE49-F238E27FC236}">
-                <a16:creationId xmlns:a16="http://schemas.microsoft.com/office/drawing/2014/main" id="{8052D859-085D-C00B-2AC0-2F5C5F739C35}"/>
-              </a:ext>
-            </a:extLst>
-          </p:cNvPr>
-          <p:cNvSpPr/>
-          <p:nvPr/>
-        </p:nvSpPr>
-        <p:spPr>
-          <a:xfrm>
-            <a:off x="4806686" y="722375"/>
-            <a:ext cx="1847441" cy="785818"/>
-          </a:xfrm>
-          <a:prstGeom prst="roundRect">
-            <a:avLst/>
-          </a:prstGeom>
-          <a:ln w="19050"/>
-        </p:spPr>
-        <p:style>
-          <a:lnRef idx="2">
-            <a:schemeClr val="dk1"/>
-          </a:lnRef>
-          <a:fillRef idx="1">
-            <a:schemeClr val="lt1"/>
-          </a:fillRef>
-          <a:effectRef idx="0">
-            <a:schemeClr val="dk1"/>
-          </a:effectRef>
-          <a:fontRef idx="minor">
-            <a:schemeClr val="dk1"/>
-          </a:fontRef>
-        </p:style>
-        <p:txBody>
-          <a:bodyPr rtlCol="0" anchor="ctr"/>
-          <a:lstStyle/>
-          <a:p>
-            <a:pPr algn="ctr"/>
-            <a:r>
-              <a:rPr lang="en-US" sz="1200" dirty="0">
-                <a:latin typeface="Poppins" panose="00000800000000000000" pitchFamily="2" charset="0"/>
-                <a:cs typeface="Poppins" panose="00000800000000000000" pitchFamily="2" charset="0"/>
-              </a:rPr>
-              <a:t>Re-train on </a:t>
-            </a:r>
-            <a:br>
-              <a:rPr lang="en-US" sz="1200" dirty="0">
-                <a:latin typeface="Poppins" panose="00000800000000000000" pitchFamily="2" charset="0"/>
-                <a:cs typeface="Poppins" panose="00000800000000000000" pitchFamily="2" charset="0"/>
-              </a:rPr>
-            </a:br>
-            <a:r>
-              <a:rPr lang="en-US" sz="1200" dirty="0">
-                <a:latin typeface="Poppins" panose="00000800000000000000" pitchFamily="2" charset="0"/>
-                <a:cs typeface="Poppins" panose="00000800000000000000" pitchFamily="2" charset="0"/>
-              </a:rPr>
-              <a:t>Full Train set 80% </a:t>
-            </a:r>
-            <a:br>
-              <a:rPr lang="en-US" sz="1200" dirty="0">
-                <a:latin typeface="Poppins" panose="00000800000000000000" pitchFamily="2" charset="0"/>
-                <a:cs typeface="Poppins" panose="00000800000000000000" pitchFamily="2" charset="0"/>
-              </a:rPr>
-            </a:br>
-            <a:r>
-              <a:rPr lang="en-US" sz="1200" dirty="0">
-                <a:latin typeface="Poppins" panose="00000800000000000000" pitchFamily="2" charset="0"/>
-                <a:cs typeface="Poppins" panose="00000800000000000000" pitchFamily="2" charset="0"/>
-              </a:rPr>
-              <a:t>(average stopping epoch)</a:t>
-            </a:r>
-          </a:p>
-        </p:txBody>
-      </p:sp>
-      <p:sp>
-        <p:nvSpPr>
-          <p:cNvPr id="143" name="Diamond 142">
-            <a:extLst>
-              <a:ext uri="{FF2B5EF4-FFF2-40B4-BE49-F238E27FC236}">
-                <a16:creationId xmlns:a16="http://schemas.microsoft.com/office/drawing/2014/main" id="{2F6D530C-558A-A32E-22CE-6D965808B922}"/>
-              </a:ext>
-            </a:extLst>
-          </p:cNvPr>
-          <p:cNvSpPr/>
-          <p:nvPr/>
-        </p:nvSpPr>
-        <p:spPr>
-          <a:xfrm>
-            <a:off x="208534" y="515653"/>
-            <a:ext cx="2138099" cy="1291674"/>
-          </a:xfrm>
-          <a:prstGeom prst="diamond">
-            <a:avLst/>
-          </a:prstGeom>
-        </p:spPr>
-        <p:style>
-          <a:lnRef idx="2">
-            <a:schemeClr val="dk1"/>
-          </a:lnRef>
-          <a:fillRef idx="1">
-            <a:schemeClr val="lt1"/>
-          </a:fillRef>
-          <a:effectRef idx="0">
-            <a:schemeClr val="dk1"/>
-          </a:effectRef>
-          <a:fontRef idx="minor">
-            <a:schemeClr val="dk1"/>
-          </a:fontRef>
-        </p:style>
-        <p:txBody>
-          <a:bodyPr rtlCol="0" anchor="ctr"/>
-          <a:lstStyle/>
-          <a:p>
-            <a:pPr algn="ctr"/>
-            <a:endParaRPr lang="en-US" sz="1200" b="1" dirty="0">
-              <a:latin typeface="Poppins" panose="00000800000000000000" pitchFamily="2" charset="0"/>
-              <a:cs typeface="Poppins" panose="00000800000000000000" pitchFamily="2" charset="0"/>
-            </a:endParaRPr>
-          </a:p>
-          <a:p>
-            <a:pPr algn="ctr"/>
-            <a:r>
-              <a:rPr lang="en-US" sz="1200" b="1" dirty="0">
-                <a:latin typeface="Poppins" panose="00000800000000000000" pitchFamily="2" charset="0"/>
-                <a:cs typeface="Poppins" panose="00000800000000000000" pitchFamily="2" charset="0"/>
-              </a:rPr>
-              <a:t> Selection Criteria:</a:t>
-            </a:r>
-          </a:p>
-          <a:p>
-            <a:pPr algn="ctr"/>
-            <a:r>
-              <a:rPr lang="en-US" sz="1200" b="1" dirty="0">
-                <a:latin typeface="Poppins" panose="00000800000000000000" pitchFamily="2" charset="0"/>
-                <a:cs typeface="Poppins" panose="00000800000000000000" pitchFamily="2" charset="0"/>
-              </a:rPr>
-              <a:t>AUC &gt; 80%</a:t>
-            </a:r>
-            <a:br>
-              <a:rPr lang="en-US" sz="1200" b="1" dirty="0">
-                <a:latin typeface="Poppins" panose="00000800000000000000" pitchFamily="2" charset="0"/>
-                <a:cs typeface="Poppins" panose="00000800000000000000" pitchFamily="2" charset="0"/>
-              </a:rPr>
-            </a:br>
-            <a:r>
-              <a:rPr lang="en-US" sz="1200" b="1" dirty="0">
-                <a:latin typeface="Poppins" panose="00000800000000000000" pitchFamily="2" charset="0"/>
-                <a:cs typeface="Poppins" panose="00000800000000000000" pitchFamily="2" charset="0"/>
-              </a:rPr>
-              <a:t>Sen &gt; 85%</a:t>
-            </a:r>
-            <a:br>
-              <a:rPr lang="en-US" sz="1200" b="1" dirty="0">
-                <a:latin typeface="Poppins" panose="00000800000000000000" pitchFamily="2" charset="0"/>
-                <a:cs typeface="Poppins" panose="00000800000000000000" pitchFamily="2" charset="0"/>
-              </a:rPr>
-            </a:br>
-            <a:r>
-              <a:rPr lang="en-US" sz="1200" b="1" dirty="0">
-                <a:latin typeface="Poppins" panose="00000800000000000000" pitchFamily="2" charset="0"/>
-                <a:cs typeface="Poppins" panose="00000800000000000000" pitchFamily="2" charset="0"/>
-              </a:rPr>
-              <a:t>Spec &gt; 70%</a:t>
-            </a:r>
-          </a:p>
-          <a:p>
-            <a:pPr algn="ctr"/>
-            <a:endParaRPr lang="en-US" sz="1200" dirty="0"/>
-          </a:p>
-        </p:txBody>
-      </p:sp>
-      <p:sp>
-        <p:nvSpPr>
-          <p:cNvPr id="201" name="TextBox 200">
-            <a:extLst>
-              <a:ext uri="{FF2B5EF4-FFF2-40B4-BE49-F238E27FC236}">
-                <a16:creationId xmlns:a16="http://schemas.microsoft.com/office/drawing/2014/main" id="{30B8E9DF-5C40-7BAB-C8EE-21D1FC635941}"/>
-              </a:ext>
-            </a:extLst>
-          </p:cNvPr>
-          <p:cNvSpPr txBox="1"/>
-          <p:nvPr/>
-        </p:nvSpPr>
-        <p:spPr>
-          <a:xfrm>
-            <a:off x="-459777" y="58399"/>
-            <a:ext cx="3474720" cy="461665"/>
-          </a:xfrm>
-          <a:prstGeom prst="rect">
-            <a:avLst/>
-          </a:prstGeom>
-          <a:noFill/>
-        </p:spPr>
-        <p:txBody>
-          <a:bodyPr wrap="square" rtlCol="0">
-            <a:spAutoFit/>
-          </a:bodyPr>
-          <a:lstStyle/>
-          <a:p>
-            <a:pPr algn="ctr"/>
-            <a:r>
-              <a:rPr lang="en-US" sz="1200" dirty="0">
-                <a:latin typeface="Poppins" panose="00000800000000000000" pitchFamily="2" charset="0"/>
-                <a:cs typeface="Poppins" panose="00000800000000000000" pitchFamily="2" charset="0"/>
-              </a:rPr>
-              <a:t>No meet &amp; All meet criteria: </a:t>
-            </a:r>
-            <a:br>
-              <a:rPr lang="en-US" sz="1200" dirty="0">
-                <a:latin typeface="Poppins" panose="00000800000000000000" pitchFamily="2" charset="0"/>
-                <a:cs typeface="Poppins" panose="00000800000000000000" pitchFamily="2" charset="0"/>
-              </a:rPr>
-            </a:br>
-            <a:r>
-              <a:rPr lang="en-US" sz="1200" dirty="0">
-                <a:solidFill>
-                  <a:srgbClr val="FF0000"/>
-                </a:solidFill>
-                <a:latin typeface="Poppins" panose="00000800000000000000" pitchFamily="2" charset="0"/>
-                <a:cs typeface="Poppins" panose="00000800000000000000" pitchFamily="2" charset="0"/>
-              </a:rPr>
-              <a:t>selected by Highest AUC</a:t>
-            </a:r>
-          </a:p>
-        </p:txBody>
-      </p:sp>
-      <p:sp>
-        <p:nvSpPr>
-          <p:cNvPr id="212" name="Rectangle: Rounded Corners 211">
-            <a:extLst>
-              <a:ext uri="{FF2B5EF4-FFF2-40B4-BE49-F238E27FC236}">
-                <a16:creationId xmlns:a16="http://schemas.microsoft.com/office/drawing/2014/main" id="{504AA618-3237-AE79-9A8A-56363495F7C8}"/>
-              </a:ext>
-            </a:extLst>
-          </p:cNvPr>
-          <p:cNvSpPr/>
-          <p:nvPr/>
-        </p:nvSpPr>
-        <p:spPr>
-          <a:xfrm>
-            <a:off x="8950134" y="737145"/>
-            <a:ext cx="2007699" cy="1402429"/>
-          </a:xfrm>
-          <a:prstGeom prst="roundRect">
-            <a:avLst/>
-          </a:prstGeom>
-          <a:ln w="19050"/>
-        </p:spPr>
-        <p:style>
-          <a:lnRef idx="2">
-            <a:schemeClr val="dk1"/>
-          </a:lnRef>
-          <a:fillRef idx="1">
-            <a:schemeClr val="lt1"/>
-          </a:fillRef>
-          <a:effectRef idx="0">
-            <a:schemeClr val="dk1"/>
-          </a:effectRef>
-          <a:fontRef idx="minor">
-            <a:schemeClr val="dk1"/>
-          </a:fontRef>
-        </p:style>
-        <p:txBody>
-          <a:bodyPr rtlCol="0" anchor="ctr"/>
-          <a:lstStyle/>
-          <a:p>
-            <a:pPr algn="ctr"/>
-            <a:r>
-              <a:rPr lang="en-US" sz="1200" dirty="0">
-                <a:latin typeface="Poppins" panose="00000800000000000000" pitchFamily="2" charset="0"/>
-                <a:cs typeface="Poppins" panose="00000800000000000000" pitchFamily="2" charset="0"/>
-              </a:rPr>
-              <a:t>Performance Results:</a:t>
-            </a:r>
-            <a:br>
-              <a:rPr lang="en-US" sz="1200" dirty="0">
-                <a:latin typeface="Poppins" panose="00000800000000000000" pitchFamily="2" charset="0"/>
-                <a:cs typeface="Poppins" panose="00000800000000000000" pitchFamily="2" charset="0"/>
-              </a:rPr>
-            </a:br>
-            <a:r>
-              <a:rPr lang="en-US" sz="1200" dirty="0">
-                <a:latin typeface="Poppins" panose="00000800000000000000" pitchFamily="2" charset="0"/>
-                <a:cs typeface="Poppins" panose="00000800000000000000" pitchFamily="2" charset="0"/>
-              </a:rPr>
-              <a:t>Sensitivity</a:t>
-            </a:r>
-            <a:br>
-              <a:rPr lang="en-US" sz="1200" dirty="0">
-                <a:latin typeface="Poppins" panose="00000800000000000000" pitchFamily="2" charset="0"/>
-                <a:cs typeface="Poppins" panose="00000800000000000000" pitchFamily="2" charset="0"/>
-              </a:rPr>
-            </a:br>
-            <a:r>
-              <a:rPr lang="en-US" sz="1200" dirty="0">
-                <a:latin typeface="Poppins" panose="00000800000000000000" pitchFamily="2" charset="0"/>
-                <a:cs typeface="Poppins" panose="00000800000000000000" pitchFamily="2" charset="0"/>
-              </a:rPr>
-              <a:t>Specificity</a:t>
-            </a:r>
-            <a:br>
-              <a:rPr lang="en-US" sz="1200" dirty="0">
-                <a:latin typeface="Poppins" panose="00000800000000000000" pitchFamily="2" charset="0"/>
-                <a:cs typeface="Poppins" panose="00000800000000000000" pitchFamily="2" charset="0"/>
-              </a:rPr>
-            </a:br>
-            <a:r>
-              <a:rPr lang="en-US" sz="1200" dirty="0">
-                <a:latin typeface="Poppins" panose="00000800000000000000" pitchFamily="2" charset="0"/>
-                <a:cs typeface="Poppins" panose="00000800000000000000" pitchFamily="2" charset="0"/>
-              </a:rPr>
-              <a:t>AUC-ROC</a:t>
-            </a:r>
-            <a:br>
-              <a:rPr lang="en-US" sz="1200" dirty="0">
-                <a:latin typeface="Poppins" panose="00000800000000000000" pitchFamily="2" charset="0"/>
-                <a:cs typeface="Poppins" panose="00000800000000000000" pitchFamily="2" charset="0"/>
-              </a:rPr>
-            </a:br>
-            <a:r>
-              <a:rPr lang="en-US" sz="1200" dirty="0">
-                <a:latin typeface="Poppins" panose="00000800000000000000" pitchFamily="2" charset="0"/>
-                <a:cs typeface="Poppins" panose="00000800000000000000" pitchFamily="2" charset="0"/>
-              </a:rPr>
-              <a:t>PPV</a:t>
-            </a:r>
-            <a:br>
-              <a:rPr lang="en-US" sz="1200" dirty="0">
-                <a:latin typeface="Poppins" panose="00000800000000000000" pitchFamily="2" charset="0"/>
-                <a:cs typeface="Poppins" panose="00000800000000000000" pitchFamily="2" charset="0"/>
-              </a:rPr>
-            </a:br>
-            <a:r>
-              <a:rPr lang="en-US" sz="1200" dirty="0">
-                <a:latin typeface="Poppins" panose="00000800000000000000" pitchFamily="2" charset="0"/>
-                <a:cs typeface="Poppins" panose="00000800000000000000" pitchFamily="2" charset="0"/>
-              </a:rPr>
-              <a:t>NPV</a:t>
-            </a:r>
-            <a:br>
-              <a:rPr lang="en-US" sz="1200" dirty="0">
-                <a:latin typeface="Poppins" panose="00000800000000000000" pitchFamily="2" charset="0"/>
-                <a:cs typeface="Poppins" panose="00000800000000000000" pitchFamily="2" charset="0"/>
-              </a:rPr>
-            </a:br>
-            <a:r>
-              <a:rPr lang="en-US" sz="1200" dirty="0">
-                <a:latin typeface="Poppins" panose="00000800000000000000" pitchFamily="2" charset="0"/>
-                <a:cs typeface="Poppins" panose="00000800000000000000" pitchFamily="2" charset="0"/>
-              </a:rPr>
-              <a:t>F1-Score</a:t>
-            </a:r>
-          </a:p>
-        </p:txBody>
-      </p:sp>
-      <p:sp>
-        <p:nvSpPr>
-          <p:cNvPr id="254" name="Rectangle: Rounded Corners 253">
-            <a:extLst>
-              <a:ext uri="{FF2B5EF4-FFF2-40B4-BE49-F238E27FC236}">
-                <a16:creationId xmlns:a16="http://schemas.microsoft.com/office/drawing/2014/main" id="{8FA064CF-8E5C-B056-B35E-24A011E92184}"/>
-              </a:ext>
-            </a:extLst>
-          </p:cNvPr>
-          <p:cNvSpPr/>
-          <p:nvPr/>
-        </p:nvSpPr>
-        <p:spPr>
-          <a:xfrm>
-            <a:off x="200692" y="3130750"/>
-            <a:ext cx="2138099" cy="1788216"/>
-          </a:xfrm>
-          <a:prstGeom prst="roundRect">
-            <a:avLst/>
-          </a:prstGeom>
-          <a:ln w="19050"/>
-        </p:spPr>
-        <p:style>
-          <a:lnRef idx="2">
-            <a:schemeClr val="dk1"/>
-          </a:lnRef>
-          <a:fillRef idx="1">
-            <a:schemeClr val="lt1"/>
-          </a:fillRef>
-          <a:effectRef idx="0">
-            <a:schemeClr val="dk1"/>
-          </a:effectRef>
-          <a:fontRef idx="minor">
-            <a:schemeClr val="dk1"/>
-          </a:fontRef>
-        </p:style>
-        <p:txBody>
-          <a:bodyPr rtlCol="0" anchor="ctr"/>
-          <a:lstStyle/>
-          <a:p>
-            <a:pPr algn="ctr"/>
-            <a:r>
-              <a:rPr lang="en-US" sz="1200" dirty="0">
-                <a:solidFill>
-                  <a:srgbClr val="0070C0"/>
-                </a:solidFill>
-                <a:latin typeface="Poppins" panose="00000800000000000000" pitchFamily="2" charset="0"/>
-                <a:cs typeface="Poppins" panose="00000800000000000000" pitchFamily="2" charset="0"/>
-              </a:rPr>
-              <a:t>Optuna</a:t>
-            </a:r>
-            <a:r>
-              <a:rPr lang="th-TH" sz="1200" dirty="0">
-                <a:solidFill>
-                  <a:srgbClr val="0070C0"/>
-                </a:solidFill>
-                <a:latin typeface="Poppins" panose="00000800000000000000" pitchFamily="2" charset="0"/>
-                <a:cs typeface="Poppins" panose="00000800000000000000" pitchFamily="2" charset="0"/>
-              </a:rPr>
-              <a:t> </a:t>
-            </a:r>
-            <a:r>
-              <a:rPr lang="en-US" sz="1200" dirty="0">
-                <a:solidFill>
-                  <a:srgbClr val="0070C0"/>
-                </a:solidFill>
-                <a:latin typeface="Poppins" panose="00000800000000000000" pitchFamily="2" charset="0"/>
-                <a:cs typeface="Poppins" panose="00000800000000000000" pitchFamily="2" charset="0"/>
-              </a:rPr>
-              <a:t>(TPE Sampler)</a:t>
-            </a:r>
-            <a:br>
-              <a:rPr lang="en-US" sz="1200" dirty="0">
-                <a:solidFill>
-                  <a:srgbClr val="0070C0"/>
-                </a:solidFill>
-                <a:latin typeface="Poppins" panose="00000800000000000000" pitchFamily="2" charset="0"/>
-                <a:cs typeface="Poppins" panose="00000800000000000000" pitchFamily="2" charset="0"/>
-              </a:rPr>
-            </a:br>
-            <a:r>
-              <a:rPr lang="en-US" sz="1200" dirty="0">
-                <a:solidFill>
-                  <a:srgbClr val="0070C0"/>
-                </a:solidFill>
-                <a:latin typeface="Poppins" panose="00000800000000000000" pitchFamily="2" charset="0"/>
-                <a:cs typeface="Poppins" panose="00000800000000000000" pitchFamily="2" charset="0"/>
-              </a:rPr>
-              <a:t> 10 trials, (1-fold only)</a:t>
-            </a:r>
-            <a:br>
-              <a:rPr lang="th-TH" sz="1200" dirty="0">
-                <a:solidFill>
-                  <a:schemeClr val="tx1"/>
-                </a:solidFill>
-                <a:latin typeface="Poppins" panose="00000800000000000000" pitchFamily="2" charset="0"/>
-                <a:cs typeface="Poppins" panose="00000800000000000000" pitchFamily="2" charset="0"/>
-              </a:rPr>
-            </a:br>
-            <a:r>
-              <a:rPr lang="en-US" sz="1200" b="1" dirty="0">
-                <a:solidFill>
-                  <a:schemeClr val="tx1"/>
-                </a:solidFill>
-                <a:latin typeface="Poppins" panose="00000800000000000000" pitchFamily="2" charset="0"/>
-                <a:cs typeface="Poppins" panose="00000800000000000000" pitchFamily="2" charset="0"/>
-              </a:rPr>
-              <a:t>Dropout_rate</a:t>
-            </a:r>
-            <a:br>
-              <a:rPr lang="en-US" sz="1200" b="1" dirty="0">
-                <a:solidFill>
-                  <a:schemeClr val="tx1"/>
-                </a:solidFill>
-                <a:latin typeface="Poppins" panose="00000800000000000000" pitchFamily="2" charset="0"/>
-                <a:cs typeface="Poppins" panose="00000800000000000000" pitchFamily="2" charset="0"/>
-              </a:rPr>
-            </a:br>
-            <a:r>
-              <a:rPr lang="en-US" sz="1200" b="1" dirty="0">
-                <a:solidFill>
-                  <a:schemeClr val="tx1"/>
-                </a:solidFill>
-                <a:latin typeface="Poppins" panose="00000800000000000000" pitchFamily="2" charset="0"/>
-                <a:cs typeface="Poppins" panose="00000800000000000000" pitchFamily="2" charset="0"/>
-              </a:rPr>
-              <a:t>L2_Reg</a:t>
-            </a:r>
-            <a:br>
-              <a:rPr lang="en-US" sz="1200" b="1" dirty="0">
-                <a:solidFill>
-                  <a:schemeClr val="tx1"/>
-                </a:solidFill>
-                <a:latin typeface="Poppins" panose="00000800000000000000" pitchFamily="2" charset="0"/>
-                <a:cs typeface="Poppins" panose="00000800000000000000" pitchFamily="2" charset="0"/>
-              </a:rPr>
-            </a:br>
-            <a:r>
-              <a:rPr lang="en-US" sz="1200" b="1" dirty="0">
-                <a:solidFill>
-                  <a:schemeClr val="tx1"/>
-                </a:solidFill>
-                <a:latin typeface="Poppins" panose="00000800000000000000" pitchFamily="2" charset="0"/>
-                <a:cs typeface="Poppins" panose="00000800000000000000" pitchFamily="2" charset="0"/>
-              </a:rPr>
-              <a:t>Dense_units_1</a:t>
-            </a:r>
-            <a:br>
-              <a:rPr lang="en-US" sz="1200" b="1" dirty="0">
-                <a:solidFill>
-                  <a:schemeClr val="tx1"/>
-                </a:solidFill>
-                <a:latin typeface="Poppins" panose="00000800000000000000" pitchFamily="2" charset="0"/>
-                <a:cs typeface="Poppins" panose="00000800000000000000" pitchFamily="2" charset="0"/>
-              </a:rPr>
-            </a:br>
-            <a:r>
-              <a:rPr lang="en-US" sz="1200" b="1" dirty="0">
-                <a:solidFill>
-                  <a:schemeClr val="tx1"/>
-                </a:solidFill>
-                <a:latin typeface="Poppins" panose="00000800000000000000" pitchFamily="2" charset="0"/>
-                <a:cs typeface="Poppins" panose="00000800000000000000" pitchFamily="2" charset="0"/>
-              </a:rPr>
-              <a:t>Dense_units_2</a:t>
-            </a:r>
-            <a:br>
-              <a:rPr lang="en-US" sz="1200" b="1" dirty="0">
-                <a:solidFill>
-                  <a:schemeClr val="tx1"/>
-                </a:solidFill>
-                <a:latin typeface="Poppins" panose="00000800000000000000" pitchFamily="2" charset="0"/>
-                <a:cs typeface="Poppins" panose="00000800000000000000" pitchFamily="2" charset="0"/>
-              </a:rPr>
-            </a:br>
-            <a:r>
-              <a:rPr lang="en-US" sz="1200" b="1" dirty="0">
-                <a:solidFill>
-                  <a:schemeClr val="tx1"/>
-                </a:solidFill>
-                <a:latin typeface="Poppins" panose="00000800000000000000" pitchFamily="2" charset="0"/>
-                <a:cs typeface="Poppins" panose="00000800000000000000" pitchFamily="2" charset="0"/>
-              </a:rPr>
-              <a:t>Batch_size</a:t>
-            </a:r>
-            <a:br>
-              <a:rPr lang="en-US" sz="1200" b="1" dirty="0">
-                <a:solidFill>
-                  <a:schemeClr val="tx1"/>
-                </a:solidFill>
-                <a:latin typeface="Poppins" panose="00000800000000000000" pitchFamily="2" charset="0"/>
-                <a:cs typeface="Poppins" panose="00000800000000000000" pitchFamily="2" charset="0"/>
-              </a:rPr>
-            </a:br>
-            <a:r>
-              <a:rPr lang="en-US" sz="1200" b="1" dirty="0">
-                <a:solidFill>
-                  <a:schemeClr val="tx1"/>
-                </a:solidFill>
-                <a:latin typeface="Poppins" panose="00000800000000000000" pitchFamily="2" charset="0"/>
-                <a:cs typeface="Poppins" panose="00000800000000000000" pitchFamily="2" charset="0"/>
-              </a:rPr>
-              <a:t>Phase1_lr</a:t>
-            </a:r>
-            <a:br>
-              <a:rPr lang="en-US" sz="1200" b="1" dirty="0">
-                <a:solidFill>
-                  <a:schemeClr val="tx1"/>
-                </a:solidFill>
-                <a:latin typeface="Poppins" panose="00000800000000000000" pitchFamily="2" charset="0"/>
-                <a:cs typeface="Poppins" panose="00000800000000000000" pitchFamily="2" charset="0"/>
-              </a:rPr>
-            </a:br>
-            <a:r>
-              <a:rPr lang="en-US" sz="1200" b="1" dirty="0">
-                <a:solidFill>
-                  <a:schemeClr val="tx1"/>
-                </a:solidFill>
-                <a:latin typeface="Poppins" panose="00000800000000000000" pitchFamily="2" charset="0"/>
-                <a:cs typeface="Poppins" panose="00000800000000000000" pitchFamily="2" charset="0"/>
-              </a:rPr>
-              <a:t>Phase2_lr</a:t>
-            </a:r>
-          </a:p>
-        </p:txBody>
-      </p:sp>
-      <p:cxnSp>
-        <p:nvCxnSpPr>
-          <p:cNvPr id="264" name="Straight Arrow Connector 263">
-            <a:extLst>
-              <a:ext uri="{FF2B5EF4-FFF2-40B4-BE49-F238E27FC236}">
-                <a16:creationId xmlns:a16="http://schemas.microsoft.com/office/drawing/2014/main" id="{46B2F9A5-B96E-DAB2-D1DA-59FEFD558AC9}"/>
-              </a:ext>
-            </a:extLst>
-          </p:cNvPr>
-          <p:cNvCxnSpPr>
-            <a:cxnSpLocks/>
-            <a:stCxn id="254" idx="3"/>
-            <a:endCxn id="22" idx="1"/>
-          </p:cNvCxnSpPr>
-          <p:nvPr/>
-        </p:nvCxnSpPr>
-        <p:spPr>
-          <a:xfrm>
-            <a:off x="2338791" y="4024858"/>
-            <a:ext cx="421419" cy="0"/>
-          </a:xfrm>
-          <a:prstGeom prst="straightConnector1">
-            <a:avLst/>
-          </a:prstGeom>
-          <a:ln w="57150">
-            <a:tailEnd type="triangle"/>
-          </a:ln>
-        </p:spPr>
-        <p:style>
-          <a:lnRef idx="2">
-            <a:schemeClr val="dk1"/>
-          </a:lnRef>
-          <a:fillRef idx="0">
-            <a:schemeClr val="dk1"/>
-          </a:fillRef>
-          <a:effectRef idx="1">
-            <a:schemeClr val="dk1"/>
-          </a:effectRef>
-          <a:fontRef idx="minor">
-            <a:schemeClr val="tx1"/>
-          </a:fontRef>
-        </p:style>
-      </p:cxnSp>
-      <p:cxnSp>
-        <p:nvCxnSpPr>
-          <p:cNvPr id="341" name="Connector: Elbow 340">
-            <a:extLst>
-              <a:ext uri="{FF2B5EF4-FFF2-40B4-BE49-F238E27FC236}">
-                <a16:creationId xmlns:a16="http://schemas.microsoft.com/office/drawing/2014/main" id="{E6A51AAD-DC59-7BB2-AEDB-7E5B56BB434B}"/>
-              </a:ext>
-            </a:extLst>
-          </p:cNvPr>
-          <p:cNvCxnSpPr>
-            <a:cxnSpLocks/>
-            <a:stCxn id="8" idx="0"/>
-          </p:cNvCxnSpPr>
-          <p:nvPr/>
-        </p:nvCxnSpPr>
-        <p:spPr>
-          <a:xfrm rot="5400000" flipH="1" flipV="1">
-            <a:off x="936058" y="5194841"/>
-            <a:ext cx="551749" cy="2"/>
-          </a:xfrm>
-          <a:prstGeom prst="bentConnector3">
-            <a:avLst>
-              <a:gd name="adj1" fmla="val 50000"/>
-            </a:avLst>
-          </a:prstGeom>
-          <a:ln w="57150">
-            <a:solidFill>
-              <a:schemeClr val="tx1"/>
-            </a:solidFill>
-            <a:tailEnd type="triangle"/>
-          </a:ln>
-        </p:spPr>
-        <p:style>
-          <a:lnRef idx="2">
-            <a:schemeClr val="accent1"/>
-          </a:lnRef>
-          <a:fillRef idx="0">
-            <a:schemeClr val="accent1"/>
-          </a:fillRef>
-          <a:effectRef idx="1">
-            <a:schemeClr val="accent1"/>
-          </a:effectRef>
-          <a:fontRef idx="minor">
-            <a:schemeClr val="tx1"/>
-          </a:fontRef>
-        </p:style>
-      </p:cxnSp>
-      <p:cxnSp>
-        <p:nvCxnSpPr>
-          <p:cNvPr id="368" name="Straight Arrow Connector 367">
-            <a:extLst>
-              <a:ext uri="{FF2B5EF4-FFF2-40B4-BE49-F238E27FC236}">
-                <a16:creationId xmlns:a16="http://schemas.microsoft.com/office/drawing/2014/main" id="{40D92509-A897-9615-D051-E2E6D2D8E3B4}"/>
-              </a:ext>
-            </a:extLst>
-          </p:cNvPr>
-          <p:cNvCxnSpPr>
-            <a:cxnSpLocks/>
-          </p:cNvCxnSpPr>
-          <p:nvPr/>
-        </p:nvCxnSpPr>
-        <p:spPr>
-          <a:xfrm>
-            <a:off x="6654127" y="1130726"/>
-            <a:ext cx="403143" cy="0"/>
-          </a:xfrm>
-          <a:prstGeom prst="straightConnector1">
-            <a:avLst/>
-          </a:prstGeom>
-          <a:ln w="57150">
-            <a:tailEnd type="triangle"/>
-          </a:ln>
-        </p:spPr>
-        <p:style>
-          <a:lnRef idx="2">
-            <a:schemeClr val="dk1"/>
-          </a:lnRef>
-          <a:fillRef idx="0">
-            <a:schemeClr val="dk1"/>
-          </a:fillRef>
-          <a:effectRef idx="1">
-            <a:schemeClr val="dk1"/>
-          </a:effectRef>
-          <a:fontRef idx="minor">
-            <a:schemeClr val="tx1"/>
-          </a:fontRef>
-        </p:style>
-      </p:cxnSp>
-      <p:cxnSp>
-        <p:nvCxnSpPr>
-          <p:cNvPr id="386" name="Straight Arrow Connector 385">
-            <a:extLst>
-              <a:ext uri="{FF2B5EF4-FFF2-40B4-BE49-F238E27FC236}">
-                <a16:creationId xmlns:a16="http://schemas.microsoft.com/office/drawing/2014/main" id="{34031DD6-FFEE-9110-50B7-F60E4AFA91E3}"/>
-              </a:ext>
-            </a:extLst>
-          </p:cNvPr>
-          <p:cNvCxnSpPr>
-            <a:cxnSpLocks/>
-          </p:cNvCxnSpPr>
-          <p:nvPr/>
-        </p:nvCxnSpPr>
-        <p:spPr>
-          <a:xfrm flipV="1">
-            <a:off x="8364594" y="1155268"/>
-            <a:ext cx="585540" cy="12444"/>
-          </a:xfrm>
-          <a:prstGeom prst="straightConnector1">
-            <a:avLst/>
-          </a:prstGeom>
-          <a:ln w="57150">
-            <a:tailEnd type="triangle"/>
-          </a:ln>
-        </p:spPr>
-        <p:style>
-          <a:lnRef idx="2">
-            <a:schemeClr val="dk1"/>
-          </a:lnRef>
-          <a:fillRef idx="0">
-            <a:schemeClr val="dk1"/>
-          </a:fillRef>
-          <a:effectRef idx="1">
-            <a:schemeClr val="dk1"/>
-          </a:effectRef>
-          <a:fontRef idx="minor">
-            <a:schemeClr val="tx1"/>
-          </a:fontRef>
-        </p:style>
-      </p:cxnSp>
-      <p:sp>
-        <p:nvSpPr>
-          <p:cNvPr id="22" name="Rectangle: Rounded Corners 21">
-            <a:extLst>
-              <a:ext uri="{FF2B5EF4-FFF2-40B4-BE49-F238E27FC236}">
-                <a16:creationId xmlns:a16="http://schemas.microsoft.com/office/drawing/2014/main" id="{AD9D7D51-D36F-5AAF-3DB3-BC3A733132CE}"/>
-              </a:ext>
-            </a:extLst>
-          </p:cNvPr>
-          <p:cNvSpPr/>
-          <p:nvPr/>
-        </p:nvSpPr>
-        <p:spPr>
-          <a:xfrm>
-            <a:off x="2760210" y="3756448"/>
-            <a:ext cx="1827630" cy="536820"/>
-          </a:xfrm>
-          <a:prstGeom prst="roundRect">
-            <a:avLst/>
-          </a:prstGeom>
-          <a:ln w="19050"/>
-        </p:spPr>
-        <p:style>
-          <a:lnRef idx="2">
-            <a:schemeClr val="dk1"/>
-          </a:lnRef>
-          <a:fillRef idx="1">
-            <a:schemeClr val="lt1"/>
-          </a:fillRef>
-          <a:effectRef idx="0">
-            <a:schemeClr val="dk1"/>
-          </a:effectRef>
-          <a:fontRef idx="minor">
-            <a:schemeClr val="dk1"/>
-          </a:fontRef>
-        </p:style>
-        <p:txBody>
-          <a:bodyPr rtlCol="0" anchor="ctr"/>
-          <a:lstStyle/>
-          <a:p>
-            <a:pPr algn="ctr"/>
-            <a:r>
-              <a:rPr lang="en-US" sz="1200" dirty="0">
-                <a:latin typeface="Poppins" panose="00000800000000000000" pitchFamily="2" charset="0"/>
-                <a:cs typeface="Poppins" panose="00000800000000000000" pitchFamily="2" charset="0"/>
-              </a:rPr>
-              <a:t>5-fold CV with best hyperparameter</a:t>
-            </a:r>
-          </a:p>
-        </p:txBody>
-      </p:sp>
-      <p:sp>
-        <p:nvSpPr>
-          <p:cNvPr id="33" name="TextBox 32">
-            <a:extLst>
-              <a:ext uri="{FF2B5EF4-FFF2-40B4-BE49-F238E27FC236}">
-                <a16:creationId xmlns:a16="http://schemas.microsoft.com/office/drawing/2014/main" id="{D1AB29D7-2D9E-7312-E59A-A671CC9765EF}"/>
-              </a:ext>
-            </a:extLst>
-          </p:cNvPr>
-          <p:cNvSpPr txBox="1"/>
-          <p:nvPr/>
-        </p:nvSpPr>
-        <p:spPr>
-          <a:xfrm>
-            <a:off x="2850480" y="230737"/>
-            <a:ext cx="3474720" cy="276999"/>
-          </a:xfrm>
-          <a:prstGeom prst="rect">
-            <a:avLst/>
-          </a:prstGeom>
-          <a:noFill/>
-        </p:spPr>
-        <p:txBody>
-          <a:bodyPr wrap="square" rtlCol="0">
-            <a:spAutoFit/>
-          </a:bodyPr>
-          <a:lstStyle/>
-          <a:p>
-            <a:pPr algn="ctr"/>
-            <a:r>
-              <a:rPr lang="en-US" sz="1200" dirty="0">
-                <a:latin typeface="Poppins" panose="00000800000000000000" pitchFamily="2" charset="0"/>
-                <a:cs typeface="Poppins" panose="00000800000000000000" pitchFamily="2" charset="0"/>
-              </a:rPr>
-              <a:t>These average from results of 5-fold cv</a:t>
-            </a:r>
-            <a:endParaRPr lang="en-US" sz="1200" dirty="0">
-              <a:solidFill>
-                <a:srgbClr val="FF0000"/>
-              </a:solidFill>
-              <a:latin typeface="Poppins" panose="00000800000000000000" pitchFamily="2" charset="0"/>
-              <a:cs typeface="Poppins" panose="00000800000000000000" pitchFamily="2" charset="0"/>
-            </a:endParaRPr>
+              <a:t>Proposed Model Architecture </a:t>
+            </a:r>
           </a:p>
         </p:txBody>
       </p:sp>
     </p:spTree>
     <p:extLst>
       <p:ext uri="{BB962C8B-B14F-4D97-AF65-F5344CB8AC3E}">
-        <p14:creationId xmlns:p14="http://schemas.microsoft.com/office/powerpoint/2010/main" val="3902019506"/>
+        <p14:creationId xmlns:p14="http://schemas.microsoft.com/office/powerpoint/2010/main" val="2352983502"/>
       </p:ext>
     </p:extLst>
   </p:cSld>
@@ -5477,10 +3669,10 @@
       </p:grpSpPr>
       <p:sp>
         <p:nvSpPr>
-          <p:cNvPr id="29" name="Rectangle 28">
-            <a:extLst>
-              <a:ext uri="{FF2B5EF4-FFF2-40B4-BE49-F238E27FC236}">
-                <a16:creationId xmlns:a16="http://schemas.microsoft.com/office/drawing/2014/main" id="{8166C546-4320-DB48-1C1F-FA5662650635}"/>
+          <p:cNvPr id="30" name="Rectangle 29">
+            <a:extLst>
+              <a:ext uri="{FF2B5EF4-FFF2-40B4-BE49-F238E27FC236}">
+                <a16:creationId xmlns:a16="http://schemas.microsoft.com/office/drawing/2014/main" id="{24D9B6F2-37D3-7734-69DF-117A6B00331D}"/>
               </a:ext>
             </a:extLst>
           </p:cNvPr>
@@ -5491,8 +3683,8 @@
         </p:nvSpPr>
         <p:spPr>
           <a:xfrm>
-            <a:off x="5375243" y="975761"/>
-            <a:ext cx="3475273" cy="1555905"/>
+            <a:off x="2459631" y="523564"/>
+            <a:ext cx="4348005" cy="1142749"/>
           </a:xfrm>
           <a:prstGeom prst="rect">
             <a:avLst/>
@@ -5524,12 +3716,228 @@
           </a:p>
         </p:txBody>
       </p:sp>
-      <p:sp>
-        <p:nvSpPr>
-          <p:cNvPr id="30" name="TextBox 29">
-            <a:extLst>
-              <a:ext uri="{FF2B5EF4-FFF2-40B4-BE49-F238E27FC236}">
-                <a16:creationId xmlns:a16="http://schemas.microsoft.com/office/drawing/2014/main" id="{67F04354-8B7D-B448-03C4-003E47CD55D4}"/>
+      <p:cxnSp>
+        <p:nvCxnSpPr>
+          <p:cNvPr id="27" name="Straight Arrow Connector 26">
+            <a:extLst>
+              <a:ext uri="{FF2B5EF4-FFF2-40B4-BE49-F238E27FC236}">
+                <a16:creationId xmlns:a16="http://schemas.microsoft.com/office/drawing/2014/main" id="{364A479F-BC19-CBAA-822A-1648D1BB1EDA}"/>
+              </a:ext>
+            </a:extLst>
+          </p:cNvPr>
+          <p:cNvCxnSpPr>
+            <a:cxnSpLocks/>
+          </p:cNvCxnSpPr>
+          <p:nvPr/>
+        </p:nvCxnSpPr>
+        <p:spPr>
+          <a:xfrm>
+            <a:off x="4504178" y="3993360"/>
+            <a:ext cx="548769" cy="0"/>
+          </a:xfrm>
+          <a:prstGeom prst="straightConnector1">
+            <a:avLst/>
+          </a:prstGeom>
+          <a:ln w="57150">
+            <a:tailEnd type="triangle"/>
+          </a:ln>
+        </p:spPr>
+        <p:style>
+          <a:lnRef idx="2">
+            <a:schemeClr val="dk1"/>
+          </a:lnRef>
+          <a:fillRef idx="0">
+            <a:schemeClr val="dk1"/>
+          </a:fillRef>
+          <a:effectRef idx="1">
+            <a:schemeClr val="dk1"/>
+          </a:effectRef>
+          <a:fontRef idx="minor">
+            <a:schemeClr val="tx1"/>
+          </a:fontRef>
+        </p:style>
+      </p:cxnSp>
+      <p:cxnSp>
+        <p:nvCxnSpPr>
+          <p:cNvPr id="372" name="Connector: Elbow 371">
+            <a:extLst>
+              <a:ext uri="{FF2B5EF4-FFF2-40B4-BE49-F238E27FC236}">
+                <a16:creationId xmlns:a16="http://schemas.microsoft.com/office/drawing/2014/main" id="{267B0ACE-B949-682E-9B50-EE81F39C7C8F}"/>
+              </a:ext>
+            </a:extLst>
+          </p:cNvPr>
+          <p:cNvCxnSpPr>
+            <a:cxnSpLocks/>
+            <a:stCxn id="4" idx="4"/>
+            <a:endCxn id="9" idx="2"/>
+          </p:cNvCxnSpPr>
+          <p:nvPr/>
+        </p:nvCxnSpPr>
+        <p:spPr>
+          <a:xfrm flipV="1">
+            <a:off x="3774723" y="1371516"/>
+            <a:ext cx="3936070" cy="4385897"/>
+          </a:xfrm>
+          <a:prstGeom prst="bentConnector2">
+            <a:avLst/>
+          </a:prstGeom>
+          <a:ln w="57150">
+            <a:solidFill>
+              <a:schemeClr val="tx1"/>
+            </a:solidFill>
+            <a:tailEnd type="triangle"/>
+          </a:ln>
+        </p:spPr>
+        <p:style>
+          <a:lnRef idx="2">
+            <a:schemeClr val="accent1"/>
+          </a:lnRef>
+          <a:fillRef idx="0">
+            <a:schemeClr val="accent1"/>
+          </a:fillRef>
+          <a:effectRef idx="1">
+            <a:schemeClr val="accent1"/>
+          </a:effectRef>
+          <a:fontRef idx="minor">
+            <a:schemeClr val="tx1"/>
+          </a:fontRef>
+        </p:style>
+      </p:cxnSp>
+      <p:cxnSp>
+        <p:nvCxnSpPr>
+          <p:cNvPr id="231" name="Straight Arrow Connector 230">
+            <a:extLst>
+              <a:ext uri="{FF2B5EF4-FFF2-40B4-BE49-F238E27FC236}">
+                <a16:creationId xmlns:a16="http://schemas.microsoft.com/office/drawing/2014/main" id="{F8E29193-21E0-C7A7-B532-5AD2B98A37D1}"/>
+              </a:ext>
+            </a:extLst>
+          </p:cNvPr>
+          <p:cNvCxnSpPr>
+            <a:cxnSpLocks/>
+          </p:cNvCxnSpPr>
+          <p:nvPr/>
+        </p:nvCxnSpPr>
+        <p:spPr>
+          <a:xfrm>
+            <a:off x="4470511" y="1155268"/>
+            <a:ext cx="336175" cy="0"/>
+          </a:xfrm>
+          <a:prstGeom prst="straightConnector1">
+            <a:avLst/>
+          </a:prstGeom>
+          <a:ln w="57150">
+            <a:tailEnd type="triangle"/>
+          </a:ln>
+        </p:spPr>
+        <p:style>
+          <a:lnRef idx="2">
+            <a:schemeClr val="dk1"/>
+          </a:lnRef>
+          <a:fillRef idx="0">
+            <a:schemeClr val="dk1"/>
+          </a:fillRef>
+          <a:effectRef idx="1">
+            <a:schemeClr val="dk1"/>
+          </a:effectRef>
+          <a:fontRef idx="minor">
+            <a:schemeClr val="tx1"/>
+          </a:fontRef>
+        </p:style>
+      </p:cxnSp>
+      <p:cxnSp>
+        <p:nvCxnSpPr>
+          <p:cNvPr id="237" name="Straight Arrow Connector 236">
+            <a:extLst>
+              <a:ext uri="{FF2B5EF4-FFF2-40B4-BE49-F238E27FC236}">
+                <a16:creationId xmlns:a16="http://schemas.microsoft.com/office/drawing/2014/main" id="{D72EAF38-5B7A-2270-AA4A-0A29382397CE}"/>
+              </a:ext>
+            </a:extLst>
+          </p:cNvPr>
+          <p:cNvCxnSpPr>
+            <a:cxnSpLocks/>
+          </p:cNvCxnSpPr>
+          <p:nvPr/>
+        </p:nvCxnSpPr>
+        <p:spPr>
+          <a:xfrm>
+            <a:off x="1553824" y="1161490"/>
+            <a:ext cx="1156392" cy="0"/>
+          </a:xfrm>
+          <a:prstGeom prst="straightConnector1">
+            <a:avLst/>
+          </a:prstGeom>
+          <a:ln w="57150">
+            <a:tailEnd type="triangle"/>
+          </a:ln>
+        </p:spPr>
+        <p:style>
+          <a:lnRef idx="2">
+            <a:schemeClr val="dk1"/>
+          </a:lnRef>
+          <a:fillRef idx="0">
+            <a:schemeClr val="dk1"/>
+          </a:fillRef>
+          <a:effectRef idx="1">
+            <a:schemeClr val="dk1"/>
+          </a:effectRef>
+          <a:fontRef idx="minor">
+            <a:schemeClr val="tx1"/>
+          </a:fontRef>
+        </p:style>
+      </p:cxnSp>
+      <p:sp>
+        <p:nvSpPr>
+          <p:cNvPr id="4" name="Flowchart: Magnetic Disk 3">
+            <a:extLst>
+              <a:ext uri="{FF2B5EF4-FFF2-40B4-BE49-F238E27FC236}">
+                <a16:creationId xmlns:a16="http://schemas.microsoft.com/office/drawing/2014/main" id="{B15B1171-252B-47F1-F099-9463350302DA}"/>
+              </a:ext>
+            </a:extLst>
+          </p:cNvPr>
+          <p:cNvSpPr/>
+          <p:nvPr/>
+        </p:nvSpPr>
+        <p:spPr>
+          <a:xfrm>
+            <a:off x="2459631" y="5243705"/>
+            <a:ext cx="1315092" cy="1027415"/>
+          </a:xfrm>
+          <a:prstGeom prst="flowChartMagneticDisk">
+            <a:avLst/>
+          </a:prstGeom>
+        </p:spPr>
+        <p:style>
+          <a:lnRef idx="2">
+            <a:schemeClr val="dk1"/>
+          </a:lnRef>
+          <a:fillRef idx="1">
+            <a:schemeClr val="lt1"/>
+          </a:fillRef>
+          <a:effectRef idx="0">
+            <a:schemeClr val="dk1"/>
+          </a:effectRef>
+          <a:fontRef idx="minor">
+            <a:schemeClr val="dk1"/>
+          </a:fontRef>
+        </p:style>
+        <p:txBody>
+          <a:bodyPr rtlCol="0" anchor="ctr"/>
+          <a:lstStyle/>
+          <a:p>
+            <a:pPr algn="ctr"/>
+            <a:endParaRPr lang="en-US" sz="1200" dirty="0">
+              <a:latin typeface="Poppins" panose="00000800000000000000" pitchFamily="2" charset="0"/>
+              <a:cs typeface="Poppins" panose="00000800000000000000" pitchFamily="2" charset="0"/>
+            </a:endParaRPr>
+          </a:p>
+        </p:txBody>
+      </p:sp>
+      <p:sp>
+        <p:nvSpPr>
+          <p:cNvPr id="5" name="TextBox 4">
+            <a:extLst>
+              <a:ext uri="{FF2B5EF4-FFF2-40B4-BE49-F238E27FC236}">
+                <a16:creationId xmlns:a16="http://schemas.microsoft.com/office/drawing/2014/main" id="{F6A668AB-9C81-9C36-6EF0-E9B7BB6D2090}"/>
               </a:ext>
             </a:extLst>
           </p:cNvPr>
@@ -5538,8 +3946,8 @@
         </p:nvSpPr>
         <p:spPr>
           <a:xfrm>
-            <a:off x="5293849" y="695154"/>
-            <a:ext cx="3556670" cy="276999"/>
+            <a:off x="1974016" y="6357902"/>
+            <a:ext cx="2286321" cy="461665"/>
           </a:xfrm>
           <a:prstGeom prst="rect">
             <a:avLst/>
@@ -5554,13 +3962,1820 @@
           <a:p>
             <a:pPr algn="ctr"/>
             <a:r>
-              <a:rPr lang="en-US" sz="1200" dirty="0">
+              <a:rPr lang="en-US" sz="1200" b="1" dirty="0">
+                <a:latin typeface="Poppins" panose="00000800000000000000" pitchFamily="2" charset="0"/>
+                <a:cs typeface="Poppins" panose="00000800000000000000" pitchFamily="2" charset="0"/>
+              </a:rPr>
+              <a:t>Plantar Pressure images </a:t>
+            </a:r>
+          </a:p>
+          <a:p>
+            <a:pPr algn="ctr"/>
+            <a:r>
+              <a:rPr lang="en-US" sz="1200" b="1" dirty="0">
+                <a:latin typeface="Poppins" panose="00000800000000000000" pitchFamily="2" charset="0"/>
+                <a:cs typeface="Poppins" panose="00000800000000000000" pitchFamily="2" charset="0"/>
+              </a:rPr>
+              <a:t>Dataset </a:t>
+            </a:r>
+          </a:p>
+        </p:txBody>
+      </p:sp>
+      <p:cxnSp>
+        <p:nvCxnSpPr>
+          <p:cNvPr id="7" name="Straight Arrow Connector 6">
+            <a:extLst>
+              <a:ext uri="{FF2B5EF4-FFF2-40B4-BE49-F238E27FC236}">
+                <a16:creationId xmlns:a16="http://schemas.microsoft.com/office/drawing/2014/main" id="{C995AEB9-C39F-757A-94B8-1DEDE6FB29C7}"/>
+              </a:ext>
+            </a:extLst>
+          </p:cNvPr>
+          <p:cNvCxnSpPr>
+            <a:cxnSpLocks/>
+            <a:stCxn id="4" idx="2"/>
+            <a:endCxn id="8" idx="3"/>
+          </p:cNvCxnSpPr>
+          <p:nvPr/>
+        </p:nvCxnSpPr>
+        <p:spPr>
+          <a:xfrm flipH="1" flipV="1">
+            <a:off x="1958945" y="5739126"/>
+            <a:ext cx="500686" cy="18287"/>
+          </a:xfrm>
+          <a:prstGeom prst="straightConnector1">
+            <a:avLst/>
+          </a:prstGeom>
+          <a:ln w="57150">
+            <a:tailEnd type="triangle"/>
+          </a:ln>
+        </p:spPr>
+        <p:style>
+          <a:lnRef idx="2">
+            <a:schemeClr val="dk1"/>
+          </a:lnRef>
+          <a:fillRef idx="0">
+            <a:schemeClr val="dk1"/>
+          </a:fillRef>
+          <a:effectRef idx="1">
+            <a:schemeClr val="dk1"/>
+          </a:effectRef>
+          <a:fontRef idx="minor">
+            <a:schemeClr val="tx1"/>
+          </a:fontRef>
+        </p:style>
+      </p:cxnSp>
+      <p:sp>
+        <p:nvSpPr>
+          <p:cNvPr id="8" name="Rectangle: Rounded Corners 7">
+            <a:extLst>
+              <a:ext uri="{FF2B5EF4-FFF2-40B4-BE49-F238E27FC236}">
+                <a16:creationId xmlns:a16="http://schemas.microsoft.com/office/drawing/2014/main" id="{716059DD-607C-DFCA-E0F6-25CE59EBDEB8}"/>
+              </a:ext>
+            </a:extLst>
+          </p:cNvPr>
+          <p:cNvSpPr/>
+          <p:nvPr/>
+        </p:nvSpPr>
+        <p:spPr>
+          <a:xfrm>
+            <a:off x="464917" y="5470716"/>
+            <a:ext cx="1494028" cy="536820"/>
+          </a:xfrm>
+          <a:prstGeom prst="roundRect">
+            <a:avLst/>
+          </a:prstGeom>
+          <a:ln w="19050"/>
+        </p:spPr>
+        <p:style>
+          <a:lnRef idx="2">
+            <a:schemeClr val="dk1"/>
+          </a:lnRef>
+          <a:fillRef idx="1">
+            <a:schemeClr val="lt1"/>
+          </a:fillRef>
+          <a:effectRef idx="0">
+            <a:schemeClr val="dk1"/>
+          </a:effectRef>
+          <a:fontRef idx="minor">
+            <a:schemeClr val="dk1"/>
+          </a:fontRef>
+        </p:style>
+        <p:txBody>
+          <a:bodyPr rtlCol="0" anchor="ctr"/>
+          <a:lstStyle/>
+          <a:p>
+            <a:pPr algn="ctr"/>
+            <a:r>
+              <a:rPr lang="en-US" sz="1200" dirty="0">
+                <a:latin typeface="Poppins" panose="00000800000000000000" pitchFamily="2" charset="0"/>
+                <a:cs typeface="Poppins" panose="00000800000000000000" pitchFamily="2" charset="0"/>
+              </a:rPr>
+              <a:t>Train set 80%</a:t>
+            </a:r>
+          </a:p>
+        </p:txBody>
+      </p:sp>
+      <p:sp>
+        <p:nvSpPr>
+          <p:cNvPr id="9" name="Rectangle: Rounded Corners 8">
+            <a:extLst>
+              <a:ext uri="{FF2B5EF4-FFF2-40B4-BE49-F238E27FC236}">
+                <a16:creationId xmlns:a16="http://schemas.microsoft.com/office/drawing/2014/main" id="{84B9088E-73D8-5531-35B5-031A2210B823}"/>
+              </a:ext>
+            </a:extLst>
+          </p:cNvPr>
+          <p:cNvSpPr/>
+          <p:nvPr/>
+        </p:nvSpPr>
+        <p:spPr>
+          <a:xfrm>
+            <a:off x="7056992" y="843296"/>
+            <a:ext cx="1307602" cy="528220"/>
+          </a:xfrm>
+          <a:prstGeom prst="roundRect">
+            <a:avLst/>
+          </a:prstGeom>
+          <a:ln w="19050"/>
+        </p:spPr>
+        <p:style>
+          <a:lnRef idx="2">
+            <a:schemeClr val="dk1"/>
+          </a:lnRef>
+          <a:fillRef idx="1">
+            <a:schemeClr val="lt1"/>
+          </a:fillRef>
+          <a:effectRef idx="0">
+            <a:schemeClr val="dk1"/>
+          </a:effectRef>
+          <a:fontRef idx="minor">
+            <a:schemeClr val="dk1"/>
+          </a:fontRef>
+        </p:style>
+        <p:txBody>
+          <a:bodyPr rtlCol="0" anchor="ctr"/>
+          <a:lstStyle/>
+          <a:p>
+            <a:pPr algn="ctr"/>
+            <a:r>
+              <a:rPr lang="en-US" sz="1200" dirty="0">
+                <a:latin typeface="Poppins" panose="00000800000000000000" pitchFamily="2" charset="0"/>
+                <a:cs typeface="Poppins" panose="00000800000000000000" pitchFamily="2" charset="0"/>
+              </a:rPr>
+              <a:t>Test set 20%</a:t>
+            </a:r>
+          </a:p>
+        </p:txBody>
+      </p:sp>
+      <p:sp>
+        <p:nvSpPr>
+          <p:cNvPr id="13" name="Rectangle 12">
+            <a:extLst>
+              <a:ext uri="{FF2B5EF4-FFF2-40B4-BE49-F238E27FC236}">
+                <a16:creationId xmlns:a16="http://schemas.microsoft.com/office/drawing/2014/main" id="{3F7AD8CC-B9CE-0793-5FB6-F28983A66092}"/>
+              </a:ext>
+            </a:extLst>
+          </p:cNvPr>
+          <p:cNvSpPr>
+            <a:spLocks/>
+          </p:cNvSpPr>
+          <p:nvPr/>
+        </p:nvSpPr>
+        <p:spPr>
+          <a:xfrm>
+            <a:off x="5052947" y="2345811"/>
+            <a:ext cx="5879628" cy="2775588"/>
+          </a:xfrm>
+          <a:prstGeom prst="rect">
+            <a:avLst/>
+          </a:prstGeom>
+          <a:ln>
+            <a:prstDash val="sysDash"/>
+          </a:ln>
+        </p:spPr>
+        <p:style>
+          <a:lnRef idx="2">
+            <a:schemeClr val="dk1"/>
+          </a:lnRef>
+          <a:fillRef idx="1">
+            <a:schemeClr val="lt1"/>
+          </a:fillRef>
+          <a:effectRef idx="0">
+            <a:schemeClr val="dk1"/>
+          </a:effectRef>
+          <a:fontRef idx="minor">
+            <a:schemeClr val="dk1"/>
+          </a:fontRef>
+        </p:style>
+        <p:txBody>
+          <a:bodyPr rtlCol="0" anchor="ctr"/>
+          <a:lstStyle/>
+          <a:p>
+            <a:pPr algn="ctr"/>
+            <a:endParaRPr lang="en-US"/>
+          </a:p>
+        </p:txBody>
+      </p:sp>
+      <p:sp>
+        <p:nvSpPr>
+          <p:cNvPr id="14" name="TextBox 13">
+            <a:extLst>
+              <a:ext uri="{FF2B5EF4-FFF2-40B4-BE49-F238E27FC236}">
+                <a16:creationId xmlns:a16="http://schemas.microsoft.com/office/drawing/2014/main" id="{5C9A29E6-B43E-741F-7C5F-394CFDBAAD96}"/>
+              </a:ext>
+            </a:extLst>
+          </p:cNvPr>
+          <p:cNvSpPr txBox="1"/>
+          <p:nvPr/>
+        </p:nvSpPr>
+        <p:spPr>
+          <a:xfrm>
+            <a:off x="6325200" y="6042135"/>
+            <a:ext cx="5735167" cy="584775"/>
+          </a:xfrm>
+          <a:prstGeom prst="rect">
+            <a:avLst/>
+          </a:prstGeom>
+          <a:noFill/>
+        </p:spPr>
+        <p:txBody>
+          <a:bodyPr wrap="square" rtlCol="0">
+            <a:spAutoFit/>
+          </a:bodyPr>
+          <a:lstStyle/>
+          <a:p>
+            <a:pPr algn="ctr"/>
+            <a:r>
+              <a:rPr lang="en-US" sz="3200" b="1" dirty="0">
+                <a:latin typeface="Poppins" panose="00000800000000000000" pitchFamily="2" charset="0"/>
+                <a:cs typeface="Poppins" panose="00000800000000000000" pitchFamily="2" charset="0"/>
+              </a:rPr>
+              <a:t>Proposed Model Pipeline</a:t>
+            </a:r>
+          </a:p>
+        </p:txBody>
+      </p:sp>
+      <p:sp>
+        <p:nvSpPr>
+          <p:cNvPr id="15" name="Rectangle 14">
+            <a:extLst>
+              <a:ext uri="{FF2B5EF4-FFF2-40B4-BE49-F238E27FC236}">
+                <a16:creationId xmlns:a16="http://schemas.microsoft.com/office/drawing/2014/main" id="{D5A6BA5C-5583-E3A3-A9E0-CDB02E5343E5}"/>
+              </a:ext>
+            </a:extLst>
+          </p:cNvPr>
+          <p:cNvSpPr/>
+          <p:nvPr/>
+        </p:nvSpPr>
+        <p:spPr>
+          <a:xfrm>
+            <a:off x="5241641" y="2636800"/>
+            <a:ext cx="2593372" cy="1783902"/>
+          </a:xfrm>
+          <a:prstGeom prst="rect">
+            <a:avLst/>
+          </a:prstGeom>
+        </p:spPr>
+        <p:style>
+          <a:lnRef idx="2">
+            <a:schemeClr val="dk1"/>
+          </a:lnRef>
+          <a:fillRef idx="1">
+            <a:schemeClr val="lt1"/>
+          </a:fillRef>
+          <a:effectRef idx="0">
+            <a:schemeClr val="dk1"/>
+          </a:effectRef>
+          <a:fontRef idx="minor">
+            <a:schemeClr val="dk1"/>
+          </a:fontRef>
+        </p:style>
+        <p:txBody>
+          <a:bodyPr rtlCol="0" anchor="ctr"/>
+          <a:lstStyle/>
+          <a:p>
+            <a:pPr algn="ctr"/>
+            <a:endParaRPr lang="en-US"/>
+          </a:p>
+        </p:txBody>
+      </p:sp>
+      <p:sp>
+        <p:nvSpPr>
+          <p:cNvPr id="16" name="TextBox 15">
+            <a:extLst>
+              <a:ext uri="{FF2B5EF4-FFF2-40B4-BE49-F238E27FC236}">
+                <a16:creationId xmlns:a16="http://schemas.microsoft.com/office/drawing/2014/main" id="{9157B6E7-5C4F-F806-90FA-2999289DD111}"/>
+              </a:ext>
+            </a:extLst>
+          </p:cNvPr>
+          <p:cNvSpPr txBox="1"/>
+          <p:nvPr/>
+        </p:nvSpPr>
+        <p:spPr>
+          <a:xfrm>
+            <a:off x="5340102" y="4489057"/>
+            <a:ext cx="2350213" cy="523220"/>
+          </a:xfrm>
+          <a:prstGeom prst="rect">
+            <a:avLst/>
+          </a:prstGeom>
+          <a:noFill/>
+        </p:spPr>
+        <p:txBody>
+          <a:bodyPr wrap="square" rtlCol="0">
+            <a:spAutoFit/>
+          </a:bodyPr>
+          <a:lstStyle/>
+          <a:p>
+            <a:pPr algn="ctr"/>
+            <a:r>
+              <a:rPr lang="en-US" sz="1400" b="1" dirty="0">
+                <a:latin typeface="Poppins" panose="00000800000000000000" pitchFamily="2" charset="0"/>
+                <a:cs typeface="Poppins" panose="00000800000000000000" pitchFamily="2" charset="0"/>
+              </a:rPr>
+              <a:t>CNN Backbone </a:t>
+            </a:r>
+            <a:br>
+              <a:rPr lang="en-US" sz="1400" b="1" dirty="0">
+                <a:latin typeface="Poppins" panose="00000800000000000000" pitchFamily="2" charset="0"/>
+                <a:cs typeface="Poppins" panose="00000800000000000000" pitchFamily="2" charset="0"/>
+              </a:rPr>
+            </a:br>
+            <a:r>
+              <a:rPr lang="en-US" sz="1400" b="1" dirty="0">
+                <a:latin typeface="Poppins" panose="00000800000000000000" pitchFamily="2" charset="0"/>
+                <a:cs typeface="Poppins" panose="00000800000000000000" pitchFamily="2" charset="0"/>
+              </a:rPr>
+              <a:t>(Feature Extractor)</a:t>
+            </a:r>
+          </a:p>
+        </p:txBody>
+      </p:sp>
+      <p:sp>
+        <p:nvSpPr>
+          <p:cNvPr id="17" name="TextBox 16">
+            <a:extLst>
+              <a:ext uri="{FF2B5EF4-FFF2-40B4-BE49-F238E27FC236}">
+                <a16:creationId xmlns:a16="http://schemas.microsoft.com/office/drawing/2014/main" id="{1123F81B-F3F5-EAA8-7BF7-B52072F44763}"/>
+              </a:ext>
+            </a:extLst>
+          </p:cNvPr>
+          <p:cNvSpPr txBox="1"/>
+          <p:nvPr/>
+        </p:nvSpPr>
+        <p:spPr>
+          <a:xfrm>
+            <a:off x="5241641" y="2705294"/>
+            <a:ext cx="2585554" cy="1015663"/>
+          </a:xfrm>
+          <a:prstGeom prst="rect">
+            <a:avLst/>
+          </a:prstGeom>
+          <a:noFill/>
+        </p:spPr>
+        <p:txBody>
+          <a:bodyPr wrap="square" rtlCol="0">
+            <a:spAutoFit/>
+          </a:bodyPr>
+          <a:lstStyle/>
+          <a:p>
+            <a:pPr algn="ctr"/>
+            <a:r>
+              <a:rPr lang="en-US" sz="1200" b="1" dirty="0">
+                <a:solidFill>
+                  <a:srgbClr val="C00000"/>
+                </a:solidFill>
+                <a:latin typeface="Poppins" panose="00000800000000000000" pitchFamily="2" charset="0"/>
+                <a:cs typeface="Poppins" panose="00000800000000000000" pitchFamily="2" charset="0"/>
+              </a:rPr>
+              <a:t>Phase 1 Frozen layer</a:t>
+            </a:r>
+            <a:br>
+              <a:rPr lang="en-US" sz="1200" b="1" dirty="0">
+                <a:latin typeface="Poppins" panose="00000800000000000000" pitchFamily="2" charset="0"/>
+                <a:cs typeface="Poppins" panose="00000800000000000000" pitchFamily="2" charset="0"/>
+              </a:rPr>
+            </a:br>
+            <a:r>
+              <a:rPr lang="en-US" sz="1200" b="1" dirty="0">
+                <a:solidFill>
+                  <a:srgbClr val="C00000"/>
+                </a:solidFill>
+                <a:latin typeface="Poppins" panose="00000800000000000000" pitchFamily="2" charset="0"/>
+                <a:cs typeface="Poppins" panose="00000800000000000000" pitchFamily="2" charset="0"/>
+              </a:rPr>
+              <a:t>(Pre-trained with ImageNet)</a:t>
+            </a:r>
+          </a:p>
+          <a:p>
+            <a:pPr algn="ctr"/>
+            <a:r>
+              <a:rPr lang="en-US" sz="1200" dirty="0">
+                <a:latin typeface="Poppins" panose="00000800000000000000" pitchFamily="2" charset="0"/>
+                <a:cs typeface="Poppins" panose="00000800000000000000" pitchFamily="2" charset="0"/>
+              </a:rPr>
+              <a:t>Epochs = 50</a:t>
+            </a:r>
+          </a:p>
+          <a:p>
+            <a:pPr algn="ctr"/>
+            <a:r>
+              <a:rPr lang="en-US" sz="1200" dirty="0">
+                <a:latin typeface="Poppins" panose="00000800000000000000" pitchFamily="2" charset="0"/>
+                <a:cs typeface="Poppins" panose="00000800000000000000" pitchFamily="2" charset="0"/>
+              </a:rPr>
+              <a:t>Patience = 5</a:t>
+            </a:r>
+          </a:p>
+          <a:p>
+            <a:pPr algn="ctr"/>
+            <a:endParaRPr lang="en-US" sz="1200" dirty="0">
+              <a:latin typeface="Poppins" panose="00000800000000000000" pitchFamily="2" charset="0"/>
+              <a:cs typeface="Poppins" panose="00000800000000000000" pitchFamily="2" charset="0"/>
+            </a:endParaRPr>
+          </a:p>
+        </p:txBody>
+      </p:sp>
+      <p:sp>
+        <p:nvSpPr>
+          <p:cNvPr id="19" name="TextBox 18">
+            <a:extLst>
+              <a:ext uri="{FF2B5EF4-FFF2-40B4-BE49-F238E27FC236}">
+                <a16:creationId xmlns:a16="http://schemas.microsoft.com/office/drawing/2014/main" id="{C4FACD48-1960-D3A4-D4B8-0DFD1A99B423}"/>
+              </a:ext>
+            </a:extLst>
+          </p:cNvPr>
+          <p:cNvSpPr txBox="1"/>
+          <p:nvPr/>
+        </p:nvSpPr>
+        <p:spPr>
+          <a:xfrm>
+            <a:off x="5255611" y="3591766"/>
+            <a:ext cx="2579402" cy="830997"/>
+          </a:xfrm>
+          <a:prstGeom prst="rect">
+            <a:avLst/>
+          </a:prstGeom>
+          <a:noFill/>
+        </p:spPr>
+        <p:txBody>
+          <a:bodyPr wrap="square" rtlCol="0">
+            <a:spAutoFit/>
+          </a:bodyPr>
+          <a:lstStyle/>
+          <a:p>
+            <a:pPr algn="ctr"/>
+            <a:r>
+              <a:rPr lang="en-US" sz="1200" b="1" dirty="0">
+                <a:solidFill>
+                  <a:srgbClr val="7030A0"/>
+                </a:solidFill>
+                <a:latin typeface="Poppins" panose="00000800000000000000" pitchFamily="2" charset="0"/>
+                <a:cs typeface="Poppins" panose="00000800000000000000" pitchFamily="2" charset="0"/>
+              </a:rPr>
+              <a:t>Phase 2 Unfreeze Top 30% </a:t>
+            </a:r>
+            <a:br>
+              <a:rPr lang="en-US" sz="1200" b="1" dirty="0">
+                <a:latin typeface="Poppins" panose="00000800000000000000" pitchFamily="2" charset="0"/>
+                <a:cs typeface="Poppins" panose="00000800000000000000" pitchFamily="2" charset="0"/>
+              </a:rPr>
+            </a:br>
+            <a:r>
+              <a:rPr lang="en-US" sz="1200" b="1" dirty="0">
+                <a:solidFill>
+                  <a:srgbClr val="7030A0"/>
+                </a:solidFill>
+                <a:latin typeface="Poppins" panose="00000800000000000000" pitchFamily="2" charset="0"/>
+                <a:cs typeface="Poppins" panose="00000800000000000000" pitchFamily="2" charset="0"/>
+              </a:rPr>
+              <a:t>layer (Fine-tuning)</a:t>
+            </a:r>
+          </a:p>
+          <a:p>
+            <a:pPr algn="ctr"/>
+            <a:r>
+              <a:rPr lang="en-US" sz="1200" dirty="0">
+                <a:latin typeface="Poppins" panose="00000800000000000000" pitchFamily="2" charset="0"/>
+                <a:cs typeface="Poppins" panose="00000800000000000000" pitchFamily="2" charset="0"/>
+              </a:rPr>
+              <a:t>Epochs = 50</a:t>
+            </a:r>
+          </a:p>
+          <a:p>
+            <a:pPr algn="ctr"/>
+            <a:r>
+              <a:rPr lang="en-US" sz="1200" dirty="0">
+                <a:latin typeface="Poppins" panose="00000800000000000000" pitchFamily="2" charset="0"/>
+                <a:cs typeface="Poppins" panose="00000800000000000000" pitchFamily="2" charset="0"/>
+              </a:rPr>
+              <a:t>Patience = 15</a:t>
+            </a:r>
+          </a:p>
+        </p:txBody>
+      </p:sp>
+      <p:cxnSp>
+        <p:nvCxnSpPr>
+          <p:cNvPr id="21" name="Straight Connector 20">
+            <a:extLst>
+              <a:ext uri="{FF2B5EF4-FFF2-40B4-BE49-F238E27FC236}">
+                <a16:creationId xmlns:a16="http://schemas.microsoft.com/office/drawing/2014/main" id="{7F2473FB-F6C9-E4A5-F677-D5EFE06BB503}"/>
+              </a:ext>
+            </a:extLst>
+          </p:cNvPr>
+          <p:cNvCxnSpPr>
+            <a:cxnSpLocks/>
+          </p:cNvCxnSpPr>
+          <p:nvPr/>
+        </p:nvCxnSpPr>
+        <p:spPr>
+          <a:xfrm>
+            <a:off x="5378630" y="3545607"/>
+            <a:ext cx="2319393" cy="0"/>
+          </a:xfrm>
+          <a:prstGeom prst="line">
+            <a:avLst/>
+          </a:prstGeom>
+          <a:ln>
+            <a:prstDash val="solid"/>
+          </a:ln>
+        </p:spPr>
+        <p:style>
+          <a:lnRef idx="2">
+            <a:schemeClr val="dk1"/>
+          </a:lnRef>
+          <a:fillRef idx="0">
+            <a:schemeClr val="dk1"/>
+          </a:fillRef>
+          <a:effectRef idx="1">
+            <a:schemeClr val="dk1"/>
+          </a:effectRef>
+          <a:fontRef idx="minor">
+            <a:schemeClr val="tx1"/>
+          </a:fontRef>
+        </p:style>
+      </p:cxnSp>
+      <p:cxnSp>
+        <p:nvCxnSpPr>
+          <p:cNvPr id="38" name="Straight Connector 37">
+            <a:extLst>
+              <a:ext uri="{FF2B5EF4-FFF2-40B4-BE49-F238E27FC236}">
+                <a16:creationId xmlns:a16="http://schemas.microsoft.com/office/drawing/2014/main" id="{89002E39-D0E1-6D81-41D4-99D563043749}"/>
+              </a:ext>
+            </a:extLst>
+          </p:cNvPr>
+          <p:cNvCxnSpPr>
+            <a:cxnSpLocks/>
+          </p:cNvCxnSpPr>
+          <p:nvPr/>
+        </p:nvCxnSpPr>
+        <p:spPr>
+          <a:xfrm flipH="1">
+            <a:off x="7960149" y="2458427"/>
+            <a:ext cx="15410" cy="2535763"/>
+          </a:xfrm>
+          <a:prstGeom prst="line">
+            <a:avLst/>
+          </a:prstGeom>
+          <a:ln>
+            <a:prstDash val="dash"/>
+          </a:ln>
+        </p:spPr>
+        <p:style>
+          <a:lnRef idx="2">
+            <a:schemeClr val="dk1"/>
+          </a:lnRef>
+          <a:fillRef idx="0">
+            <a:schemeClr val="dk1"/>
+          </a:fillRef>
+          <a:effectRef idx="1">
+            <a:schemeClr val="dk1"/>
+          </a:effectRef>
+          <a:fontRef idx="minor">
+            <a:schemeClr val="tx1"/>
+          </a:fontRef>
+        </p:style>
+      </p:cxnSp>
+      <p:sp>
+        <p:nvSpPr>
+          <p:cNvPr id="39" name="Rectangle 38">
+            <a:extLst>
+              <a:ext uri="{FF2B5EF4-FFF2-40B4-BE49-F238E27FC236}">
+                <a16:creationId xmlns:a16="http://schemas.microsoft.com/office/drawing/2014/main" id="{2048D14A-2236-C159-D71B-EA2E15F8F53D}"/>
+              </a:ext>
+            </a:extLst>
+          </p:cNvPr>
+          <p:cNvSpPr/>
+          <p:nvPr/>
+        </p:nvSpPr>
+        <p:spPr>
+          <a:xfrm>
+            <a:off x="8102399" y="2636800"/>
+            <a:ext cx="2632573" cy="1783902"/>
+          </a:xfrm>
+          <a:prstGeom prst="rect">
+            <a:avLst/>
+          </a:prstGeom>
+        </p:spPr>
+        <p:style>
+          <a:lnRef idx="2">
+            <a:schemeClr val="dk1"/>
+          </a:lnRef>
+          <a:fillRef idx="1">
+            <a:schemeClr val="lt1"/>
+          </a:fillRef>
+          <a:effectRef idx="0">
+            <a:schemeClr val="dk1"/>
+          </a:effectRef>
+          <a:fontRef idx="minor">
+            <a:schemeClr val="dk1"/>
+          </a:fontRef>
+        </p:style>
+        <p:txBody>
+          <a:bodyPr rtlCol="0" anchor="ctr"/>
+          <a:lstStyle/>
+          <a:p>
+            <a:pPr algn="ctr"/>
+            <a:endParaRPr lang="en-US"/>
+          </a:p>
+        </p:txBody>
+      </p:sp>
+      <p:sp>
+        <p:nvSpPr>
+          <p:cNvPr id="41" name="TextBox 40">
+            <a:extLst>
+              <a:ext uri="{FF2B5EF4-FFF2-40B4-BE49-F238E27FC236}">
+                <a16:creationId xmlns:a16="http://schemas.microsoft.com/office/drawing/2014/main" id="{38ED5D2C-441F-DE0A-1BDA-910F00BFD6D2}"/>
+              </a:ext>
+            </a:extLst>
+          </p:cNvPr>
+          <p:cNvSpPr txBox="1"/>
+          <p:nvPr/>
+        </p:nvSpPr>
+        <p:spPr>
+          <a:xfrm>
+            <a:off x="8218420" y="3077965"/>
+            <a:ext cx="2395038" cy="1066959"/>
+          </a:xfrm>
+          <a:prstGeom prst="rect">
+            <a:avLst/>
+          </a:prstGeom>
+          <a:noFill/>
+        </p:spPr>
+        <p:txBody>
+          <a:bodyPr wrap="square" rtlCol="0">
+            <a:spAutoFit/>
+          </a:bodyPr>
+          <a:lstStyle/>
+          <a:p>
+            <a:pPr algn="ctr">
+              <a:spcAft>
+                <a:spcPts val="130"/>
+              </a:spcAft>
+            </a:pPr>
+            <a:r>
+              <a:rPr lang="en-US" sz="1200" dirty="0">
+                <a:latin typeface="Poppins" panose="00000800000000000000" pitchFamily="2" charset="0"/>
+                <a:cs typeface="Poppins" panose="00000800000000000000" pitchFamily="2" charset="0"/>
+              </a:rPr>
+              <a:t>Global Average Pooling 2D</a:t>
+            </a:r>
+          </a:p>
+          <a:p>
+            <a:pPr algn="ctr">
+              <a:spcAft>
+                <a:spcPts val="130"/>
+              </a:spcAft>
+            </a:pPr>
+            <a:r>
+              <a:rPr lang="en-US" sz="1200" dirty="0">
+                <a:latin typeface="Poppins" panose="00000800000000000000" pitchFamily="2" charset="0"/>
+                <a:cs typeface="Poppins" panose="00000800000000000000" pitchFamily="2" charset="0"/>
+              </a:rPr>
+              <a:t>Dense (ReLU) + L2 + Dropout</a:t>
+            </a:r>
+          </a:p>
+          <a:p>
+            <a:pPr algn="ctr">
+              <a:spcAft>
+                <a:spcPts val="130"/>
+              </a:spcAft>
+            </a:pPr>
+            <a:r>
+              <a:rPr lang="en-US" sz="1200" dirty="0">
+                <a:latin typeface="Poppins" panose="00000800000000000000" pitchFamily="2" charset="0"/>
+                <a:cs typeface="Poppins" panose="00000800000000000000" pitchFamily="2" charset="0"/>
+              </a:rPr>
+              <a:t>Dense (ReLU) + L2 + Dropout</a:t>
+            </a:r>
+          </a:p>
+          <a:p>
+            <a:pPr algn="ctr">
+              <a:spcAft>
+                <a:spcPts val="130"/>
+              </a:spcAft>
+            </a:pPr>
+            <a:r>
+              <a:rPr lang="en-US" sz="1200" dirty="0">
+                <a:latin typeface="Poppins" panose="00000800000000000000" pitchFamily="2" charset="0"/>
+                <a:cs typeface="Poppins" panose="00000800000000000000" pitchFamily="2" charset="0"/>
+              </a:rPr>
+              <a:t>Dense (1, Sigmoid)</a:t>
+            </a:r>
+          </a:p>
+          <a:p>
+            <a:pPr algn="ctr">
+              <a:spcAft>
+                <a:spcPts val="130"/>
+              </a:spcAft>
+            </a:pPr>
+            <a:endParaRPr lang="en-US" sz="1200" dirty="0">
+              <a:latin typeface="Poppins" panose="00000800000000000000" pitchFamily="2" charset="0"/>
+              <a:cs typeface="Poppins" panose="00000800000000000000" pitchFamily="2" charset="0"/>
+            </a:endParaRPr>
+          </a:p>
+        </p:txBody>
+      </p:sp>
+      <p:sp>
+        <p:nvSpPr>
+          <p:cNvPr id="44" name="TextBox 43">
+            <a:extLst>
+              <a:ext uri="{FF2B5EF4-FFF2-40B4-BE49-F238E27FC236}">
+                <a16:creationId xmlns:a16="http://schemas.microsoft.com/office/drawing/2014/main" id="{38FF6E07-7966-A52C-7E3C-945E96A6E5B3}"/>
+              </a:ext>
+            </a:extLst>
+          </p:cNvPr>
+          <p:cNvSpPr txBox="1"/>
+          <p:nvPr/>
+        </p:nvSpPr>
+        <p:spPr>
+          <a:xfrm>
+            <a:off x="8650595" y="4532200"/>
+            <a:ext cx="1705959" cy="307777"/>
+          </a:xfrm>
+          <a:prstGeom prst="rect">
+            <a:avLst/>
+          </a:prstGeom>
+          <a:noFill/>
+        </p:spPr>
+        <p:txBody>
+          <a:bodyPr wrap="square" rtlCol="0">
+            <a:spAutoFit/>
+          </a:bodyPr>
+          <a:lstStyle/>
+          <a:p>
+            <a:r>
+              <a:rPr lang="en-US" sz="1400" b="1" dirty="0">
+                <a:latin typeface="Poppins" panose="00000800000000000000" pitchFamily="2" charset="0"/>
+                <a:cs typeface="Poppins" panose="00000800000000000000" pitchFamily="2" charset="0"/>
+              </a:rPr>
+              <a:t>Classifier Head</a:t>
+            </a:r>
+          </a:p>
+        </p:txBody>
+      </p:sp>
+      <p:cxnSp>
+        <p:nvCxnSpPr>
+          <p:cNvPr id="45" name="Straight Arrow Connector 44">
+            <a:extLst>
+              <a:ext uri="{FF2B5EF4-FFF2-40B4-BE49-F238E27FC236}">
+                <a16:creationId xmlns:a16="http://schemas.microsoft.com/office/drawing/2014/main" id="{270EE531-2786-9359-1681-B18F2B5D84FD}"/>
+              </a:ext>
+            </a:extLst>
+          </p:cNvPr>
+          <p:cNvCxnSpPr>
+            <a:cxnSpLocks/>
+          </p:cNvCxnSpPr>
+          <p:nvPr/>
+        </p:nvCxnSpPr>
+        <p:spPr>
+          <a:xfrm flipH="1" flipV="1">
+            <a:off x="2213467" y="2458427"/>
+            <a:ext cx="2845055" cy="2958"/>
+          </a:xfrm>
+          <a:prstGeom prst="straightConnector1">
+            <a:avLst/>
+          </a:prstGeom>
+          <a:ln w="57150">
+            <a:tailEnd type="triangle"/>
+          </a:ln>
+        </p:spPr>
+        <p:style>
+          <a:lnRef idx="2">
+            <a:schemeClr val="dk1"/>
+          </a:lnRef>
+          <a:fillRef idx="0">
+            <a:schemeClr val="dk1"/>
+          </a:fillRef>
+          <a:effectRef idx="1">
+            <a:schemeClr val="dk1"/>
+          </a:effectRef>
+          <a:fontRef idx="minor">
+            <a:schemeClr val="tx1"/>
+          </a:fontRef>
+        </p:style>
+      </p:cxnSp>
+      <p:sp>
+        <p:nvSpPr>
+          <p:cNvPr id="47" name="Rectangle: Rounded Corners 46">
+            <a:extLst>
+              <a:ext uri="{FF2B5EF4-FFF2-40B4-BE49-F238E27FC236}">
+                <a16:creationId xmlns:a16="http://schemas.microsoft.com/office/drawing/2014/main" id="{7C1F6072-42B6-7CF2-1DFD-0D0E542F09A6}"/>
+              </a:ext>
+            </a:extLst>
+          </p:cNvPr>
+          <p:cNvSpPr/>
+          <p:nvPr/>
+        </p:nvSpPr>
+        <p:spPr>
+          <a:xfrm>
+            <a:off x="356213" y="2144910"/>
+            <a:ext cx="1846220" cy="820159"/>
+          </a:xfrm>
+          <a:prstGeom prst="roundRect">
+            <a:avLst/>
+          </a:prstGeom>
+          <a:ln w="19050"/>
+        </p:spPr>
+        <p:style>
+          <a:lnRef idx="2">
+            <a:schemeClr val="dk1"/>
+          </a:lnRef>
+          <a:fillRef idx="1">
+            <a:schemeClr val="lt1"/>
+          </a:fillRef>
+          <a:effectRef idx="0">
+            <a:schemeClr val="dk1"/>
+          </a:effectRef>
+          <a:fontRef idx="minor">
+            <a:schemeClr val="dk1"/>
+          </a:fontRef>
+        </p:style>
+        <p:txBody>
+          <a:bodyPr rtlCol="0" anchor="ctr"/>
+          <a:lstStyle/>
+          <a:p>
+            <a:pPr algn="ctr"/>
+            <a:r>
+              <a:rPr lang="en-US" sz="1200" b="1" dirty="0">
+                <a:latin typeface="Poppins" panose="00000800000000000000" pitchFamily="2" charset="0"/>
+                <a:cs typeface="Poppins" panose="00000800000000000000" pitchFamily="2" charset="0"/>
+              </a:rPr>
+              <a:t>Backbone Selection</a:t>
+            </a:r>
+            <a:br>
+              <a:rPr lang="en-US" sz="1200" dirty="0">
+                <a:latin typeface="Poppins" panose="00000800000000000000" pitchFamily="2" charset="0"/>
+                <a:cs typeface="Poppins" panose="00000800000000000000" pitchFamily="2" charset="0"/>
+              </a:rPr>
+            </a:br>
+            <a:r>
+              <a:rPr lang="en-US" sz="1200" dirty="0">
+                <a:latin typeface="Poppins" panose="00000800000000000000" pitchFamily="2" charset="0"/>
+                <a:cs typeface="Poppins" panose="00000800000000000000" pitchFamily="2" charset="0"/>
+              </a:rPr>
+              <a:t>(EfficientNetB0, Resnet50 and ConvNeXt-Tiny)</a:t>
+            </a:r>
+          </a:p>
+        </p:txBody>
+      </p:sp>
+      <p:sp>
+        <p:nvSpPr>
+          <p:cNvPr id="52" name="Rectangle: Rounded Corners 51">
+            <a:extLst>
+              <a:ext uri="{FF2B5EF4-FFF2-40B4-BE49-F238E27FC236}">
+                <a16:creationId xmlns:a16="http://schemas.microsoft.com/office/drawing/2014/main" id="{3C6860B1-23BA-83EA-147C-C363CB12F20A}"/>
+              </a:ext>
+            </a:extLst>
+          </p:cNvPr>
+          <p:cNvSpPr/>
+          <p:nvPr/>
+        </p:nvSpPr>
+        <p:spPr>
+          <a:xfrm>
+            <a:off x="2710216" y="757568"/>
+            <a:ext cx="1760295" cy="719695"/>
+          </a:xfrm>
+          <a:prstGeom prst="roundRect">
+            <a:avLst/>
+          </a:prstGeom>
+          <a:ln w="19050"/>
+        </p:spPr>
+        <p:style>
+          <a:lnRef idx="2">
+            <a:schemeClr val="dk1"/>
+          </a:lnRef>
+          <a:fillRef idx="1">
+            <a:schemeClr val="lt1"/>
+          </a:fillRef>
+          <a:effectRef idx="0">
+            <a:schemeClr val="dk1"/>
+          </a:effectRef>
+          <a:fontRef idx="minor">
+            <a:schemeClr val="dk1"/>
+          </a:fontRef>
+        </p:style>
+        <p:txBody>
+          <a:bodyPr rtlCol="0" anchor="ctr"/>
+          <a:lstStyle/>
+          <a:p>
+            <a:pPr algn="ctr"/>
+            <a:r>
+              <a:rPr lang="en-US" sz="1200" dirty="0">
+                <a:latin typeface="Poppins" panose="00000800000000000000" pitchFamily="2" charset="0"/>
+                <a:cs typeface="Poppins" panose="00000800000000000000" pitchFamily="2" charset="0"/>
+              </a:rPr>
+              <a:t>Average optimal Threshold from Youden Index</a:t>
+            </a:r>
+          </a:p>
+        </p:txBody>
+      </p:sp>
+      <p:cxnSp>
+        <p:nvCxnSpPr>
+          <p:cNvPr id="53" name="Straight Arrow Connector 52">
+            <a:extLst>
+              <a:ext uri="{FF2B5EF4-FFF2-40B4-BE49-F238E27FC236}">
+                <a16:creationId xmlns:a16="http://schemas.microsoft.com/office/drawing/2014/main" id="{7EAC1788-1FF9-DF00-F2CD-B90BC2DEDFE6}"/>
+              </a:ext>
+            </a:extLst>
+          </p:cNvPr>
+          <p:cNvCxnSpPr>
+            <a:cxnSpLocks/>
+            <a:stCxn id="47" idx="0"/>
+            <a:endCxn id="143" idx="2"/>
+          </p:cNvCxnSpPr>
+          <p:nvPr/>
+        </p:nvCxnSpPr>
+        <p:spPr>
+          <a:xfrm flipH="1" flipV="1">
+            <a:off x="1277584" y="1807327"/>
+            <a:ext cx="1739" cy="337583"/>
+          </a:xfrm>
+          <a:prstGeom prst="straightConnector1">
+            <a:avLst/>
+          </a:prstGeom>
+          <a:ln w="57150">
+            <a:tailEnd type="triangle"/>
+          </a:ln>
+        </p:spPr>
+        <p:style>
+          <a:lnRef idx="2">
+            <a:schemeClr val="dk1"/>
+          </a:lnRef>
+          <a:fillRef idx="0">
+            <a:schemeClr val="dk1"/>
+          </a:fillRef>
+          <a:effectRef idx="1">
+            <a:schemeClr val="dk1"/>
+          </a:effectRef>
+          <a:fontRef idx="minor">
+            <a:schemeClr val="tx1"/>
+          </a:fontRef>
+        </p:style>
+      </p:cxnSp>
+      <p:sp>
+        <p:nvSpPr>
+          <p:cNvPr id="59" name="Rectangle: Rounded Corners 58">
+            <a:extLst>
+              <a:ext uri="{FF2B5EF4-FFF2-40B4-BE49-F238E27FC236}">
+                <a16:creationId xmlns:a16="http://schemas.microsoft.com/office/drawing/2014/main" id="{8052D859-085D-C00B-2AC0-2F5C5F739C35}"/>
+              </a:ext>
+            </a:extLst>
+          </p:cNvPr>
+          <p:cNvSpPr/>
+          <p:nvPr/>
+        </p:nvSpPr>
+        <p:spPr>
+          <a:xfrm>
+            <a:off x="4806686" y="722375"/>
+            <a:ext cx="1847441" cy="785818"/>
+          </a:xfrm>
+          <a:prstGeom prst="roundRect">
+            <a:avLst/>
+          </a:prstGeom>
+          <a:ln w="19050"/>
+        </p:spPr>
+        <p:style>
+          <a:lnRef idx="2">
+            <a:schemeClr val="dk1"/>
+          </a:lnRef>
+          <a:fillRef idx="1">
+            <a:schemeClr val="lt1"/>
+          </a:fillRef>
+          <a:effectRef idx="0">
+            <a:schemeClr val="dk1"/>
+          </a:effectRef>
+          <a:fontRef idx="minor">
+            <a:schemeClr val="dk1"/>
+          </a:fontRef>
+        </p:style>
+        <p:txBody>
+          <a:bodyPr rtlCol="0" anchor="ctr"/>
+          <a:lstStyle/>
+          <a:p>
+            <a:pPr algn="ctr"/>
+            <a:r>
+              <a:rPr lang="en-US" sz="1200" dirty="0">
+                <a:latin typeface="Poppins" panose="00000800000000000000" pitchFamily="2" charset="0"/>
+                <a:cs typeface="Poppins" panose="00000800000000000000" pitchFamily="2" charset="0"/>
+              </a:rPr>
+              <a:t>Re-train on </a:t>
+            </a:r>
+            <a:br>
+              <a:rPr lang="en-US" sz="1200" dirty="0">
+                <a:latin typeface="Poppins" panose="00000800000000000000" pitchFamily="2" charset="0"/>
+                <a:cs typeface="Poppins" panose="00000800000000000000" pitchFamily="2" charset="0"/>
+              </a:rPr>
+            </a:br>
+            <a:r>
+              <a:rPr lang="en-US" sz="1200" dirty="0">
+                <a:latin typeface="Poppins" panose="00000800000000000000" pitchFamily="2" charset="0"/>
+                <a:cs typeface="Poppins" panose="00000800000000000000" pitchFamily="2" charset="0"/>
+              </a:rPr>
+              <a:t>Full Train set 80% </a:t>
+            </a:r>
+            <a:br>
+              <a:rPr lang="en-US" sz="1200" dirty="0">
+                <a:latin typeface="Poppins" panose="00000800000000000000" pitchFamily="2" charset="0"/>
+                <a:cs typeface="Poppins" panose="00000800000000000000" pitchFamily="2" charset="0"/>
+              </a:rPr>
+            </a:br>
+            <a:r>
+              <a:rPr lang="en-US" sz="1200" dirty="0">
+                <a:latin typeface="Poppins" panose="00000800000000000000" pitchFamily="2" charset="0"/>
+                <a:cs typeface="Poppins" panose="00000800000000000000" pitchFamily="2" charset="0"/>
+              </a:rPr>
+              <a:t>(average stopping epoch)</a:t>
+            </a:r>
+          </a:p>
+        </p:txBody>
+      </p:sp>
+      <p:sp>
+        <p:nvSpPr>
+          <p:cNvPr id="143" name="Diamond 142">
+            <a:extLst>
+              <a:ext uri="{FF2B5EF4-FFF2-40B4-BE49-F238E27FC236}">
+                <a16:creationId xmlns:a16="http://schemas.microsoft.com/office/drawing/2014/main" id="{2F6D530C-558A-A32E-22CE-6D965808B922}"/>
+              </a:ext>
+            </a:extLst>
+          </p:cNvPr>
+          <p:cNvSpPr/>
+          <p:nvPr/>
+        </p:nvSpPr>
+        <p:spPr>
+          <a:xfrm>
+            <a:off x="208534" y="515653"/>
+            <a:ext cx="2138099" cy="1291674"/>
+          </a:xfrm>
+          <a:prstGeom prst="diamond">
+            <a:avLst/>
+          </a:prstGeom>
+        </p:spPr>
+        <p:style>
+          <a:lnRef idx="2">
+            <a:schemeClr val="dk1"/>
+          </a:lnRef>
+          <a:fillRef idx="1">
+            <a:schemeClr val="lt1"/>
+          </a:fillRef>
+          <a:effectRef idx="0">
+            <a:schemeClr val="dk1"/>
+          </a:effectRef>
+          <a:fontRef idx="minor">
+            <a:schemeClr val="dk1"/>
+          </a:fontRef>
+        </p:style>
+        <p:txBody>
+          <a:bodyPr rtlCol="0" anchor="ctr"/>
+          <a:lstStyle/>
+          <a:p>
+            <a:pPr algn="ctr"/>
+            <a:endParaRPr lang="en-US" sz="1200" b="1" dirty="0">
+              <a:latin typeface="Poppins" panose="00000800000000000000" pitchFamily="2" charset="0"/>
+              <a:cs typeface="Poppins" panose="00000800000000000000" pitchFamily="2" charset="0"/>
+            </a:endParaRPr>
+          </a:p>
+          <a:p>
+            <a:pPr algn="ctr"/>
+            <a:r>
+              <a:rPr lang="en-US" sz="1200" b="1" dirty="0">
+                <a:latin typeface="Poppins" panose="00000800000000000000" pitchFamily="2" charset="0"/>
+                <a:cs typeface="Poppins" panose="00000800000000000000" pitchFamily="2" charset="0"/>
+              </a:rPr>
+              <a:t> Selection Criteria:</a:t>
+            </a:r>
+          </a:p>
+          <a:p>
+            <a:pPr algn="ctr"/>
+            <a:r>
+              <a:rPr lang="en-US" sz="1200" dirty="0">
+                <a:latin typeface="Poppins" panose="00000800000000000000" pitchFamily="2" charset="0"/>
+                <a:cs typeface="Poppins" panose="00000800000000000000" pitchFamily="2" charset="0"/>
+              </a:rPr>
+              <a:t>AUC &gt; 80%</a:t>
+            </a:r>
+            <a:br>
+              <a:rPr lang="en-US" sz="1200" dirty="0">
+                <a:latin typeface="Poppins" panose="00000800000000000000" pitchFamily="2" charset="0"/>
+                <a:cs typeface="Poppins" panose="00000800000000000000" pitchFamily="2" charset="0"/>
+              </a:rPr>
+            </a:br>
+            <a:r>
+              <a:rPr lang="en-US" sz="1200" dirty="0">
+                <a:latin typeface="Poppins" panose="00000800000000000000" pitchFamily="2" charset="0"/>
+                <a:cs typeface="Poppins" panose="00000800000000000000" pitchFamily="2" charset="0"/>
+              </a:rPr>
+              <a:t>Sen &gt; 85%</a:t>
+            </a:r>
+            <a:br>
+              <a:rPr lang="en-US" sz="1200" dirty="0">
+                <a:latin typeface="Poppins" panose="00000800000000000000" pitchFamily="2" charset="0"/>
+                <a:cs typeface="Poppins" panose="00000800000000000000" pitchFamily="2" charset="0"/>
+              </a:rPr>
+            </a:br>
+            <a:r>
+              <a:rPr lang="en-US" sz="1200" dirty="0">
+                <a:latin typeface="Poppins" panose="00000800000000000000" pitchFamily="2" charset="0"/>
+                <a:cs typeface="Poppins" panose="00000800000000000000" pitchFamily="2" charset="0"/>
+              </a:rPr>
+              <a:t>Spec &gt; 70%</a:t>
+            </a:r>
+          </a:p>
+          <a:p>
+            <a:pPr algn="ctr"/>
+            <a:endParaRPr lang="en-US" sz="1200" dirty="0"/>
+          </a:p>
+        </p:txBody>
+      </p:sp>
+      <p:sp>
+        <p:nvSpPr>
+          <p:cNvPr id="201" name="TextBox 200">
+            <a:extLst>
+              <a:ext uri="{FF2B5EF4-FFF2-40B4-BE49-F238E27FC236}">
+                <a16:creationId xmlns:a16="http://schemas.microsoft.com/office/drawing/2014/main" id="{30B8E9DF-5C40-7BAB-C8EE-21D1FC635941}"/>
+              </a:ext>
+            </a:extLst>
+          </p:cNvPr>
+          <p:cNvSpPr txBox="1"/>
+          <p:nvPr/>
+        </p:nvSpPr>
+        <p:spPr>
+          <a:xfrm>
+            <a:off x="-459777" y="58399"/>
+            <a:ext cx="3474720" cy="461665"/>
+          </a:xfrm>
+          <a:prstGeom prst="rect">
+            <a:avLst/>
+          </a:prstGeom>
+          <a:noFill/>
+        </p:spPr>
+        <p:txBody>
+          <a:bodyPr wrap="square" rtlCol="0">
+            <a:spAutoFit/>
+          </a:bodyPr>
+          <a:lstStyle/>
+          <a:p>
+            <a:pPr algn="ctr"/>
+            <a:r>
+              <a:rPr lang="en-US" sz="1200" b="1" dirty="0">
+                <a:latin typeface="Poppins" panose="00000800000000000000" pitchFamily="2" charset="0"/>
+                <a:cs typeface="Poppins" panose="00000800000000000000" pitchFamily="2" charset="0"/>
+              </a:rPr>
+              <a:t>No meet &amp; All meet criteria: </a:t>
+            </a:r>
+            <a:br>
+              <a:rPr lang="en-US" sz="1200" b="1" dirty="0">
+                <a:latin typeface="Poppins" panose="00000800000000000000" pitchFamily="2" charset="0"/>
+                <a:cs typeface="Poppins" panose="00000800000000000000" pitchFamily="2" charset="0"/>
+              </a:rPr>
+            </a:br>
+            <a:r>
+              <a:rPr lang="en-US" sz="1200" b="1" dirty="0">
+                <a:solidFill>
+                  <a:srgbClr val="FF0000"/>
+                </a:solidFill>
+                <a:latin typeface="Poppins" panose="00000800000000000000" pitchFamily="2" charset="0"/>
+                <a:cs typeface="Poppins" panose="00000800000000000000" pitchFamily="2" charset="0"/>
+              </a:rPr>
+              <a:t>selected by Highest AUC</a:t>
+            </a:r>
+          </a:p>
+        </p:txBody>
+      </p:sp>
+      <p:sp>
+        <p:nvSpPr>
+          <p:cNvPr id="212" name="Rectangle: Rounded Corners 211">
+            <a:extLst>
+              <a:ext uri="{FF2B5EF4-FFF2-40B4-BE49-F238E27FC236}">
+                <a16:creationId xmlns:a16="http://schemas.microsoft.com/office/drawing/2014/main" id="{504AA618-3237-AE79-9A8A-56363495F7C8}"/>
+              </a:ext>
+            </a:extLst>
+          </p:cNvPr>
+          <p:cNvSpPr/>
+          <p:nvPr/>
+        </p:nvSpPr>
+        <p:spPr>
+          <a:xfrm>
+            <a:off x="8950134" y="737145"/>
+            <a:ext cx="2007699" cy="1402429"/>
+          </a:xfrm>
+          <a:prstGeom prst="roundRect">
+            <a:avLst/>
+          </a:prstGeom>
+          <a:ln w="19050"/>
+        </p:spPr>
+        <p:style>
+          <a:lnRef idx="2">
+            <a:schemeClr val="dk1"/>
+          </a:lnRef>
+          <a:fillRef idx="1">
+            <a:schemeClr val="lt1"/>
+          </a:fillRef>
+          <a:effectRef idx="0">
+            <a:schemeClr val="dk1"/>
+          </a:effectRef>
+          <a:fontRef idx="minor">
+            <a:schemeClr val="dk1"/>
+          </a:fontRef>
+        </p:style>
+        <p:txBody>
+          <a:bodyPr rtlCol="0" anchor="ctr"/>
+          <a:lstStyle/>
+          <a:p>
+            <a:pPr algn="ctr"/>
+            <a:r>
+              <a:rPr lang="en-US" sz="1200" b="1" dirty="0">
+                <a:latin typeface="Poppins" panose="00000800000000000000" pitchFamily="2" charset="0"/>
+                <a:cs typeface="Poppins" panose="00000800000000000000" pitchFamily="2" charset="0"/>
+              </a:rPr>
+              <a:t>Performance Results:</a:t>
+            </a:r>
+            <a:br>
+              <a:rPr lang="en-US" sz="1200" b="1" dirty="0">
+                <a:latin typeface="Poppins" panose="00000800000000000000" pitchFamily="2" charset="0"/>
+                <a:cs typeface="Poppins" panose="00000800000000000000" pitchFamily="2" charset="0"/>
+              </a:rPr>
+            </a:br>
+            <a:r>
+              <a:rPr lang="en-US" sz="1200" dirty="0">
+                <a:latin typeface="Poppins" panose="00000800000000000000" pitchFamily="2" charset="0"/>
+                <a:cs typeface="Poppins" panose="00000800000000000000" pitchFamily="2" charset="0"/>
+              </a:rPr>
+              <a:t>Sensitivity</a:t>
+            </a:r>
+            <a:br>
+              <a:rPr lang="en-US" sz="1200" dirty="0">
+                <a:latin typeface="Poppins" panose="00000800000000000000" pitchFamily="2" charset="0"/>
+                <a:cs typeface="Poppins" panose="00000800000000000000" pitchFamily="2" charset="0"/>
+              </a:rPr>
+            </a:br>
+            <a:r>
+              <a:rPr lang="en-US" sz="1200" dirty="0">
+                <a:latin typeface="Poppins" panose="00000800000000000000" pitchFamily="2" charset="0"/>
+                <a:cs typeface="Poppins" panose="00000800000000000000" pitchFamily="2" charset="0"/>
+              </a:rPr>
+              <a:t>Specificity</a:t>
+            </a:r>
+            <a:br>
+              <a:rPr lang="en-US" sz="1200" dirty="0">
+                <a:latin typeface="Poppins" panose="00000800000000000000" pitchFamily="2" charset="0"/>
+                <a:cs typeface="Poppins" panose="00000800000000000000" pitchFamily="2" charset="0"/>
+              </a:rPr>
+            </a:br>
+            <a:r>
+              <a:rPr lang="en-US" sz="1200" dirty="0">
+                <a:latin typeface="Poppins" panose="00000800000000000000" pitchFamily="2" charset="0"/>
+                <a:cs typeface="Poppins" panose="00000800000000000000" pitchFamily="2" charset="0"/>
+              </a:rPr>
+              <a:t>AUC-ROC</a:t>
+            </a:r>
+            <a:br>
+              <a:rPr lang="en-US" sz="1200" dirty="0">
+                <a:latin typeface="Poppins" panose="00000800000000000000" pitchFamily="2" charset="0"/>
+                <a:cs typeface="Poppins" panose="00000800000000000000" pitchFamily="2" charset="0"/>
+              </a:rPr>
+            </a:br>
+            <a:r>
+              <a:rPr lang="en-US" sz="1200" dirty="0">
+                <a:latin typeface="Poppins" panose="00000800000000000000" pitchFamily="2" charset="0"/>
+                <a:cs typeface="Poppins" panose="00000800000000000000" pitchFamily="2" charset="0"/>
+              </a:rPr>
+              <a:t>PPV</a:t>
+            </a:r>
+            <a:br>
+              <a:rPr lang="en-US" sz="1200" dirty="0">
+                <a:latin typeface="Poppins" panose="00000800000000000000" pitchFamily="2" charset="0"/>
+                <a:cs typeface="Poppins" panose="00000800000000000000" pitchFamily="2" charset="0"/>
+              </a:rPr>
+            </a:br>
+            <a:r>
+              <a:rPr lang="en-US" sz="1200" dirty="0">
+                <a:latin typeface="Poppins" panose="00000800000000000000" pitchFamily="2" charset="0"/>
+                <a:cs typeface="Poppins" panose="00000800000000000000" pitchFamily="2" charset="0"/>
+              </a:rPr>
+              <a:t>NPV</a:t>
+            </a:r>
+            <a:br>
+              <a:rPr lang="en-US" sz="1200" dirty="0">
+                <a:latin typeface="Poppins" panose="00000800000000000000" pitchFamily="2" charset="0"/>
+                <a:cs typeface="Poppins" panose="00000800000000000000" pitchFamily="2" charset="0"/>
+              </a:rPr>
+            </a:br>
+            <a:r>
+              <a:rPr lang="en-US" sz="1200" dirty="0">
+                <a:latin typeface="Poppins" panose="00000800000000000000" pitchFamily="2" charset="0"/>
+                <a:cs typeface="Poppins" panose="00000800000000000000" pitchFamily="2" charset="0"/>
+              </a:rPr>
+              <a:t>F1-Score</a:t>
+            </a:r>
+          </a:p>
+        </p:txBody>
+      </p:sp>
+      <p:sp>
+        <p:nvSpPr>
+          <p:cNvPr id="254" name="Rectangle: Rounded Corners 253">
+            <a:extLst>
+              <a:ext uri="{FF2B5EF4-FFF2-40B4-BE49-F238E27FC236}">
+                <a16:creationId xmlns:a16="http://schemas.microsoft.com/office/drawing/2014/main" id="{8FA064CF-8E5C-B056-B35E-24A011E92184}"/>
+              </a:ext>
+            </a:extLst>
+          </p:cNvPr>
+          <p:cNvSpPr/>
+          <p:nvPr/>
+        </p:nvSpPr>
+        <p:spPr>
+          <a:xfrm>
+            <a:off x="200692" y="3130750"/>
+            <a:ext cx="2138099" cy="1788216"/>
+          </a:xfrm>
+          <a:prstGeom prst="roundRect">
+            <a:avLst/>
+          </a:prstGeom>
+          <a:ln w="19050"/>
+        </p:spPr>
+        <p:style>
+          <a:lnRef idx="2">
+            <a:schemeClr val="dk1"/>
+          </a:lnRef>
+          <a:fillRef idx="1">
+            <a:schemeClr val="lt1"/>
+          </a:fillRef>
+          <a:effectRef idx="0">
+            <a:schemeClr val="dk1"/>
+          </a:effectRef>
+          <a:fontRef idx="minor">
+            <a:schemeClr val="dk1"/>
+          </a:fontRef>
+        </p:style>
+        <p:txBody>
+          <a:bodyPr rtlCol="0" anchor="ctr"/>
+          <a:lstStyle/>
+          <a:p>
+            <a:pPr algn="ctr"/>
+            <a:r>
+              <a:rPr lang="en-US" sz="1200" b="1" dirty="0">
+                <a:solidFill>
+                  <a:srgbClr val="0070C0"/>
+                </a:solidFill>
+                <a:latin typeface="Poppins" panose="00000800000000000000" pitchFamily="2" charset="0"/>
+                <a:cs typeface="Poppins" panose="00000800000000000000" pitchFamily="2" charset="0"/>
+              </a:rPr>
+              <a:t>Optuna</a:t>
+            </a:r>
+            <a:r>
+              <a:rPr lang="th-TH" sz="1200" b="1" dirty="0">
+                <a:solidFill>
+                  <a:srgbClr val="0070C0"/>
+                </a:solidFill>
+                <a:latin typeface="Poppins" panose="00000800000000000000" pitchFamily="2" charset="0"/>
+                <a:cs typeface="Poppins" panose="00000800000000000000" pitchFamily="2" charset="0"/>
+              </a:rPr>
+              <a:t> </a:t>
+            </a:r>
+            <a:r>
+              <a:rPr lang="en-US" sz="1200" b="1" dirty="0">
+                <a:solidFill>
+                  <a:srgbClr val="0070C0"/>
+                </a:solidFill>
+                <a:latin typeface="Poppins" panose="00000800000000000000" pitchFamily="2" charset="0"/>
+                <a:cs typeface="Poppins" panose="00000800000000000000" pitchFamily="2" charset="0"/>
+              </a:rPr>
+              <a:t>(TPE Sampler)</a:t>
+            </a:r>
+            <a:br>
+              <a:rPr lang="en-US" sz="1200" b="1" dirty="0">
+                <a:solidFill>
+                  <a:srgbClr val="0070C0"/>
+                </a:solidFill>
+                <a:latin typeface="Poppins" panose="00000800000000000000" pitchFamily="2" charset="0"/>
+                <a:cs typeface="Poppins" panose="00000800000000000000" pitchFamily="2" charset="0"/>
+              </a:rPr>
+            </a:br>
+            <a:r>
+              <a:rPr lang="en-US" sz="1200" b="1" dirty="0">
+                <a:solidFill>
+                  <a:srgbClr val="0070C0"/>
+                </a:solidFill>
+                <a:latin typeface="Poppins" panose="00000800000000000000" pitchFamily="2" charset="0"/>
+                <a:cs typeface="Poppins" panose="00000800000000000000" pitchFamily="2" charset="0"/>
+              </a:rPr>
+              <a:t> 10 trials, (1-fold only)</a:t>
+            </a:r>
+            <a:br>
+              <a:rPr lang="th-TH" sz="1200" dirty="0">
+                <a:solidFill>
+                  <a:schemeClr val="tx1"/>
+                </a:solidFill>
+                <a:latin typeface="Poppins" panose="00000800000000000000" pitchFamily="2" charset="0"/>
+                <a:cs typeface="Poppins" panose="00000800000000000000" pitchFamily="2" charset="0"/>
+              </a:rPr>
+            </a:br>
+            <a:r>
+              <a:rPr lang="en-US" sz="1200" dirty="0">
+                <a:solidFill>
+                  <a:schemeClr val="tx1"/>
+                </a:solidFill>
+                <a:latin typeface="Poppins" panose="00000800000000000000" pitchFamily="2" charset="0"/>
+                <a:cs typeface="Poppins" panose="00000800000000000000" pitchFamily="2" charset="0"/>
+              </a:rPr>
+              <a:t>Dropout_rate</a:t>
+            </a:r>
+            <a:br>
+              <a:rPr lang="en-US" sz="1200" dirty="0">
+                <a:solidFill>
+                  <a:schemeClr val="tx1"/>
+                </a:solidFill>
+                <a:latin typeface="Poppins" panose="00000800000000000000" pitchFamily="2" charset="0"/>
+                <a:cs typeface="Poppins" panose="00000800000000000000" pitchFamily="2" charset="0"/>
+              </a:rPr>
+            </a:br>
+            <a:r>
+              <a:rPr lang="en-US" sz="1200" dirty="0">
+                <a:solidFill>
+                  <a:schemeClr val="tx1"/>
+                </a:solidFill>
+                <a:latin typeface="Poppins" panose="00000800000000000000" pitchFamily="2" charset="0"/>
+                <a:cs typeface="Poppins" panose="00000800000000000000" pitchFamily="2" charset="0"/>
+              </a:rPr>
+              <a:t>L2_Reg</a:t>
+            </a:r>
+            <a:br>
+              <a:rPr lang="en-US" sz="1200" dirty="0">
+                <a:solidFill>
+                  <a:schemeClr val="tx1"/>
+                </a:solidFill>
+                <a:latin typeface="Poppins" panose="00000800000000000000" pitchFamily="2" charset="0"/>
+                <a:cs typeface="Poppins" panose="00000800000000000000" pitchFamily="2" charset="0"/>
+              </a:rPr>
+            </a:br>
+            <a:r>
+              <a:rPr lang="en-US" sz="1200" dirty="0">
+                <a:solidFill>
+                  <a:schemeClr val="tx1"/>
+                </a:solidFill>
+                <a:latin typeface="Poppins" panose="00000800000000000000" pitchFamily="2" charset="0"/>
+                <a:cs typeface="Poppins" panose="00000800000000000000" pitchFamily="2" charset="0"/>
+              </a:rPr>
+              <a:t>Dense_units_1</a:t>
+            </a:r>
+            <a:br>
+              <a:rPr lang="en-US" sz="1200" dirty="0">
+                <a:solidFill>
+                  <a:schemeClr val="tx1"/>
+                </a:solidFill>
+                <a:latin typeface="Poppins" panose="00000800000000000000" pitchFamily="2" charset="0"/>
+                <a:cs typeface="Poppins" panose="00000800000000000000" pitchFamily="2" charset="0"/>
+              </a:rPr>
+            </a:br>
+            <a:r>
+              <a:rPr lang="en-US" sz="1200" dirty="0">
+                <a:solidFill>
+                  <a:schemeClr val="tx1"/>
+                </a:solidFill>
+                <a:latin typeface="Poppins" panose="00000800000000000000" pitchFamily="2" charset="0"/>
+                <a:cs typeface="Poppins" panose="00000800000000000000" pitchFamily="2" charset="0"/>
+              </a:rPr>
+              <a:t>Dense_units_2</a:t>
+            </a:r>
+            <a:br>
+              <a:rPr lang="en-US" sz="1200" dirty="0">
+                <a:solidFill>
+                  <a:schemeClr val="tx1"/>
+                </a:solidFill>
+                <a:latin typeface="Poppins" panose="00000800000000000000" pitchFamily="2" charset="0"/>
+                <a:cs typeface="Poppins" panose="00000800000000000000" pitchFamily="2" charset="0"/>
+              </a:rPr>
+            </a:br>
+            <a:r>
+              <a:rPr lang="en-US" sz="1200" dirty="0">
+                <a:solidFill>
+                  <a:schemeClr val="tx1"/>
+                </a:solidFill>
+                <a:latin typeface="Poppins" panose="00000800000000000000" pitchFamily="2" charset="0"/>
+                <a:cs typeface="Poppins" panose="00000800000000000000" pitchFamily="2" charset="0"/>
+              </a:rPr>
+              <a:t>Batch_size</a:t>
+            </a:r>
+            <a:br>
+              <a:rPr lang="en-US" sz="1200" dirty="0">
+                <a:solidFill>
+                  <a:schemeClr val="tx1"/>
+                </a:solidFill>
+                <a:latin typeface="Poppins" panose="00000800000000000000" pitchFamily="2" charset="0"/>
+                <a:cs typeface="Poppins" panose="00000800000000000000" pitchFamily="2" charset="0"/>
+              </a:rPr>
+            </a:br>
+            <a:r>
+              <a:rPr lang="en-US" sz="1200" dirty="0">
+                <a:solidFill>
+                  <a:schemeClr val="tx1"/>
+                </a:solidFill>
+                <a:latin typeface="Poppins" panose="00000800000000000000" pitchFamily="2" charset="0"/>
+                <a:cs typeface="Poppins" panose="00000800000000000000" pitchFamily="2" charset="0"/>
+              </a:rPr>
+              <a:t>Phase1_lr</a:t>
+            </a:r>
+            <a:br>
+              <a:rPr lang="en-US" sz="1200" dirty="0">
+                <a:solidFill>
+                  <a:schemeClr val="tx1"/>
+                </a:solidFill>
+                <a:latin typeface="Poppins" panose="00000800000000000000" pitchFamily="2" charset="0"/>
+                <a:cs typeface="Poppins" panose="00000800000000000000" pitchFamily="2" charset="0"/>
+              </a:rPr>
+            </a:br>
+            <a:r>
+              <a:rPr lang="en-US" sz="1200" dirty="0">
+                <a:solidFill>
+                  <a:schemeClr val="tx1"/>
+                </a:solidFill>
+                <a:latin typeface="Poppins" panose="00000800000000000000" pitchFamily="2" charset="0"/>
+                <a:cs typeface="Poppins" panose="00000800000000000000" pitchFamily="2" charset="0"/>
+              </a:rPr>
+              <a:t>Phase2_lr</a:t>
+            </a:r>
+          </a:p>
+        </p:txBody>
+      </p:sp>
+      <p:cxnSp>
+        <p:nvCxnSpPr>
+          <p:cNvPr id="264" name="Straight Arrow Connector 263">
+            <a:extLst>
+              <a:ext uri="{FF2B5EF4-FFF2-40B4-BE49-F238E27FC236}">
+                <a16:creationId xmlns:a16="http://schemas.microsoft.com/office/drawing/2014/main" id="{46B2F9A5-B96E-DAB2-D1DA-59FEFD558AC9}"/>
+              </a:ext>
+            </a:extLst>
+          </p:cNvPr>
+          <p:cNvCxnSpPr>
+            <a:cxnSpLocks/>
+            <a:stCxn id="254" idx="3"/>
+            <a:endCxn id="22" idx="1"/>
+          </p:cNvCxnSpPr>
+          <p:nvPr/>
+        </p:nvCxnSpPr>
+        <p:spPr>
+          <a:xfrm>
+            <a:off x="2338791" y="4024858"/>
+            <a:ext cx="421419" cy="0"/>
+          </a:xfrm>
+          <a:prstGeom prst="straightConnector1">
+            <a:avLst/>
+          </a:prstGeom>
+          <a:ln w="57150">
+            <a:tailEnd type="triangle"/>
+          </a:ln>
+        </p:spPr>
+        <p:style>
+          <a:lnRef idx="2">
+            <a:schemeClr val="dk1"/>
+          </a:lnRef>
+          <a:fillRef idx="0">
+            <a:schemeClr val="dk1"/>
+          </a:fillRef>
+          <a:effectRef idx="1">
+            <a:schemeClr val="dk1"/>
+          </a:effectRef>
+          <a:fontRef idx="minor">
+            <a:schemeClr val="tx1"/>
+          </a:fontRef>
+        </p:style>
+      </p:cxnSp>
+      <p:cxnSp>
+        <p:nvCxnSpPr>
+          <p:cNvPr id="341" name="Connector: Elbow 340">
+            <a:extLst>
+              <a:ext uri="{FF2B5EF4-FFF2-40B4-BE49-F238E27FC236}">
+                <a16:creationId xmlns:a16="http://schemas.microsoft.com/office/drawing/2014/main" id="{E6A51AAD-DC59-7BB2-AEDB-7E5B56BB434B}"/>
+              </a:ext>
+            </a:extLst>
+          </p:cNvPr>
+          <p:cNvCxnSpPr>
+            <a:cxnSpLocks/>
+            <a:stCxn id="8" idx="0"/>
+          </p:cNvCxnSpPr>
+          <p:nvPr/>
+        </p:nvCxnSpPr>
+        <p:spPr>
+          <a:xfrm rot="5400000" flipH="1" flipV="1">
+            <a:off x="936058" y="5194841"/>
+            <a:ext cx="551749" cy="2"/>
+          </a:xfrm>
+          <a:prstGeom prst="bentConnector3">
+            <a:avLst>
+              <a:gd name="adj1" fmla="val 50000"/>
+            </a:avLst>
+          </a:prstGeom>
+          <a:ln w="57150">
+            <a:solidFill>
+              <a:schemeClr val="tx1"/>
+            </a:solidFill>
+            <a:tailEnd type="triangle"/>
+          </a:ln>
+        </p:spPr>
+        <p:style>
+          <a:lnRef idx="2">
+            <a:schemeClr val="accent1"/>
+          </a:lnRef>
+          <a:fillRef idx="0">
+            <a:schemeClr val="accent1"/>
+          </a:fillRef>
+          <a:effectRef idx="1">
+            <a:schemeClr val="accent1"/>
+          </a:effectRef>
+          <a:fontRef idx="minor">
+            <a:schemeClr val="tx1"/>
+          </a:fontRef>
+        </p:style>
+      </p:cxnSp>
+      <p:cxnSp>
+        <p:nvCxnSpPr>
+          <p:cNvPr id="368" name="Straight Arrow Connector 367">
+            <a:extLst>
+              <a:ext uri="{FF2B5EF4-FFF2-40B4-BE49-F238E27FC236}">
+                <a16:creationId xmlns:a16="http://schemas.microsoft.com/office/drawing/2014/main" id="{40D92509-A897-9615-D051-E2E6D2D8E3B4}"/>
+              </a:ext>
+            </a:extLst>
+          </p:cNvPr>
+          <p:cNvCxnSpPr>
+            <a:cxnSpLocks/>
+          </p:cNvCxnSpPr>
+          <p:nvPr/>
+        </p:nvCxnSpPr>
+        <p:spPr>
+          <a:xfrm>
+            <a:off x="6654127" y="1130726"/>
+            <a:ext cx="403143" cy="0"/>
+          </a:xfrm>
+          <a:prstGeom prst="straightConnector1">
+            <a:avLst/>
+          </a:prstGeom>
+          <a:ln w="57150">
+            <a:tailEnd type="triangle"/>
+          </a:ln>
+        </p:spPr>
+        <p:style>
+          <a:lnRef idx="2">
+            <a:schemeClr val="dk1"/>
+          </a:lnRef>
+          <a:fillRef idx="0">
+            <a:schemeClr val="dk1"/>
+          </a:fillRef>
+          <a:effectRef idx="1">
+            <a:schemeClr val="dk1"/>
+          </a:effectRef>
+          <a:fontRef idx="minor">
+            <a:schemeClr val="tx1"/>
+          </a:fontRef>
+        </p:style>
+      </p:cxnSp>
+      <p:cxnSp>
+        <p:nvCxnSpPr>
+          <p:cNvPr id="386" name="Straight Arrow Connector 385">
+            <a:extLst>
+              <a:ext uri="{FF2B5EF4-FFF2-40B4-BE49-F238E27FC236}">
+                <a16:creationId xmlns:a16="http://schemas.microsoft.com/office/drawing/2014/main" id="{34031DD6-FFEE-9110-50B7-F60E4AFA91E3}"/>
+              </a:ext>
+            </a:extLst>
+          </p:cNvPr>
+          <p:cNvCxnSpPr>
+            <a:cxnSpLocks/>
+          </p:cNvCxnSpPr>
+          <p:nvPr/>
+        </p:nvCxnSpPr>
+        <p:spPr>
+          <a:xfrm flipV="1">
+            <a:off x="8364594" y="1155268"/>
+            <a:ext cx="585540" cy="12444"/>
+          </a:xfrm>
+          <a:prstGeom prst="straightConnector1">
+            <a:avLst/>
+          </a:prstGeom>
+          <a:ln w="57150">
+            <a:tailEnd type="triangle"/>
+          </a:ln>
+        </p:spPr>
+        <p:style>
+          <a:lnRef idx="2">
+            <a:schemeClr val="dk1"/>
+          </a:lnRef>
+          <a:fillRef idx="0">
+            <a:schemeClr val="dk1"/>
+          </a:fillRef>
+          <a:effectRef idx="1">
+            <a:schemeClr val="dk1"/>
+          </a:effectRef>
+          <a:fontRef idx="minor">
+            <a:schemeClr val="tx1"/>
+          </a:fontRef>
+        </p:style>
+      </p:cxnSp>
+      <p:sp>
+        <p:nvSpPr>
+          <p:cNvPr id="22" name="Rectangle: Rounded Corners 21">
+            <a:extLst>
+              <a:ext uri="{FF2B5EF4-FFF2-40B4-BE49-F238E27FC236}">
+                <a16:creationId xmlns:a16="http://schemas.microsoft.com/office/drawing/2014/main" id="{AD9D7D51-D36F-5AAF-3DB3-BC3A733132CE}"/>
+              </a:ext>
+            </a:extLst>
+          </p:cNvPr>
+          <p:cNvSpPr/>
+          <p:nvPr/>
+        </p:nvSpPr>
+        <p:spPr>
+          <a:xfrm>
+            <a:off x="2760210" y="3756448"/>
+            <a:ext cx="1827630" cy="536820"/>
+          </a:xfrm>
+          <a:prstGeom prst="roundRect">
+            <a:avLst/>
+          </a:prstGeom>
+          <a:ln w="19050"/>
+        </p:spPr>
+        <p:style>
+          <a:lnRef idx="2">
+            <a:schemeClr val="dk1"/>
+          </a:lnRef>
+          <a:fillRef idx="1">
+            <a:schemeClr val="lt1"/>
+          </a:fillRef>
+          <a:effectRef idx="0">
+            <a:schemeClr val="dk1"/>
+          </a:effectRef>
+          <a:fontRef idx="minor">
+            <a:schemeClr val="dk1"/>
+          </a:fontRef>
+        </p:style>
+        <p:txBody>
+          <a:bodyPr rtlCol="0" anchor="ctr"/>
+          <a:lstStyle/>
+          <a:p>
+            <a:pPr algn="ctr"/>
+            <a:r>
+              <a:rPr lang="en-US" sz="1200" dirty="0">
+                <a:latin typeface="Poppins" panose="00000800000000000000" pitchFamily="2" charset="0"/>
+                <a:cs typeface="Poppins" panose="00000800000000000000" pitchFamily="2" charset="0"/>
+              </a:rPr>
+              <a:t>5-fold CV with best hyperparameter</a:t>
+            </a:r>
+          </a:p>
+        </p:txBody>
+      </p:sp>
+      <p:sp>
+        <p:nvSpPr>
+          <p:cNvPr id="33" name="TextBox 32">
+            <a:extLst>
+              <a:ext uri="{FF2B5EF4-FFF2-40B4-BE49-F238E27FC236}">
+                <a16:creationId xmlns:a16="http://schemas.microsoft.com/office/drawing/2014/main" id="{D1AB29D7-2D9E-7312-E59A-A671CC9765EF}"/>
+              </a:ext>
+            </a:extLst>
+          </p:cNvPr>
+          <p:cNvSpPr txBox="1"/>
+          <p:nvPr/>
+        </p:nvSpPr>
+        <p:spPr>
+          <a:xfrm>
+            <a:off x="2963668" y="246935"/>
+            <a:ext cx="3474720" cy="276999"/>
+          </a:xfrm>
+          <a:prstGeom prst="rect">
+            <a:avLst/>
+          </a:prstGeom>
+          <a:noFill/>
+        </p:spPr>
+        <p:txBody>
+          <a:bodyPr wrap="square" rtlCol="0">
+            <a:spAutoFit/>
+          </a:bodyPr>
+          <a:lstStyle/>
+          <a:p>
+            <a:pPr algn="ctr"/>
+            <a:r>
+              <a:rPr lang="en-US" sz="1200" b="1" dirty="0">
                 <a:latin typeface="Poppins" panose="00000800000000000000" pitchFamily="2" charset="0"/>
                 <a:cs typeface="Poppins" panose="00000800000000000000" pitchFamily="2" charset="0"/>
               </a:rPr>
               <a:t>These average from results of 5-fold cv</a:t>
             </a:r>
-            <a:endParaRPr lang="en-US" sz="1200" dirty="0">
+            <a:endParaRPr lang="en-US" sz="1200" b="1" dirty="0">
               <a:solidFill>
                 <a:srgbClr val="FF0000"/>
               </a:solidFill>
@@ -5570,25 +5785,103 @@
           </a:p>
         </p:txBody>
       </p:sp>
+    </p:spTree>
+    <p:extLst>
+      <p:ext uri="{BB962C8B-B14F-4D97-AF65-F5344CB8AC3E}">
+        <p14:creationId xmlns:p14="http://schemas.microsoft.com/office/powerpoint/2010/main" val="3902019506"/>
+      </p:ext>
+    </p:extLst>
+  </p:cSld>
+  <p:clrMapOvr>
+    <a:masterClrMapping/>
+  </p:clrMapOvr>
+</p:sld>
+</file>
+
+<file path=ppt/slides/slide3.xml><?xml version="1.0" encoding="utf-8"?>
+<p:sld xmlns:a="http://schemas.openxmlformats.org/drawingml/2006/main" xmlns:r="http://schemas.openxmlformats.org/officeDocument/2006/relationships" xmlns:p="http://schemas.openxmlformats.org/presentationml/2006/main">
+  <p:cSld>
+    <p:spTree>
+      <p:nvGrpSpPr>
+        <p:cNvPr id="1" name=""/>
+        <p:cNvGrpSpPr/>
+        <p:nvPr/>
+      </p:nvGrpSpPr>
+      <p:grpSpPr>
+        <a:xfrm>
+          <a:off x="0" y="0"/>
+          <a:ext cx="0" cy="0"/>
+          <a:chOff x="0" y="0"/>
+          <a:chExt cx="0" cy="0"/>
+        </a:xfrm>
+      </p:grpSpPr>
+      <p:sp>
+        <p:nvSpPr>
+          <p:cNvPr id="30" name="Rectangle 29">
+            <a:extLst>
+              <a:ext uri="{FF2B5EF4-FFF2-40B4-BE49-F238E27FC236}">
+                <a16:creationId xmlns:a16="http://schemas.microsoft.com/office/drawing/2014/main" id="{24D9B6F2-37D3-7734-69DF-117A6B00331D}"/>
+              </a:ext>
+            </a:extLst>
+          </p:cNvPr>
+          <p:cNvSpPr>
+            <a:spLocks/>
+          </p:cNvSpPr>
+          <p:nvPr/>
+        </p:nvSpPr>
+        <p:spPr>
+          <a:xfrm>
+            <a:off x="4238913" y="523564"/>
+            <a:ext cx="4328557" cy="1142749"/>
+          </a:xfrm>
+          <a:prstGeom prst="rect">
+            <a:avLst/>
+          </a:prstGeom>
+          <a:ln>
+            <a:prstDash val="sysDash"/>
+          </a:ln>
+        </p:spPr>
+        <p:style>
+          <a:lnRef idx="2">
+            <a:schemeClr val="dk1"/>
+          </a:lnRef>
+          <a:fillRef idx="1">
+            <a:schemeClr val="lt1"/>
+          </a:fillRef>
+          <a:effectRef idx="0">
+            <a:schemeClr val="dk1"/>
+          </a:effectRef>
+          <a:fontRef idx="minor">
+            <a:schemeClr val="dk1"/>
+          </a:fontRef>
+        </p:style>
+        <p:txBody>
+          <a:bodyPr rtlCol="0" anchor="ctr"/>
+          <a:lstStyle/>
+          <a:p>
+            <a:pPr algn="ctr"/>
+            <a:endParaRPr lang="en-US"/>
+          </a:p>
+        </p:txBody>
+      </p:sp>
       <p:cxnSp>
         <p:nvCxnSpPr>
-          <p:cNvPr id="43" name="Straight Arrow Connector 42">
-            <a:extLst>
-              <a:ext uri="{FF2B5EF4-FFF2-40B4-BE49-F238E27FC236}">
-                <a16:creationId xmlns:a16="http://schemas.microsoft.com/office/drawing/2014/main" id="{7DCDAE58-F066-0647-1C9C-1BA2FFA51BDF}"/>
+          <p:cNvPr id="27" name="Straight Arrow Connector 26">
+            <a:extLst>
+              <a:ext uri="{FF2B5EF4-FFF2-40B4-BE49-F238E27FC236}">
+                <a16:creationId xmlns:a16="http://schemas.microsoft.com/office/drawing/2014/main" id="{364A479F-BC19-CBAA-822A-1648D1BB1EDA}"/>
               </a:ext>
             </a:extLst>
           </p:cNvPr>
           <p:cNvCxnSpPr>
             <a:cxnSpLocks/>
-            <a:endCxn id="8" idx="3"/>
           </p:cNvCxnSpPr>
           <p:nvPr/>
         </p:nvCxnSpPr>
         <p:spPr>
-          <a:xfrm flipH="1">
-            <a:off x="2040163" y="3699475"/>
-            <a:ext cx="1490521" cy="0"/>
+          <a:xfrm>
+            <a:off x="4504178" y="3993360"/>
+            <a:ext cx="548769" cy="0"/>
           </a:xfrm>
           <a:prstGeom prst="straightConnector1">
             <a:avLst/>
@@ -5612,150 +5905,140 @@
           </a:fontRef>
         </p:style>
       </p:cxnSp>
-      <p:sp>
-        <p:nvSpPr>
-          <p:cNvPr id="4" name="Flowchart: Magnetic Disk 3">
-            <a:extLst>
-              <a:ext uri="{FF2B5EF4-FFF2-40B4-BE49-F238E27FC236}">
-                <a16:creationId xmlns:a16="http://schemas.microsoft.com/office/drawing/2014/main" id="{B15B1171-252B-47F1-F099-9463350302DA}"/>
-              </a:ext>
-            </a:extLst>
-          </p:cNvPr>
-          <p:cNvSpPr/>
-          <p:nvPr/>
-        </p:nvSpPr>
-        <p:spPr>
-          <a:xfrm>
-            <a:off x="584310" y="4521769"/>
-            <a:ext cx="1315092" cy="1027415"/>
-          </a:xfrm>
-          <a:prstGeom prst="flowChartMagneticDisk">
-            <a:avLst/>
-          </a:prstGeom>
+      <p:cxnSp>
+        <p:nvCxnSpPr>
+          <p:cNvPr id="372" name="Connector: Elbow 371">
+            <a:extLst>
+              <a:ext uri="{FF2B5EF4-FFF2-40B4-BE49-F238E27FC236}">
+                <a16:creationId xmlns:a16="http://schemas.microsoft.com/office/drawing/2014/main" id="{267B0ACE-B949-682E-9B50-EE81F39C7C8F}"/>
+              </a:ext>
+            </a:extLst>
+          </p:cNvPr>
+          <p:cNvCxnSpPr>
+            <a:cxnSpLocks/>
+            <a:stCxn id="4" idx="4"/>
+            <a:endCxn id="9" idx="2"/>
+          </p:cNvCxnSpPr>
+          <p:nvPr/>
+        </p:nvCxnSpPr>
+        <p:spPr>
+          <a:xfrm flipV="1">
+            <a:off x="3774723" y="1371516"/>
+            <a:ext cx="3936070" cy="4385897"/>
+          </a:xfrm>
+          <a:prstGeom prst="bentConnector2">
+            <a:avLst/>
+          </a:prstGeom>
+          <a:ln w="57150">
+            <a:solidFill>
+              <a:schemeClr val="tx1"/>
+            </a:solidFill>
+            <a:tailEnd type="triangle"/>
+          </a:ln>
         </p:spPr>
         <p:style>
           <a:lnRef idx="2">
-            <a:schemeClr val="dk1"/>
-          </a:lnRef>
-          <a:fillRef idx="1">
-            <a:schemeClr val="lt1"/>
-          </a:fillRef>
-          <a:effectRef idx="0">
-            <a:schemeClr val="dk1"/>
-          </a:effectRef>
-          <a:fontRef idx="minor">
-            <a:schemeClr val="dk1"/>
-          </a:fontRef>
-        </p:style>
-        <p:txBody>
-          <a:bodyPr rtlCol="0" anchor="ctr"/>
-          <a:lstStyle/>
-          <a:p>
-            <a:pPr algn="ctr"/>
-            <a:endParaRPr lang="en-US"/>
-          </a:p>
-        </p:txBody>
-      </p:sp>
-      <p:sp>
-        <p:nvSpPr>
-          <p:cNvPr id="8" name="Rectangle: Rounded Corners 7">
-            <a:extLst>
-              <a:ext uri="{FF2B5EF4-FFF2-40B4-BE49-F238E27FC236}">
-                <a16:creationId xmlns:a16="http://schemas.microsoft.com/office/drawing/2014/main" id="{716059DD-607C-DFCA-E0F6-25CE59EBDEB8}"/>
-              </a:ext>
-            </a:extLst>
-          </p:cNvPr>
-          <p:cNvSpPr/>
-          <p:nvPr/>
-        </p:nvSpPr>
-        <p:spPr>
-          <a:xfrm>
-            <a:off x="546135" y="3431065"/>
-            <a:ext cx="1494028" cy="536820"/>
-          </a:xfrm>
-          <a:prstGeom prst="roundRect">
-            <a:avLst/>
-          </a:prstGeom>
-          <a:ln w="19050"/>
-        </p:spPr>
-        <p:style>
-          <a:lnRef idx="2">
-            <a:schemeClr val="dk1"/>
-          </a:lnRef>
-          <a:fillRef idx="1">
-            <a:schemeClr val="lt1"/>
-          </a:fillRef>
-          <a:effectRef idx="0">
-            <a:schemeClr val="dk1"/>
-          </a:effectRef>
-          <a:fontRef idx="minor">
-            <a:schemeClr val="dk1"/>
-          </a:fontRef>
-        </p:style>
-        <p:txBody>
-          <a:bodyPr rtlCol="0" anchor="ctr"/>
-          <a:lstStyle/>
-          <a:p>
-            <a:pPr algn="ctr"/>
-            <a:r>
-              <a:rPr lang="en-US" sz="1200" dirty="0">
-                <a:latin typeface="Poppins" panose="00000800000000000000" pitchFamily="2" charset="0"/>
-                <a:cs typeface="Poppins" panose="00000800000000000000" pitchFamily="2" charset="0"/>
-              </a:rPr>
-              <a:t>Train set 80%</a:t>
-            </a:r>
-          </a:p>
-        </p:txBody>
-      </p:sp>
-      <p:cxnSp>
-        <p:nvCxnSpPr>
-          <p:cNvPr id="12" name="Straight Arrow Connector 11">
-            <a:extLst>
-              <a:ext uri="{FF2B5EF4-FFF2-40B4-BE49-F238E27FC236}">
-                <a16:creationId xmlns:a16="http://schemas.microsoft.com/office/drawing/2014/main" id="{D63981B1-81C8-01B5-12DC-3BA0B93AC38F}"/>
-              </a:ext>
-            </a:extLst>
-          </p:cNvPr>
-          <p:cNvCxnSpPr>
-            <a:cxnSpLocks/>
-            <a:stCxn id="72" idx="3"/>
-            <a:endCxn id="39" idx="1"/>
-          </p:cNvCxnSpPr>
-          <p:nvPr/>
-        </p:nvCxnSpPr>
-        <p:spPr>
-          <a:xfrm>
-            <a:off x="2235645" y="1762301"/>
-            <a:ext cx="363063" cy="685"/>
-          </a:xfrm>
-          <a:prstGeom prst="straightConnector1">
-            <a:avLst/>
-          </a:prstGeom>
-          <a:ln w="57150">
-            <a:tailEnd type="triangle"/>
-          </a:ln>
-        </p:spPr>
-        <p:style>
-          <a:lnRef idx="2">
-            <a:schemeClr val="dk1"/>
+            <a:schemeClr val="accent1"/>
           </a:lnRef>
           <a:fillRef idx="0">
-            <a:schemeClr val="dk1"/>
+            <a:schemeClr val="accent1"/>
           </a:fillRef>
           <a:effectRef idx="1">
-            <a:schemeClr val="dk1"/>
+            <a:schemeClr val="accent1"/>
           </a:effectRef>
           <a:fontRef idx="minor">
             <a:schemeClr val="tx1"/>
           </a:fontRef>
         </p:style>
       </p:cxnSp>
-      <p:sp>
-        <p:nvSpPr>
-          <p:cNvPr id="15" name="Rectangle 14">
-            <a:extLst>
-              <a:ext uri="{FF2B5EF4-FFF2-40B4-BE49-F238E27FC236}">
-                <a16:creationId xmlns:a16="http://schemas.microsoft.com/office/drawing/2014/main" id="{D5A6BA5C-5583-E3A3-A9E0-CDB02E5343E5}"/>
+      <p:cxnSp>
+        <p:nvCxnSpPr>
+          <p:cNvPr id="231" name="Straight Arrow Connector 230">
+            <a:extLst>
+              <a:ext uri="{FF2B5EF4-FFF2-40B4-BE49-F238E27FC236}">
+                <a16:creationId xmlns:a16="http://schemas.microsoft.com/office/drawing/2014/main" id="{F8E29193-21E0-C7A7-B532-5AD2B98A37D1}"/>
+              </a:ext>
+            </a:extLst>
+          </p:cNvPr>
+          <p:cNvCxnSpPr>
+            <a:cxnSpLocks/>
+          </p:cNvCxnSpPr>
+          <p:nvPr/>
+        </p:nvCxnSpPr>
+        <p:spPr>
+          <a:xfrm>
+            <a:off x="4470511" y="1155268"/>
+            <a:ext cx="336175" cy="0"/>
+          </a:xfrm>
+          <a:prstGeom prst="straightConnector1">
+            <a:avLst/>
+          </a:prstGeom>
+          <a:ln w="57150">
+            <a:tailEnd type="triangle"/>
+          </a:ln>
+        </p:spPr>
+        <p:style>
+          <a:lnRef idx="2">
+            <a:schemeClr val="dk1"/>
+          </a:lnRef>
+          <a:fillRef idx="0">
+            <a:schemeClr val="dk1"/>
+          </a:fillRef>
+          <a:effectRef idx="1">
+            <a:schemeClr val="dk1"/>
+          </a:effectRef>
+          <a:fontRef idx="minor">
+            <a:schemeClr val="tx1"/>
+          </a:fontRef>
+        </p:style>
+      </p:cxnSp>
+      <p:cxnSp>
+        <p:nvCxnSpPr>
+          <p:cNvPr id="237" name="Straight Arrow Connector 236">
+            <a:extLst>
+              <a:ext uri="{FF2B5EF4-FFF2-40B4-BE49-F238E27FC236}">
+                <a16:creationId xmlns:a16="http://schemas.microsoft.com/office/drawing/2014/main" id="{D72EAF38-5B7A-2270-AA4A-0A29382397CE}"/>
+              </a:ext>
+            </a:extLst>
+          </p:cNvPr>
+          <p:cNvCxnSpPr>
+            <a:cxnSpLocks/>
+          </p:cNvCxnSpPr>
+          <p:nvPr/>
+        </p:nvCxnSpPr>
+        <p:spPr>
+          <a:xfrm>
+            <a:off x="1553824" y="1161490"/>
+            <a:ext cx="1156392" cy="0"/>
+          </a:xfrm>
+          <a:prstGeom prst="straightConnector1">
+            <a:avLst/>
+          </a:prstGeom>
+          <a:ln w="57150">
+            <a:tailEnd type="triangle"/>
+          </a:ln>
+        </p:spPr>
+        <p:style>
+          <a:lnRef idx="2">
+            <a:schemeClr val="dk1"/>
+          </a:lnRef>
+          <a:fillRef idx="0">
+            <a:schemeClr val="dk1"/>
+          </a:fillRef>
+          <a:effectRef idx="1">
+            <a:schemeClr val="dk1"/>
+          </a:effectRef>
+          <a:fontRef idx="minor">
+            <a:schemeClr val="tx1"/>
+          </a:fontRef>
+        </p:style>
+      </p:cxnSp>
+      <p:sp>
+        <p:nvSpPr>
+          <p:cNvPr id="4" name="Flowchart: Magnetic Disk 3">
+            <a:extLst>
+              <a:ext uri="{FF2B5EF4-FFF2-40B4-BE49-F238E27FC236}">
+                <a16:creationId xmlns:a16="http://schemas.microsoft.com/office/drawing/2014/main" id="{B15B1171-252B-47F1-F099-9463350302DA}"/>
               </a:ext>
             </a:extLst>
           </p:cNvPr>
@@ -5764,10 +6047,10 @@
         </p:nvSpPr>
         <p:spPr>
           <a:xfrm>
-            <a:off x="3493771" y="2937608"/>
-            <a:ext cx="4990550" cy="1746776"/>
-          </a:xfrm>
-          <a:prstGeom prst="rect">
+            <a:off x="2459631" y="5243705"/>
+            <a:ext cx="1315092" cy="1027415"/>
+          </a:xfrm>
+          <a:prstGeom prst="flowChartMagneticDisk">
             <a:avLst/>
           </a:prstGeom>
         </p:spPr>
@@ -5790,16 +6073,19 @@
           <a:lstStyle/>
           <a:p>
             <a:pPr algn="ctr"/>
-            <a:endParaRPr lang="en-US"/>
-          </a:p>
-        </p:txBody>
-      </p:sp>
-      <p:sp>
-        <p:nvSpPr>
-          <p:cNvPr id="16" name="TextBox 15">
-            <a:extLst>
-              <a:ext uri="{FF2B5EF4-FFF2-40B4-BE49-F238E27FC236}">
-                <a16:creationId xmlns:a16="http://schemas.microsoft.com/office/drawing/2014/main" id="{9157B6E7-5C4F-F806-90FA-2999289DD111}"/>
+            <a:endParaRPr lang="en-US" sz="1200" dirty="0">
+              <a:latin typeface="Poppins" panose="00000800000000000000" pitchFamily="2" charset="0"/>
+              <a:cs typeface="Poppins" panose="00000800000000000000" pitchFamily="2" charset="0"/>
+            </a:endParaRPr>
+          </a:p>
+        </p:txBody>
+      </p:sp>
+      <p:sp>
+        <p:nvSpPr>
+          <p:cNvPr id="5" name="TextBox 4">
+            <a:extLst>
+              <a:ext uri="{FF2B5EF4-FFF2-40B4-BE49-F238E27FC236}">
+                <a16:creationId xmlns:a16="http://schemas.microsoft.com/office/drawing/2014/main" id="{F6A668AB-9C81-9C36-6EF0-E9B7BB6D2090}"/>
               </a:ext>
             </a:extLst>
           </p:cNvPr>
@@ -5808,8 +6094,8 @@
         </p:nvSpPr>
         <p:spPr>
           <a:xfrm>
-            <a:off x="4544921" y="2583138"/>
-            <a:ext cx="2986290" cy="307777"/>
+            <a:off x="1974016" y="6357902"/>
+            <a:ext cx="2286321" cy="461665"/>
           </a:xfrm>
           <a:prstGeom prst="rect">
             <a:avLst/>
@@ -5824,35 +6110,225 @@
           <a:p>
             <a:pPr algn="ctr"/>
             <a:r>
-              <a:rPr lang="en-US" sz="1400" dirty="0">
-                <a:latin typeface="Poppins" panose="00000800000000000000" pitchFamily="2" charset="0"/>
-                <a:cs typeface="Poppins" panose="00000800000000000000" pitchFamily="2" charset="0"/>
-              </a:rPr>
-              <a:t>Handcrafted</a:t>
-            </a:r>
-            <a:r>
-              <a:rPr lang="th-TH" sz="1400" dirty="0">
-                <a:latin typeface="Poppins" panose="00000800000000000000" pitchFamily="2" charset="0"/>
-                <a:cs typeface="Poppins" panose="00000800000000000000" pitchFamily="2" charset="0"/>
-              </a:rPr>
-              <a:t> </a:t>
-            </a:r>
-            <a:r>
-              <a:rPr lang="en-US" sz="1400" dirty="0">
-                <a:latin typeface="Poppins" panose="00000800000000000000" pitchFamily="2" charset="0"/>
-                <a:cs typeface="Poppins" panose="00000800000000000000" pitchFamily="2" charset="0"/>
-              </a:rPr>
-              <a:t>Feature Extractor</a:t>
-            </a:r>
-          </a:p>
-        </p:txBody>
-      </p:sp>
-      <p:sp>
-        <p:nvSpPr>
-          <p:cNvPr id="17" name="TextBox 16">
-            <a:extLst>
-              <a:ext uri="{FF2B5EF4-FFF2-40B4-BE49-F238E27FC236}">
-                <a16:creationId xmlns:a16="http://schemas.microsoft.com/office/drawing/2014/main" id="{1123F81B-F3F5-EAA8-7BF7-B52072F44763}"/>
+              <a:rPr lang="en-US" sz="1200" b="1" dirty="0">
+                <a:latin typeface="Poppins" panose="00000800000000000000" pitchFamily="2" charset="0"/>
+                <a:cs typeface="Poppins" panose="00000800000000000000" pitchFamily="2" charset="0"/>
+              </a:rPr>
+              <a:t>Plantar Pressure images </a:t>
+            </a:r>
+          </a:p>
+          <a:p>
+            <a:pPr algn="ctr"/>
+            <a:r>
+              <a:rPr lang="en-US" sz="1200" b="1" dirty="0">
+                <a:latin typeface="Poppins" panose="00000800000000000000" pitchFamily="2" charset="0"/>
+                <a:cs typeface="Poppins" panose="00000800000000000000" pitchFamily="2" charset="0"/>
+              </a:rPr>
+              <a:t>Dataset </a:t>
+            </a:r>
+          </a:p>
+        </p:txBody>
+      </p:sp>
+      <p:cxnSp>
+        <p:nvCxnSpPr>
+          <p:cNvPr id="7" name="Straight Arrow Connector 6">
+            <a:extLst>
+              <a:ext uri="{FF2B5EF4-FFF2-40B4-BE49-F238E27FC236}">
+                <a16:creationId xmlns:a16="http://schemas.microsoft.com/office/drawing/2014/main" id="{C995AEB9-C39F-757A-94B8-1DEDE6FB29C7}"/>
+              </a:ext>
+            </a:extLst>
+          </p:cNvPr>
+          <p:cNvCxnSpPr>
+            <a:cxnSpLocks/>
+            <a:stCxn id="4" idx="2"/>
+            <a:endCxn id="8" idx="3"/>
+          </p:cNvCxnSpPr>
+          <p:nvPr/>
+        </p:nvCxnSpPr>
+        <p:spPr>
+          <a:xfrm flipH="1" flipV="1">
+            <a:off x="1958945" y="5739126"/>
+            <a:ext cx="500686" cy="18287"/>
+          </a:xfrm>
+          <a:prstGeom prst="straightConnector1">
+            <a:avLst/>
+          </a:prstGeom>
+          <a:ln w="57150">
+            <a:tailEnd type="triangle"/>
+          </a:ln>
+        </p:spPr>
+        <p:style>
+          <a:lnRef idx="2">
+            <a:schemeClr val="dk1"/>
+          </a:lnRef>
+          <a:fillRef idx="0">
+            <a:schemeClr val="dk1"/>
+          </a:fillRef>
+          <a:effectRef idx="1">
+            <a:schemeClr val="dk1"/>
+          </a:effectRef>
+          <a:fontRef idx="minor">
+            <a:schemeClr val="tx1"/>
+          </a:fontRef>
+        </p:style>
+      </p:cxnSp>
+      <p:sp>
+        <p:nvSpPr>
+          <p:cNvPr id="8" name="Rectangle: Rounded Corners 7">
+            <a:extLst>
+              <a:ext uri="{FF2B5EF4-FFF2-40B4-BE49-F238E27FC236}">
+                <a16:creationId xmlns:a16="http://schemas.microsoft.com/office/drawing/2014/main" id="{716059DD-607C-DFCA-E0F6-25CE59EBDEB8}"/>
+              </a:ext>
+            </a:extLst>
+          </p:cNvPr>
+          <p:cNvSpPr/>
+          <p:nvPr/>
+        </p:nvSpPr>
+        <p:spPr>
+          <a:xfrm>
+            <a:off x="464917" y="5470716"/>
+            <a:ext cx="1494028" cy="536820"/>
+          </a:xfrm>
+          <a:prstGeom prst="roundRect">
+            <a:avLst/>
+          </a:prstGeom>
+          <a:ln w="19050"/>
+        </p:spPr>
+        <p:style>
+          <a:lnRef idx="2">
+            <a:schemeClr val="dk1"/>
+          </a:lnRef>
+          <a:fillRef idx="1">
+            <a:schemeClr val="lt1"/>
+          </a:fillRef>
+          <a:effectRef idx="0">
+            <a:schemeClr val="dk1"/>
+          </a:effectRef>
+          <a:fontRef idx="minor">
+            <a:schemeClr val="dk1"/>
+          </a:fontRef>
+        </p:style>
+        <p:txBody>
+          <a:bodyPr rtlCol="0" anchor="ctr"/>
+          <a:lstStyle/>
+          <a:p>
+            <a:pPr algn="ctr"/>
+            <a:r>
+              <a:rPr lang="en-US" sz="1200" dirty="0">
+                <a:latin typeface="Poppins" panose="00000800000000000000" pitchFamily="2" charset="0"/>
+                <a:cs typeface="Poppins" panose="00000800000000000000" pitchFamily="2" charset="0"/>
+              </a:rPr>
+              <a:t>Train set 80%</a:t>
+            </a:r>
+          </a:p>
+        </p:txBody>
+      </p:sp>
+      <p:sp>
+        <p:nvSpPr>
+          <p:cNvPr id="9" name="Rectangle: Rounded Corners 8">
+            <a:extLst>
+              <a:ext uri="{FF2B5EF4-FFF2-40B4-BE49-F238E27FC236}">
+                <a16:creationId xmlns:a16="http://schemas.microsoft.com/office/drawing/2014/main" id="{84B9088E-73D8-5531-35B5-031A2210B823}"/>
+              </a:ext>
+            </a:extLst>
+          </p:cNvPr>
+          <p:cNvSpPr/>
+          <p:nvPr/>
+        </p:nvSpPr>
+        <p:spPr>
+          <a:xfrm>
+            <a:off x="7056992" y="843296"/>
+            <a:ext cx="1307602" cy="528220"/>
+          </a:xfrm>
+          <a:prstGeom prst="roundRect">
+            <a:avLst/>
+          </a:prstGeom>
+          <a:ln w="19050"/>
+        </p:spPr>
+        <p:style>
+          <a:lnRef idx="2">
+            <a:schemeClr val="dk1"/>
+          </a:lnRef>
+          <a:fillRef idx="1">
+            <a:schemeClr val="lt1"/>
+          </a:fillRef>
+          <a:effectRef idx="0">
+            <a:schemeClr val="dk1"/>
+          </a:effectRef>
+          <a:fontRef idx="minor">
+            <a:schemeClr val="dk1"/>
+          </a:fontRef>
+        </p:style>
+        <p:txBody>
+          <a:bodyPr rtlCol="0" anchor="ctr"/>
+          <a:lstStyle/>
+          <a:p>
+            <a:pPr algn="ctr"/>
+            <a:r>
+              <a:rPr lang="en-US" sz="1200" dirty="0">
+                <a:latin typeface="Poppins" panose="00000800000000000000" pitchFamily="2" charset="0"/>
+                <a:cs typeface="Poppins" panose="00000800000000000000" pitchFamily="2" charset="0"/>
+              </a:rPr>
+              <a:t>Test set 20%</a:t>
+            </a:r>
+          </a:p>
+        </p:txBody>
+      </p:sp>
+      <p:sp>
+        <p:nvSpPr>
+          <p:cNvPr id="13" name="Rectangle 12">
+            <a:extLst>
+              <a:ext uri="{FF2B5EF4-FFF2-40B4-BE49-F238E27FC236}">
+                <a16:creationId xmlns:a16="http://schemas.microsoft.com/office/drawing/2014/main" id="{3F7AD8CC-B9CE-0793-5FB6-F28983A66092}"/>
+              </a:ext>
+            </a:extLst>
+          </p:cNvPr>
+          <p:cNvSpPr>
+            <a:spLocks/>
+          </p:cNvSpPr>
+          <p:nvPr/>
+        </p:nvSpPr>
+        <p:spPr>
+          <a:xfrm>
+            <a:off x="5052947" y="2345811"/>
+            <a:ext cx="5879628" cy="2775588"/>
+          </a:xfrm>
+          <a:prstGeom prst="rect">
+            <a:avLst/>
+          </a:prstGeom>
+          <a:ln>
+            <a:prstDash val="sysDash"/>
+          </a:ln>
+        </p:spPr>
+        <p:style>
+          <a:lnRef idx="2">
+            <a:schemeClr val="dk1"/>
+          </a:lnRef>
+          <a:fillRef idx="1">
+            <a:schemeClr val="lt1"/>
+          </a:fillRef>
+          <a:effectRef idx="0">
+            <a:schemeClr val="dk1"/>
+          </a:effectRef>
+          <a:fontRef idx="minor">
+            <a:schemeClr val="dk1"/>
+          </a:fontRef>
+        </p:style>
+        <p:txBody>
+          <a:bodyPr rtlCol="0" anchor="ctr"/>
+          <a:lstStyle/>
+          <a:p>
+            <a:pPr algn="ctr"/>
+            <a:endParaRPr lang="en-US"/>
+          </a:p>
+        </p:txBody>
+      </p:sp>
+      <p:sp>
+        <p:nvSpPr>
+          <p:cNvPr id="14" name="TextBox 13">
+            <a:extLst>
+              <a:ext uri="{FF2B5EF4-FFF2-40B4-BE49-F238E27FC236}">
+                <a16:creationId xmlns:a16="http://schemas.microsoft.com/office/drawing/2014/main" id="{5C9A29E6-B43E-741F-7C5F-394CFDBAAD96}"/>
               </a:ext>
             </a:extLst>
           </p:cNvPr>
@@ -5861,8 +6337,8 @@
         </p:nvSpPr>
         <p:spPr>
           <a:xfrm>
-            <a:off x="3672974" y="3045374"/>
-            <a:ext cx="4777301" cy="1569660"/>
+            <a:off x="6325200" y="6042135"/>
+            <a:ext cx="5735167" cy="584775"/>
           </a:xfrm>
           <a:prstGeom prst="rect">
             <a:avLst/>
@@ -5875,8 +6351,2118 @@
           </a:bodyPr>
           <a:lstStyle/>
           <a:p>
-            <a:r>
-              <a:rPr lang="en-US" sz="1200" b="0" i="0" dirty="0">
+            <a:pPr algn="ctr"/>
+            <a:r>
+              <a:rPr lang="en-US" sz="3200" b="1" dirty="0">
+                <a:latin typeface="Poppins" panose="00000800000000000000" pitchFamily="2" charset="0"/>
+                <a:cs typeface="Poppins" panose="00000800000000000000" pitchFamily="2" charset="0"/>
+              </a:rPr>
+              <a:t>Proposed Model Pipeline</a:t>
+            </a:r>
+          </a:p>
+        </p:txBody>
+      </p:sp>
+      <p:sp>
+        <p:nvSpPr>
+          <p:cNvPr id="15" name="Rectangle 14">
+            <a:extLst>
+              <a:ext uri="{FF2B5EF4-FFF2-40B4-BE49-F238E27FC236}">
+                <a16:creationId xmlns:a16="http://schemas.microsoft.com/office/drawing/2014/main" id="{D5A6BA5C-5583-E3A3-A9E0-CDB02E5343E5}"/>
+              </a:ext>
+            </a:extLst>
+          </p:cNvPr>
+          <p:cNvSpPr/>
+          <p:nvPr/>
+        </p:nvSpPr>
+        <p:spPr>
+          <a:xfrm>
+            <a:off x="5241641" y="2636800"/>
+            <a:ext cx="2593372" cy="1783902"/>
+          </a:xfrm>
+          <a:prstGeom prst="rect">
+            <a:avLst/>
+          </a:prstGeom>
+        </p:spPr>
+        <p:style>
+          <a:lnRef idx="2">
+            <a:schemeClr val="dk1"/>
+          </a:lnRef>
+          <a:fillRef idx="1">
+            <a:schemeClr val="lt1"/>
+          </a:fillRef>
+          <a:effectRef idx="0">
+            <a:schemeClr val="dk1"/>
+          </a:effectRef>
+          <a:fontRef idx="minor">
+            <a:schemeClr val="dk1"/>
+          </a:fontRef>
+        </p:style>
+        <p:txBody>
+          <a:bodyPr rtlCol="0" anchor="ctr"/>
+          <a:lstStyle/>
+          <a:p>
+            <a:pPr algn="ctr"/>
+            <a:endParaRPr lang="en-US"/>
+          </a:p>
+        </p:txBody>
+      </p:sp>
+      <p:sp>
+        <p:nvSpPr>
+          <p:cNvPr id="16" name="TextBox 15">
+            <a:extLst>
+              <a:ext uri="{FF2B5EF4-FFF2-40B4-BE49-F238E27FC236}">
+                <a16:creationId xmlns:a16="http://schemas.microsoft.com/office/drawing/2014/main" id="{9157B6E7-5C4F-F806-90FA-2999289DD111}"/>
+              </a:ext>
+            </a:extLst>
+          </p:cNvPr>
+          <p:cNvSpPr txBox="1"/>
+          <p:nvPr/>
+        </p:nvSpPr>
+        <p:spPr>
+          <a:xfrm>
+            <a:off x="5340102" y="4489057"/>
+            <a:ext cx="2350213" cy="523220"/>
+          </a:xfrm>
+          <a:prstGeom prst="rect">
+            <a:avLst/>
+          </a:prstGeom>
+          <a:noFill/>
+        </p:spPr>
+        <p:txBody>
+          <a:bodyPr wrap="square" rtlCol="0">
+            <a:spAutoFit/>
+          </a:bodyPr>
+          <a:lstStyle/>
+          <a:p>
+            <a:pPr algn="ctr"/>
+            <a:r>
+              <a:rPr lang="en-US" sz="1400" b="1" dirty="0">
+                <a:latin typeface="Poppins" panose="00000800000000000000" pitchFamily="2" charset="0"/>
+                <a:cs typeface="Poppins" panose="00000800000000000000" pitchFamily="2" charset="0"/>
+              </a:rPr>
+              <a:t>CNN Backbone </a:t>
+            </a:r>
+            <a:br>
+              <a:rPr lang="en-US" sz="1400" b="1" dirty="0">
+                <a:latin typeface="Poppins" panose="00000800000000000000" pitchFamily="2" charset="0"/>
+                <a:cs typeface="Poppins" panose="00000800000000000000" pitchFamily="2" charset="0"/>
+              </a:rPr>
+            </a:br>
+            <a:r>
+              <a:rPr lang="en-US" sz="1400" b="1" dirty="0">
+                <a:latin typeface="Poppins" panose="00000800000000000000" pitchFamily="2" charset="0"/>
+                <a:cs typeface="Poppins" panose="00000800000000000000" pitchFamily="2" charset="0"/>
+              </a:rPr>
+              <a:t>(Feature Extractor)</a:t>
+            </a:r>
+          </a:p>
+        </p:txBody>
+      </p:sp>
+      <p:sp>
+        <p:nvSpPr>
+          <p:cNvPr id="17" name="TextBox 16">
+            <a:extLst>
+              <a:ext uri="{FF2B5EF4-FFF2-40B4-BE49-F238E27FC236}">
+                <a16:creationId xmlns:a16="http://schemas.microsoft.com/office/drawing/2014/main" id="{1123F81B-F3F5-EAA8-7BF7-B52072F44763}"/>
+              </a:ext>
+            </a:extLst>
+          </p:cNvPr>
+          <p:cNvSpPr txBox="1"/>
+          <p:nvPr/>
+        </p:nvSpPr>
+        <p:spPr>
+          <a:xfrm>
+            <a:off x="5241641" y="2705294"/>
+            <a:ext cx="2585554" cy="1015663"/>
+          </a:xfrm>
+          <a:prstGeom prst="rect">
+            <a:avLst/>
+          </a:prstGeom>
+          <a:noFill/>
+        </p:spPr>
+        <p:txBody>
+          <a:bodyPr wrap="square" rtlCol="0">
+            <a:spAutoFit/>
+          </a:bodyPr>
+          <a:lstStyle/>
+          <a:p>
+            <a:pPr algn="ctr"/>
+            <a:r>
+              <a:rPr lang="en-US" sz="1200" b="1" dirty="0">
+                <a:solidFill>
+                  <a:srgbClr val="C00000"/>
+                </a:solidFill>
+                <a:latin typeface="Poppins" panose="00000800000000000000" pitchFamily="2" charset="0"/>
+                <a:cs typeface="Poppins" panose="00000800000000000000" pitchFamily="2" charset="0"/>
+              </a:rPr>
+              <a:t>Phase 1 Frozen layer</a:t>
+            </a:r>
+            <a:br>
+              <a:rPr lang="en-US" sz="1200" b="1" dirty="0">
+                <a:latin typeface="Poppins" panose="00000800000000000000" pitchFamily="2" charset="0"/>
+                <a:cs typeface="Poppins" panose="00000800000000000000" pitchFamily="2" charset="0"/>
+              </a:rPr>
+            </a:br>
+            <a:r>
+              <a:rPr lang="en-US" sz="1200" b="1" dirty="0">
+                <a:solidFill>
+                  <a:srgbClr val="C00000"/>
+                </a:solidFill>
+                <a:latin typeface="Poppins" panose="00000800000000000000" pitchFamily="2" charset="0"/>
+                <a:cs typeface="Poppins" panose="00000800000000000000" pitchFamily="2" charset="0"/>
+              </a:rPr>
+              <a:t>(Pre-trained with ImageNet)</a:t>
+            </a:r>
+          </a:p>
+          <a:p>
+            <a:pPr algn="ctr"/>
+            <a:r>
+              <a:rPr lang="en-US" sz="1200" dirty="0">
+                <a:latin typeface="Poppins" panose="00000800000000000000" pitchFamily="2" charset="0"/>
+                <a:cs typeface="Poppins" panose="00000800000000000000" pitchFamily="2" charset="0"/>
+              </a:rPr>
+              <a:t>Epochs = 50</a:t>
+            </a:r>
+          </a:p>
+          <a:p>
+            <a:pPr algn="ctr"/>
+            <a:r>
+              <a:rPr lang="en-US" sz="1200" dirty="0">
+                <a:latin typeface="Poppins" panose="00000800000000000000" pitchFamily="2" charset="0"/>
+                <a:cs typeface="Poppins" panose="00000800000000000000" pitchFamily="2" charset="0"/>
+              </a:rPr>
+              <a:t>Patience = 5</a:t>
+            </a:r>
+          </a:p>
+          <a:p>
+            <a:pPr algn="ctr"/>
+            <a:endParaRPr lang="en-US" sz="1200" dirty="0">
+              <a:latin typeface="Poppins" panose="00000800000000000000" pitchFamily="2" charset="0"/>
+              <a:cs typeface="Poppins" panose="00000800000000000000" pitchFamily="2" charset="0"/>
+            </a:endParaRPr>
+          </a:p>
+        </p:txBody>
+      </p:sp>
+      <p:sp>
+        <p:nvSpPr>
+          <p:cNvPr id="19" name="TextBox 18">
+            <a:extLst>
+              <a:ext uri="{FF2B5EF4-FFF2-40B4-BE49-F238E27FC236}">
+                <a16:creationId xmlns:a16="http://schemas.microsoft.com/office/drawing/2014/main" id="{C4FACD48-1960-D3A4-D4B8-0DFD1A99B423}"/>
+              </a:ext>
+            </a:extLst>
+          </p:cNvPr>
+          <p:cNvSpPr txBox="1"/>
+          <p:nvPr/>
+        </p:nvSpPr>
+        <p:spPr>
+          <a:xfrm>
+            <a:off x="5255611" y="3591766"/>
+            <a:ext cx="2579402" cy="830997"/>
+          </a:xfrm>
+          <a:prstGeom prst="rect">
+            <a:avLst/>
+          </a:prstGeom>
+          <a:noFill/>
+        </p:spPr>
+        <p:txBody>
+          <a:bodyPr wrap="square" rtlCol="0">
+            <a:spAutoFit/>
+          </a:bodyPr>
+          <a:lstStyle/>
+          <a:p>
+            <a:pPr algn="ctr"/>
+            <a:r>
+              <a:rPr lang="en-US" sz="1200" b="1" dirty="0">
+                <a:solidFill>
+                  <a:srgbClr val="7030A0"/>
+                </a:solidFill>
+                <a:latin typeface="Poppins" panose="00000800000000000000" pitchFamily="2" charset="0"/>
+                <a:cs typeface="Poppins" panose="00000800000000000000" pitchFamily="2" charset="0"/>
+              </a:rPr>
+              <a:t>Phase 2 Unfreeze Top 30% </a:t>
+            </a:r>
+            <a:br>
+              <a:rPr lang="en-US" sz="1200" b="1" dirty="0">
+                <a:latin typeface="Poppins" panose="00000800000000000000" pitchFamily="2" charset="0"/>
+                <a:cs typeface="Poppins" panose="00000800000000000000" pitchFamily="2" charset="0"/>
+              </a:rPr>
+            </a:br>
+            <a:r>
+              <a:rPr lang="en-US" sz="1200" b="1" dirty="0">
+                <a:solidFill>
+                  <a:srgbClr val="7030A0"/>
+                </a:solidFill>
+                <a:latin typeface="Poppins" panose="00000800000000000000" pitchFamily="2" charset="0"/>
+                <a:cs typeface="Poppins" panose="00000800000000000000" pitchFamily="2" charset="0"/>
+              </a:rPr>
+              <a:t>layer (Fine-tuning)</a:t>
+            </a:r>
+          </a:p>
+          <a:p>
+            <a:pPr algn="ctr"/>
+            <a:r>
+              <a:rPr lang="en-US" sz="1200" dirty="0">
+                <a:latin typeface="Poppins" panose="00000800000000000000" pitchFamily="2" charset="0"/>
+                <a:cs typeface="Poppins" panose="00000800000000000000" pitchFamily="2" charset="0"/>
+              </a:rPr>
+              <a:t>Epochs = 50</a:t>
+            </a:r>
+          </a:p>
+          <a:p>
+            <a:pPr algn="ctr"/>
+            <a:r>
+              <a:rPr lang="en-US" sz="1200" dirty="0">
+                <a:latin typeface="Poppins" panose="00000800000000000000" pitchFamily="2" charset="0"/>
+                <a:cs typeface="Poppins" panose="00000800000000000000" pitchFamily="2" charset="0"/>
+              </a:rPr>
+              <a:t>Patience = 15</a:t>
+            </a:r>
+          </a:p>
+        </p:txBody>
+      </p:sp>
+      <p:cxnSp>
+        <p:nvCxnSpPr>
+          <p:cNvPr id="21" name="Straight Connector 20">
+            <a:extLst>
+              <a:ext uri="{FF2B5EF4-FFF2-40B4-BE49-F238E27FC236}">
+                <a16:creationId xmlns:a16="http://schemas.microsoft.com/office/drawing/2014/main" id="{7F2473FB-F6C9-E4A5-F677-D5EFE06BB503}"/>
+              </a:ext>
+            </a:extLst>
+          </p:cNvPr>
+          <p:cNvCxnSpPr>
+            <a:cxnSpLocks/>
+          </p:cNvCxnSpPr>
+          <p:nvPr/>
+        </p:nvCxnSpPr>
+        <p:spPr>
+          <a:xfrm>
+            <a:off x="5378630" y="3545607"/>
+            <a:ext cx="2319393" cy="0"/>
+          </a:xfrm>
+          <a:prstGeom prst="line">
+            <a:avLst/>
+          </a:prstGeom>
+          <a:ln>
+            <a:prstDash val="solid"/>
+          </a:ln>
+        </p:spPr>
+        <p:style>
+          <a:lnRef idx="2">
+            <a:schemeClr val="dk1"/>
+          </a:lnRef>
+          <a:fillRef idx="0">
+            <a:schemeClr val="dk1"/>
+          </a:fillRef>
+          <a:effectRef idx="1">
+            <a:schemeClr val="dk1"/>
+          </a:effectRef>
+          <a:fontRef idx="minor">
+            <a:schemeClr val="tx1"/>
+          </a:fontRef>
+        </p:style>
+      </p:cxnSp>
+      <p:cxnSp>
+        <p:nvCxnSpPr>
+          <p:cNvPr id="38" name="Straight Connector 37">
+            <a:extLst>
+              <a:ext uri="{FF2B5EF4-FFF2-40B4-BE49-F238E27FC236}">
+                <a16:creationId xmlns:a16="http://schemas.microsoft.com/office/drawing/2014/main" id="{89002E39-D0E1-6D81-41D4-99D563043749}"/>
+              </a:ext>
+            </a:extLst>
+          </p:cNvPr>
+          <p:cNvCxnSpPr>
+            <a:cxnSpLocks/>
+          </p:cNvCxnSpPr>
+          <p:nvPr/>
+        </p:nvCxnSpPr>
+        <p:spPr>
+          <a:xfrm flipH="1">
+            <a:off x="7960149" y="2458427"/>
+            <a:ext cx="15410" cy="2535763"/>
+          </a:xfrm>
+          <a:prstGeom prst="line">
+            <a:avLst/>
+          </a:prstGeom>
+          <a:ln>
+            <a:prstDash val="dash"/>
+          </a:ln>
+        </p:spPr>
+        <p:style>
+          <a:lnRef idx="2">
+            <a:schemeClr val="dk1"/>
+          </a:lnRef>
+          <a:fillRef idx="0">
+            <a:schemeClr val="dk1"/>
+          </a:fillRef>
+          <a:effectRef idx="1">
+            <a:schemeClr val="dk1"/>
+          </a:effectRef>
+          <a:fontRef idx="minor">
+            <a:schemeClr val="tx1"/>
+          </a:fontRef>
+        </p:style>
+      </p:cxnSp>
+      <p:sp>
+        <p:nvSpPr>
+          <p:cNvPr id="39" name="Rectangle 38">
+            <a:extLst>
+              <a:ext uri="{FF2B5EF4-FFF2-40B4-BE49-F238E27FC236}">
+                <a16:creationId xmlns:a16="http://schemas.microsoft.com/office/drawing/2014/main" id="{2048D14A-2236-C159-D71B-EA2E15F8F53D}"/>
+              </a:ext>
+            </a:extLst>
+          </p:cNvPr>
+          <p:cNvSpPr/>
+          <p:nvPr/>
+        </p:nvSpPr>
+        <p:spPr>
+          <a:xfrm>
+            <a:off x="8102399" y="2636800"/>
+            <a:ext cx="2632573" cy="1783902"/>
+          </a:xfrm>
+          <a:prstGeom prst="rect">
+            <a:avLst/>
+          </a:prstGeom>
+        </p:spPr>
+        <p:style>
+          <a:lnRef idx="2">
+            <a:schemeClr val="dk1"/>
+          </a:lnRef>
+          <a:fillRef idx="1">
+            <a:schemeClr val="lt1"/>
+          </a:fillRef>
+          <a:effectRef idx="0">
+            <a:schemeClr val="dk1"/>
+          </a:effectRef>
+          <a:fontRef idx="minor">
+            <a:schemeClr val="dk1"/>
+          </a:fontRef>
+        </p:style>
+        <p:txBody>
+          <a:bodyPr rtlCol="0" anchor="ctr"/>
+          <a:lstStyle/>
+          <a:p>
+            <a:pPr algn="ctr"/>
+            <a:endParaRPr lang="en-US"/>
+          </a:p>
+        </p:txBody>
+      </p:sp>
+      <p:sp>
+        <p:nvSpPr>
+          <p:cNvPr id="41" name="TextBox 40">
+            <a:extLst>
+              <a:ext uri="{FF2B5EF4-FFF2-40B4-BE49-F238E27FC236}">
+                <a16:creationId xmlns:a16="http://schemas.microsoft.com/office/drawing/2014/main" id="{38ED5D2C-441F-DE0A-1BDA-910F00BFD6D2}"/>
+              </a:ext>
+            </a:extLst>
+          </p:cNvPr>
+          <p:cNvSpPr txBox="1"/>
+          <p:nvPr/>
+        </p:nvSpPr>
+        <p:spPr>
+          <a:xfrm>
+            <a:off x="8218420" y="3077965"/>
+            <a:ext cx="2395038" cy="1066959"/>
+          </a:xfrm>
+          <a:prstGeom prst="rect">
+            <a:avLst/>
+          </a:prstGeom>
+          <a:noFill/>
+        </p:spPr>
+        <p:txBody>
+          <a:bodyPr wrap="square" rtlCol="0">
+            <a:spAutoFit/>
+          </a:bodyPr>
+          <a:lstStyle/>
+          <a:p>
+            <a:pPr algn="ctr">
+              <a:spcAft>
+                <a:spcPts val="130"/>
+              </a:spcAft>
+            </a:pPr>
+            <a:r>
+              <a:rPr lang="en-US" sz="1200" dirty="0">
+                <a:latin typeface="Poppins" panose="00000800000000000000" pitchFamily="2" charset="0"/>
+                <a:cs typeface="Poppins" panose="00000800000000000000" pitchFamily="2" charset="0"/>
+              </a:rPr>
+              <a:t>Global Average Pooling 2D</a:t>
+            </a:r>
+          </a:p>
+          <a:p>
+            <a:pPr algn="ctr">
+              <a:spcAft>
+                <a:spcPts val="130"/>
+              </a:spcAft>
+            </a:pPr>
+            <a:r>
+              <a:rPr lang="en-US" sz="1200" dirty="0">
+                <a:latin typeface="Poppins" panose="00000800000000000000" pitchFamily="2" charset="0"/>
+                <a:cs typeface="Poppins" panose="00000800000000000000" pitchFamily="2" charset="0"/>
+              </a:rPr>
+              <a:t>Dense (ReLU) + L2 + Dropout</a:t>
+            </a:r>
+          </a:p>
+          <a:p>
+            <a:pPr algn="ctr">
+              <a:spcAft>
+                <a:spcPts val="130"/>
+              </a:spcAft>
+            </a:pPr>
+            <a:r>
+              <a:rPr lang="en-US" sz="1200" dirty="0">
+                <a:latin typeface="Poppins" panose="00000800000000000000" pitchFamily="2" charset="0"/>
+                <a:cs typeface="Poppins" panose="00000800000000000000" pitchFamily="2" charset="0"/>
+              </a:rPr>
+              <a:t>Dense (ReLU) + L2 + Dropout</a:t>
+            </a:r>
+          </a:p>
+          <a:p>
+            <a:pPr algn="ctr">
+              <a:spcAft>
+                <a:spcPts val="130"/>
+              </a:spcAft>
+            </a:pPr>
+            <a:r>
+              <a:rPr lang="en-US" sz="1200" dirty="0">
+                <a:latin typeface="Poppins" panose="00000800000000000000" pitchFamily="2" charset="0"/>
+                <a:cs typeface="Poppins" panose="00000800000000000000" pitchFamily="2" charset="0"/>
+              </a:rPr>
+              <a:t>Dense (1, Sigmoid)</a:t>
+            </a:r>
+          </a:p>
+          <a:p>
+            <a:pPr algn="ctr">
+              <a:spcAft>
+                <a:spcPts val="130"/>
+              </a:spcAft>
+            </a:pPr>
+            <a:endParaRPr lang="en-US" sz="1200" dirty="0">
+              <a:latin typeface="Poppins" panose="00000800000000000000" pitchFamily="2" charset="0"/>
+              <a:cs typeface="Poppins" panose="00000800000000000000" pitchFamily="2" charset="0"/>
+            </a:endParaRPr>
+          </a:p>
+        </p:txBody>
+      </p:sp>
+      <p:sp>
+        <p:nvSpPr>
+          <p:cNvPr id="44" name="TextBox 43">
+            <a:extLst>
+              <a:ext uri="{FF2B5EF4-FFF2-40B4-BE49-F238E27FC236}">
+                <a16:creationId xmlns:a16="http://schemas.microsoft.com/office/drawing/2014/main" id="{38FF6E07-7966-A52C-7E3C-945E96A6E5B3}"/>
+              </a:ext>
+            </a:extLst>
+          </p:cNvPr>
+          <p:cNvSpPr txBox="1"/>
+          <p:nvPr/>
+        </p:nvSpPr>
+        <p:spPr>
+          <a:xfrm>
+            <a:off x="8650595" y="4532200"/>
+            <a:ext cx="1705959" cy="307777"/>
+          </a:xfrm>
+          <a:prstGeom prst="rect">
+            <a:avLst/>
+          </a:prstGeom>
+          <a:noFill/>
+        </p:spPr>
+        <p:txBody>
+          <a:bodyPr wrap="square" rtlCol="0">
+            <a:spAutoFit/>
+          </a:bodyPr>
+          <a:lstStyle/>
+          <a:p>
+            <a:r>
+              <a:rPr lang="en-US" sz="1400" b="1" dirty="0">
+                <a:latin typeface="Poppins" panose="00000800000000000000" pitchFamily="2" charset="0"/>
+                <a:cs typeface="Poppins" panose="00000800000000000000" pitchFamily="2" charset="0"/>
+              </a:rPr>
+              <a:t>Classifier Head</a:t>
+            </a:r>
+          </a:p>
+        </p:txBody>
+      </p:sp>
+      <p:cxnSp>
+        <p:nvCxnSpPr>
+          <p:cNvPr id="45" name="Straight Arrow Connector 44">
+            <a:extLst>
+              <a:ext uri="{FF2B5EF4-FFF2-40B4-BE49-F238E27FC236}">
+                <a16:creationId xmlns:a16="http://schemas.microsoft.com/office/drawing/2014/main" id="{270EE531-2786-9359-1681-B18F2B5D84FD}"/>
+              </a:ext>
+            </a:extLst>
+          </p:cNvPr>
+          <p:cNvCxnSpPr>
+            <a:cxnSpLocks/>
+          </p:cNvCxnSpPr>
+          <p:nvPr/>
+        </p:nvCxnSpPr>
+        <p:spPr>
+          <a:xfrm flipH="1" flipV="1">
+            <a:off x="2213467" y="2458427"/>
+            <a:ext cx="2845055" cy="2958"/>
+          </a:xfrm>
+          <a:prstGeom prst="straightConnector1">
+            <a:avLst/>
+          </a:prstGeom>
+          <a:ln w="57150">
+            <a:tailEnd type="triangle"/>
+          </a:ln>
+        </p:spPr>
+        <p:style>
+          <a:lnRef idx="2">
+            <a:schemeClr val="dk1"/>
+          </a:lnRef>
+          <a:fillRef idx="0">
+            <a:schemeClr val="dk1"/>
+          </a:fillRef>
+          <a:effectRef idx="1">
+            <a:schemeClr val="dk1"/>
+          </a:effectRef>
+          <a:fontRef idx="minor">
+            <a:schemeClr val="tx1"/>
+          </a:fontRef>
+        </p:style>
+      </p:cxnSp>
+      <p:sp>
+        <p:nvSpPr>
+          <p:cNvPr id="47" name="Rectangle: Rounded Corners 46">
+            <a:extLst>
+              <a:ext uri="{FF2B5EF4-FFF2-40B4-BE49-F238E27FC236}">
+                <a16:creationId xmlns:a16="http://schemas.microsoft.com/office/drawing/2014/main" id="{7C1F6072-42B6-7CF2-1DFD-0D0E542F09A6}"/>
+              </a:ext>
+            </a:extLst>
+          </p:cNvPr>
+          <p:cNvSpPr/>
+          <p:nvPr/>
+        </p:nvSpPr>
+        <p:spPr>
+          <a:xfrm>
+            <a:off x="356213" y="2144910"/>
+            <a:ext cx="1846220" cy="820159"/>
+          </a:xfrm>
+          <a:prstGeom prst="roundRect">
+            <a:avLst/>
+          </a:prstGeom>
+          <a:ln w="19050"/>
+        </p:spPr>
+        <p:style>
+          <a:lnRef idx="2">
+            <a:schemeClr val="dk1"/>
+          </a:lnRef>
+          <a:fillRef idx="1">
+            <a:schemeClr val="lt1"/>
+          </a:fillRef>
+          <a:effectRef idx="0">
+            <a:schemeClr val="dk1"/>
+          </a:effectRef>
+          <a:fontRef idx="minor">
+            <a:schemeClr val="dk1"/>
+          </a:fontRef>
+        </p:style>
+        <p:txBody>
+          <a:bodyPr rtlCol="0" anchor="ctr"/>
+          <a:lstStyle/>
+          <a:p>
+            <a:pPr algn="ctr"/>
+            <a:r>
+              <a:rPr lang="en-US" sz="1200" b="1" dirty="0">
+                <a:latin typeface="Poppins" panose="00000800000000000000" pitchFamily="2" charset="0"/>
+                <a:cs typeface="Poppins" panose="00000800000000000000" pitchFamily="2" charset="0"/>
+              </a:rPr>
+              <a:t>Backbone Selection</a:t>
+            </a:r>
+            <a:br>
+              <a:rPr lang="en-US" sz="1200" dirty="0">
+                <a:latin typeface="Poppins" panose="00000800000000000000" pitchFamily="2" charset="0"/>
+                <a:cs typeface="Poppins" panose="00000800000000000000" pitchFamily="2" charset="0"/>
+              </a:rPr>
+            </a:br>
+            <a:r>
+              <a:rPr lang="en-US" sz="1200" dirty="0">
+                <a:latin typeface="Poppins" panose="00000800000000000000" pitchFamily="2" charset="0"/>
+                <a:cs typeface="Poppins" panose="00000800000000000000" pitchFamily="2" charset="0"/>
+              </a:rPr>
+              <a:t>(EfficientNetB0, Resnet50 and ConvNeXt-Tiny)</a:t>
+            </a:r>
+          </a:p>
+        </p:txBody>
+      </p:sp>
+      <p:sp>
+        <p:nvSpPr>
+          <p:cNvPr id="52" name="Rectangle: Rounded Corners 51">
+            <a:extLst>
+              <a:ext uri="{FF2B5EF4-FFF2-40B4-BE49-F238E27FC236}">
+                <a16:creationId xmlns:a16="http://schemas.microsoft.com/office/drawing/2014/main" id="{3C6860B1-23BA-83EA-147C-C363CB12F20A}"/>
+              </a:ext>
+            </a:extLst>
+          </p:cNvPr>
+          <p:cNvSpPr/>
+          <p:nvPr/>
+        </p:nvSpPr>
+        <p:spPr>
+          <a:xfrm>
+            <a:off x="2710216" y="757568"/>
+            <a:ext cx="1760295" cy="719695"/>
+          </a:xfrm>
+          <a:prstGeom prst="roundRect">
+            <a:avLst/>
+          </a:prstGeom>
+          <a:ln w="19050"/>
+        </p:spPr>
+        <p:style>
+          <a:lnRef idx="2">
+            <a:schemeClr val="dk1"/>
+          </a:lnRef>
+          <a:fillRef idx="1">
+            <a:schemeClr val="lt1"/>
+          </a:fillRef>
+          <a:effectRef idx="0">
+            <a:schemeClr val="dk1"/>
+          </a:effectRef>
+          <a:fontRef idx="minor">
+            <a:schemeClr val="dk1"/>
+          </a:fontRef>
+        </p:style>
+        <p:txBody>
+          <a:bodyPr rtlCol="0" anchor="ctr"/>
+          <a:lstStyle/>
+          <a:p>
+            <a:pPr algn="ctr"/>
+            <a:r>
+              <a:rPr lang="en-US" sz="1200" dirty="0">
+                <a:latin typeface="Poppins" panose="00000800000000000000" pitchFamily="2" charset="0"/>
+                <a:cs typeface="Poppins" panose="00000800000000000000" pitchFamily="2" charset="0"/>
+              </a:rPr>
+              <a:t>Average optimal Threshold from Youden Index</a:t>
+            </a:r>
+          </a:p>
+        </p:txBody>
+      </p:sp>
+      <p:cxnSp>
+        <p:nvCxnSpPr>
+          <p:cNvPr id="53" name="Straight Arrow Connector 52">
+            <a:extLst>
+              <a:ext uri="{FF2B5EF4-FFF2-40B4-BE49-F238E27FC236}">
+                <a16:creationId xmlns:a16="http://schemas.microsoft.com/office/drawing/2014/main" id="{7EAC1788-1FF9-DF00-F2CD-B90BC2DEDFE6}"/>
+              </a:ext>
+            </a:extLst>
+          </p:cNvPr>
+          <p:cNvCxnSpPr>
+            <a:cxnSpLocks/>
+            <a:stCxn id="47" idx="0"/>
+            <a:endCxn id="143" idx="2"/>
+          </p:cNvCxnSpPr>
+          <p:nvPr/>
+        </p:nvCxnSpPr>
+        <p:spPr>
+          <a:xfrm flipH="1" flipV="1">
+            <a:off x="1277584" y="1807327"/>
+            <a:ext cx="1739" cy="337583"/>
+          </a:xfrm>
+          <a:prstGeom prst="straightConnector1">
+            <a:avLst/>
+          </a:prstGeom>
+          <a:ln w="57150">
+            <a:tailEnd type="triangle"/>
+          </a:ln>
+        </p:spPr>
+        <p:style>
+          <a:lnRef idx="2">
+            <a:schemeClr val="dk1"/>
+          </a:lnRef>
+          <a:fillRef idx="0">
+            <a:schemeClr val="dk1"/>
+          </a:fillRef>
+          <a:effectRef idx="1">
+            <a:schemeClr val="dk1"/>
+          </a:effectRef>
+          <a:fontRef idx="minor">
+            <a:schemeClr val="tx1"/>
+          </a:fontRef>
+        </p:style>
+      </p:cxnSp>
+      <p:sp>
+        <p:nvSpPr>
+          <p:cNvPr id="59" name="Rectangle: Rounded Corners 58">
+            <a:extLst>
+              <a:ext uri="{FF2B5EF4-FFF2-40B4-BE49-F238E27FC236}">
+                <a16:creationId xmlns:a16="http://schemas.microsoft.com/office/drawing/2014/main" id="{8052D859-085D-C00B-2AC0-2F5C5F739C35}"/>
+              </a:ext>
+            </a:extLst>
+          </p:cNvPr>
+          <p:cNvSpPr/>
+          <p:nvPr/>
+        </p:nvSpPr>
+        <p:spPr>
+          <a:xfrm>
+            <a:off x="4806686" y="722375"/>
+            <a:ext cx="1847441" cy="785818"/>
+          </a:xfrm>
+          <a:prstGeom prst="roundRect">
+            <a:avLst/>
+          </a:prstGeom>
+          <a:ln w="19050"/>
+        </p:spPr>
+        <p:style>
+          <a:lnRef idx="2">
+            <a:schemeClr val="dk1"/>
+          </a:lnRef>
+          <a:fillRef idx="1">
+            <a:schemeClr val="lt1"/>
+          </a:fillRef>
+          <a:effectRef idx="0">
+            <a:schemeClr val="dk1"/>
+          </a:effectRef>
+          <a:fontRef idx="minor">
+            <a:schemeClr val="dk1"/>
+          </a:fontRef>
+        </p:style>
+        <p:txBody>
+          <a:bodyPr rtlCol="0" anchor="ctr"/>
+          <a:lstStyle/>
+          <a:p>
+            <a:pPr algn="ctr"/>
+            <a:r>
+              <a:rPr lang="en-US" sz="1200" dirty="0">
+                <a:latin typeface="Poppins" panose="00000800000000000000" pitchFamily="2" charset="0"/>
+                <a:cs typeface="Poppins" panose="00000800000000000000" pitchFamily="2" charset="0"/>
+              </a:rPr>
+              <a:t>Re-train on </a:t>
+            </a:r>
+            <a:br>
+              <a:rPr lang="en-US" sz="1200" dirty="0">
+                <a:latin typeface="Poppins" panose="00000800000000000000" pitchFamily="2" charset="0"/>
+                <a:cs typeface="Poppins" panose="00000800000000000000" pitchFamily="2" charset="0"/>
+              </a:rPr>
+            </a:br>
+            <a:r>
+              <a:rPr lang="en-US" sz="1200" dirty="0">
+                <a:latin typeface="Poppins" panose="00000800000000000000" pitchFamily="2" charset="0"/>
+                <a:cs typeface="Poppins" panose="00000800000000000000" pitchFamily="2" charset="0"/>
+              </a:rPr>
+              <a:t>Full Train set 80% </a:t>
+            </a:r>
+            <a:br>
+              <a:rPr lang="en-US" sz="1200" dirty="0">
+                <a:latin typeface="Poppins" panose="00000800000000000000" pitchFamily="2" charset="0"/>
+                <a:cs typeface="Poppins" panose="00000800000000000000" pitchFamily="2" charset="0"/>
+              </a:rPr>
+            </a:br>
+            <a:r>
+              <a:rPr lang="en-US" sz="1200" dirty="0">
+                <a:latin typeface="Poppins" panose="00000800000000000000" pitchFamily="2" charset="0"/>
+                <a:cs typeface="Poppins" panose="00000800000000000000" pitchFamily="2" charset="0"/>
+              </a:rPr>
+              <a:t>(average stopping epoch)</a:t>
+            </a:r>
+          </a:p>
+        </p:txBody>
+      </p:sp>
+      <p:sp>
+        <p:nvSpPr>
+          <p:cNvPr id="143" name="Diamond 142">
+            <a:extLst>
+              <a:ext uri="{FF2B5EF4-FFF2-40B4-BE49-F238E27FC236}">
+                <a16:creationId xmlns:a16="http://schemas.microsoft.com/office/drawing/2014/main" id="{2F6D530C-558A-A32E-22CE-6D965808B922}"/>
+              </a:ext>
+            </a:extLst>
+          </p:cNvPr>
+          <p:cNvSpPr/>
+          <p:nvPr/>
+        </p:nvSpPr>
+        <p:spPr>
+          <a:xfrm>
+            <a:off x="208534" y="515653"/>
+            <a:ext cx="2138099" cy="1291674"/>
+          </a:xfrm>
+          <a:prstGeom prst="diamond">
+            <a:avLst/>
+          </a:prstGeom>
+        </p:spPr>
+        <p:style>
+          <a:lnRef idx="2">
+            <a:schemeClr val="dk1"/>
+          </a:lnRef>
+          <a:fillRef idx="1">
+            <a:schemeClr val="lt1"/>
+          </a:fillRef>
+          <a:effectRef idx="0">
+            <a:schemeClr val="dk1"/>
+          </a:effectRef>
+          <a:fontRef idx="minor">
+            <a:schemeClr val="dk1"/>
+          </a:fontRef>
+        </p:style>
+        <p:txBody>
+          <a:bodyPr rtlCol="0" anchor="ctr"/>
+          <a:lstStyle/>
+          <a:p>
+            <a:pPr algn="ctr"/>
+            <a:endParaRPr lang="en-US" sz="1200" b="1" dirty="0">
+              <a:latin typeface="Poppins" panose="00000800000000000000" pitchFamily="2" charset="0"/>
+              <a:cs typeface="Poppins" panose="00000800000000000000" pitchFamily="2" charset="0"/>
+            </a:endParaRPr>
+          </a:p>
+          <a:p>
+            <a:pPr algn="ctr"/>
+            <a:r>
+              <a:rPr lang="en-US" sz="1200" b="1" dirty="0">
+                <a:latin typeface="Poppins" panose="00000800000000000000" pitchFamily="2" charset="0"/>
+                <a:cs typeface="Poppins" panose="00000800000000000000" pitchFamily="2" charset="0"/>
+              </a:rPr>
+              <a:t> Selection Criteria:</a:t>
+            </a:r>
+          </a:p>
+          <a:p>
+            <a:pPr algn="ctr"/>
+            <a:r>
+              <a:rPr lang="en-US" sz="1200" dirty="0">
+                <a:latin typeface="Poppins" panose="00000800000000000000" pitchFamily="2" charset="0"/>
+                <a:cs typeface="Poppins" panose="00000800000000000000" pitchFamily="2" charset="0"/>
+              </a:rPr>
+              <a:t>AUC &gt; 80%</a:t>
+            </a:r>
+            <a:br>
+              <a:rPr lang="en-US" sz="1200" dirty="0">
+                <a:latin typeface="Poppins" panose="00000800000000000000" pitchFamily="2" charset="0"/>
+                <a:cs typeface="Poppins" panose="00000800000000000000" pitchFamily="2" charset="0"/>
+              </a:rPr>
+            </a:br>
+            <a:r>
+              <a:rPr lang="en-US" sz="1200" dirty="0">
+                <a:latin typeface="Poppins" panose="00000800000000000000" pitchFamily="2" charset="0"/>
+                <a:cs typeface="Poppins" panose="00000800000000000000" pitchFamily="2" charset="0"/>
+              </a:rPr>
+              <a:t>Sen &gt; 85%</a:t>
+            </a:r>
+            <a:br>
+              <a:rPr lang="en-US" sz="1200" dirty="0">
+                <a:latin typeface="Poppins" panose="00000800000000000000" pitchFamily="2" charset="0"/>
+                <a:cs typeface="Poppins" panose="00000800000000000000" pitchFamily="2" charset="0"/>
+              </a:rPr>
+            </a:br>
+            <a:r>
+              <a:rPr lang="en-US" sz="1200" dirty="0">
+                <a:latin typeface="Poppins" panose="00000800000000000000" pitchFamily="2" charset="0"/>
+                <a:cs typeface="Poppins" panose="00000800000000000000" pitchFamily="2" charset="0"/>
+              </a:rPr>
+              <a:t>Spec &gt; 70%</a:t>
+            </a:r>
+          </a:p>
+          <a:p>
+            <a:pPr algn="ctr"/>
+            <a:endParaRPr lang="en-US" sz="1200" dirty="0"/>
+          </a:p>
+        </p:txBody>
+      </p:sp>
+      <p:sp>
+        <p:nvSpPr>
+          <p:cNvPr id="201" name="TextBox 200">
+            <a:extLst>
+              <a:ext uri="{FF2B5EF4-FFF2-40B4-BE49-F238E27FC236}">
+                <a16:creationId xmlns:a16="http://schemas.microsoft.com/office/drawing/2014/main" id="{30B8E9DF-5C40-7BAB-C8EE-21D1FC635941}"/>
+              </a:ext>
+            </a:extLst>
+          </p:cNvPr>
+          <p:cNvSpPr txBox="1"/>
+          <p:nvPr/>
+        </p:nvSpPr>
+        <p:spPr>
+          <a:xfrm>
+            <a:off x="-459777" y="58399"/>
+            <a:ext cx="3474720" cy="461665"/>
+          </a:xfrm>
+          <a:prstGeom prst="rect">
+            <a:avLst/>
+          </a:prstGeom>
+          <a:noFill/>
+        </p:spPr>
+        <p:txBody>
+          <a:bodyPr wrap="square" rtlCol="0">
+            <a:spAutoFit/>
+          </a:bodyPr>
+          <a:lstStyle/>
+          <a:p>
+            <a:pPr algn="ctr"/>
+            <a:r>
+              <a:rPr lang="en-US" sz="1200" b="1" dirty="0">
+                <a:latin typeface="Poppins" panose="00000800000000000000" pitchFamily="2" charset="0"/>
+                <a:cs typeface="Poppins" panose="00000800000000000000" pitchFamily="2" charset="0"/>
+              </a:rPr>
+              <a:t>No meet &amp; All meet criteria: </a:t>
+            </a:r>
+            <a:br>
+              <a:rPr lang="en-US" sz="1200" b="1" dirty="0">
+                <a:latin typeface="Poppins" panose="00000800000000000000" pitchFamily="2" charset="0"/>
+                <a:cs typeface="Poppins" panose="00000800000000000000" pitchFamily="2" charset="0"/>
+              </a:rPr>
+            </a:br>
+            <a:r>
+              <a:rPr lang="en-US" sz="1200" b="1" dirty="0">
+                <a:solidFill>
+                  <a:srgbClr val="FF0000"/>
+                </a:solidFill>
+                <a:latin typeface="Poppins" panose="00000800000000000000" pitchFamily="2" charset="0"/>
+                <a:cs typeface="Poppins" panose="00000800000000000000" pitchFamily="2" charset="0"/>
+              </a:rPr>
+              <a:t>selected by Highest AUC</a:t>
+            </a:r>
+          </a:p>
+        </p:txBody>
+      </p:sp>
+      <p:sp>
+        <p:nvSpPr>
+          <p:cNvPr id="212" name="Rectangle: Rounded Corners 211">
+            <a:extLst>
+              <a:ext uri="{FF2B5EF4-FFF2-40B4-BE49-F238E27FC236}">
+                <a16:creationId xmlns:a16="http://schemas.microsoft.com/office/drawing/2014/main" id="{504AA618-3237-AE79-9A8A-56363495F7C8}"/>
+              </a:ext>
+            </a:extLst>
+          </p:cNvPr>
+          <p:cNvSpPr/>
+          <p:nvPr/>
+        </p:nvSpPr>
+        <p:spPr>
+          <a:xfrm>
+            <a:off x="8950134" y="737145"/>
+            <a:ext cx="2007699" cy="1402429"/>
+          </a:xfrm>
+          <a:prstGeom prst="roundRect">
+            <a:avLst/>
+          </a:prstGeom>
+          <a:ln w="19050"/>
+        </p:spPr>
+        <p:style>
+          <a:lnRef idx="2">
+            <a:schemeClr val="dk1"/>
+          </a:lnRef>
+          <a:fillRef idx="1">
+            <a:schemeClr val="lt1"/>
+          </a:fillRef>
+          <a:effectRef idx="0">
+            <a:schemeClr val="dk1"/>
+          </a:effectRef>
+          <a:fontRef idx="minor">
+            <a:schemeClr val="dk1"/>
+          </a:fontRef>
+        </p:style>
+        <p:txBody>
+          <a:bodyPr rtlCol="0" anchor="ctr"/>
+          <a:lstStyle/>
+          <a:p>
+            <a:pPr algn="ctr"/>
+            <a:r>
+              <a:rPr lang="en-US" sz="1200" b="1" dirty="0">
+                <a:latin typeface="Poppins" panose="00000800000000000000" pitchFamily="2" charset="0"/>
+                <a:cs typeface="Poppins" panose="00000800000000000000" pitchFamily="2" charset="0"/>
+              </a:rPr>
+              <a:t>Performance Results:</a:t>
+            </a:r>
+            <a:br>
+              <a:rPr lang="en-US" sz="1200" b="1" dirty="0">
+                <a:latin typeface="Poppins" panose="00000800000000000000" pitchFamily="2" charset="0"/>
+                <a:cs typeface="Poppins" panose="00000800000000000000" pitchFamily="2" charset="0"/>
+              </a:rPr>
+            </a:br>
+            <a:r>
+              <a:rPr lang="en-US" sz="1200" dirty="0">
+                <a:latin typeface="Poppins" panose="00000800000000000000" pitchFamily="2" charset="0"/>
+                <a:cs typeface="Poppins" panose="00000800000000000000" pitchFamily="2" charset="0"/>
+              </a:rPr>
+              <a:t>Sensitivity</a:t>
+            </a:r>
+            <a:br>
+              <a:rPr lang="en-US" sz="1200" dirty="0">
+                <a:latin typeface="Poppins" panose="00000800000000000000" pitchFamily="2" charset="0"/>
+                <a:cs typeface="Poppins" panose="00000800000000000000" pitchFamily="2" charset="0"/>
+              </a:rPr>
+            </a:br>
+            <a:r>
+              <a:rPr lang="en-US" sz="1200" dirty="0">
+                <a:latin typeface="Poppins" panose="00000800000000000000" pitchFamily="2" charset="0"/>
+                <a:cs typeface="Poppins" panose="00000800000000000000" pitchFamily="2" charset="0"/>
+              </a:rPr>
+              <a:t>Specificity</a:t>
+            </a:r>
+            <a:br>
+              <a:rPr lang="en-US" sz="1200" dirty="0">
+                <a:latin typeface="Poppins" panose="00000800000000000000" pitchFamily="2" charset="0"/>
+                <a:cs typeface="Poppins" panose="00000800000000000000" pitchFamily="2" charset="0"/>
+              </a:rPr>
+            </a:br>
+            <a:r>
+              <a:rPr lang="en-US" sz="1200" dirty="0">
+                <a:latin typeface="Poppins" panose="00000800000000000000" pitchFamily="2" charset="0"/>
+                <a:cs typeface="Poppins" panose="00000800000000000000" pitchFamily="2" charset="0"/>
+              </a:rPr>
+              <a:t>AUC-ROC</a:t>
+            </a:r>
+            <a:br>
+              <a:rPr lang="en-US" sz="1200" dirty="0">
+                <a:latin typeface="Poppins" panose="00000800000000000000" pitchFamily="2" charset="0"/>
+                <a:cs typeface="Poppins" panose="00000800000000000000" pitchFamily="2" charset="0"/>
+              </a:rPr>
+            </a:br>
+            <a:r>
+              <a:rPr lang="en-US" sz="1200" dirty="0">
+                <a:latin typeface="Poppins" panose="00000800000000000000" pitchFamily="2" charset="0"/>
+                <a:cs typeface="Poppins" panose="00000800000000000000" pitchFamily="2" charset="0"/>
+              </a:rPr>
+              <a:t>PPV</a:t>
+            </a:r>
+            <a:br>
+              <a:rPr lang="en-US" sz="1200" dirty="0">
+                <a:latin typeface="Poppins" panose="00000800000000000000" pitchFamily="2" charset="0"/>
+                <a:cs typeface="Poppins" panose="00000800000000000000" pitchFamily="2" charset="0"/>
+              </a:rPr>
+            </a:br>
+            <a:r>
+              <a:rPr lang="en-US" sz="1200" dirty="0">
+                <a:latin typeface="Poppins" panose="00000800000000000000" pitchFamily="2" charset="0"/>
+                <a:cs typeface="Poppins" panose="00000800000000000000" pitchFamily="2" charset="0"/>
+              </a:rPr>
+              <a:t>NPV</a:t>
+            </a:r>
+            <a:br>
+              <a:rPr lang="en-US" sz="1200" dirty="0">
+                <a:latin typeface="Poppins" panose="00000800000000000000" pitchFamily="2" charset="0"/>
+                <a:cs typeface="Poppins" panose="00000800000000000000" pitchFamily="2" charset="0"/>
+              </a:rPr>
+            </a:br>
+            <a:r>
+              <a:rPr lang="en-US" sz="1200" dirty="0">
+                <a:latin typeface="Poppins" panose="00000800000000000000" pitchFamily="2" charset="0"/>
+                <a:cs typeface="Poppins" panose="00000800000000000000" pitchFamily="2" charset="0"/>
+              </a:rPr>
+              <a:t>F1-Score</a:t>
+            </a:r>
+          </a:p>
+        </p:txBody>
+      </p:sp>
+      <p:sp>
+        <p:nvSpPr>
+          <p:cNvPr id="254" name="Rectangle: Rounded Corners 253">
+            <a:extLst>
+              <a:ext uri="{FF2B5EF4-FFF2-40B4-BE49-F238E27FC236}">
+                <a16:creationId xmlns:a16="http://schemas.microsoft.com/office/drawing/2014/main" id="{8FA064CF-8E5C-B056-B35E-24A011E92184}"/>
+              </a:ext>
+            </a:extLst>
+          </p:cNvPr>
+          <p:cNvSpPr/>
+          <p:nvPr/>
+        </p:nvSpPr>
+        <p:spPr>
+          <a:xfrm>
+            <a:off x="200692" y="3130750"/>
+            <a:ext cx="2138099" cy="1788216"/>
+          </a:xfrm>
+          <a:prstGeom prst="roundRect">
+            <a:avLst/>
+          </a:prstGeom>
+          <a:ln w="19050"/>
+        </p:spPr>
+        <p:style>
+          <a:lnRef idx="2">
+            <a:schemeClr val="dk1"/>
+          </a:lnRef>
+          <a:fillRef idx="1">
+            <a:schemeClr val="lt1"/>
+          </a:fillRef>
+          <a:effectRef idx="0">
+            <a:schemeClr val="dk1"/>
+          </a:effectRef>
+          <a:fontRef idx="minor">
+            <a:schemeClr val="dk1"/>
+          </a:fontRef>
+        </p:style>
+        <p:txBody>
+          <a:bodyPr rtlCol="0" anchor="ctr"/>
+          <a:lstStyle/>
+          <a:p>
+            <a:pPr algn="ctr"/>
+            <a:r>
+              <a:rPr lang="en-US" sz="1200" b="1" dirty="0">
+                <a:solidFill>
+                  <a:srgbClr val="0070C0"/>
+                </a:solidFill>
+                <a:latin typeface="Poppins" panose="00000800000000000000" pitchFamily="2" charset="0"/>
+                <a:cs typeface="Poppins" panose="00000800000000000000" pitchFamily="2" charset="0"/>
+              </a:rPr>
+              <a:t>Optuna</a:t>
+            </a:r>
+            <a:r>
+              <a:rPr lang="th-TH" sz="1200" b="1" dirty="0">
+                <a:solidFill>
+                  <a:srgbClr val="0070C0"/>
+                </a:solidFill>
+                <a:latin typeface="Poppins" panose="00000800000000000000" pitchFamily="2" charset="0"/>
+                <a:cs typeface="Poppins" panose="00000800000000000000" pitchFamily="2" charset="0"/>
+              </a:rPr>
+              <a:t> </a:t>
+            </a:r>
+            <a:r>
+              <a:rPr lang="en-US" sz="1200" b="1" dirty="0">
+                <a:solidFill>
+                  <a:srgbClr val="0070C0"/>
+                </a:solidFill>
+                <a:latin typeface="Poppins" panose="00000800000000000000" pitchFamily="2" charset="0"/>
+                <a:cs typeface="Poppins" panose="00000800000000000000" pitchFamily="2" charset="0"/>
+              </a:rPr>
+              <a:t>(TPE Sampler)</a:t>
+            </a:r>
+            <a:br>
+              <a:rPr lang="en-US" sz="1200" b="1" dirty="0">
+                <a:solidFill>
+                  <a:srgbClr val="0070C0"/>
+                </a:solidFill>
+                <a:latin typeface="Poppins" panose="00000800000000000000" pitchFamily="2" charset="0"/>
+                <a:cs typeface="Poppins" panose="00000800000000000000" pitchFamily="2" charset="0"/>
+              </a:rPr>
+            </a:br>
+            <a:r>
+              <a:rPr lang="en-US" sz="1200" b="1" dirty="0">
+                <a:solidFill>
+                  <a:srgbClr val="0070C0"/>
+                </a:solidFill>
+                <a:latin typeface="Poppins" panose="00000800000000000000" pitchFamily="2" charset="0"/>
+                <a:cs typeface="Poppins" panose="00000800000000000000" pitchFamily="2" charset="0"/>
+              </a:rPr>
+              <a:t> 10 trials, (1-fold only)</a:t>
+            </a:r>
+            <a:br>
+              <a:rPr lang="th-TH" sz="1200" dirty="0">
+                <a:solidFill>
+                  <a:schemeClr val="tx1"/>
+                </a:solidFill>
+                <a:latin typeface="Poppins" panose="00000800000000000000" pitchFamily="2" charset="0"/>
+                <a:cs typeface="Poppins" panose="00000800000000000000" pitchFamily="2" charset="0"/>
+              </a:rPr>
+            </a:br>
+            <a:r>
+              <a:rPr lang="en-US" sz="1200" dirty="0">
+                <a:solidFill>
+                  <a:schemeClr val="tx1"/>
+                </a:solidFill>
+                <a:latin typeface="Poppins" panose="00000800000000000000" pitchFamily="2" charset="0"/>
+                <a:cs typeface="Poppins" panose="00000800000000000000" pitchFamily="2" charset="0"/>
+              </a:rPr>
+              <a:t>Dropout_rate</a:t>
+            </a:r>
+            <a:br>
+              <a:rPr lang="en-US" sz="1200" dirty="0">
+                <a:solidFill>
+                  <a:schemeClr val="tx1"/>
+                </a:solidFill>
+                <a:latin typeface="Poppins" panose="00000800000000000000" pitchFamily="2" charset="0"/>
+                <a:cs typeface="Poppins" panose="00000800000000000000" pitchFamily="2" charset="0"/>
+              </a:rPr>
+            </a:br>
+            <a:r>
+              <a:rPr lang="en-US" sz="1200" dirty="0">
+                <a:solidFill>
+                  <a:schemeClr val="tx1"/>
+                </a:solidFill>
+                <a:latin typeface="Poppins" panose="00000800000000000000" pitchFamily="2" charset="0"/>
+                <a:cs typeface="Poppins" panose="00000800000000000000" pitchFamily="2" charset="0"/>
+              </a:rPr>
+              <a:t>L2_Reg</a:t>
+            </a:r>
+            <a:br>
+              <a:rPr lang="en-US" sz="1200" dirty="0">
+                <a:solidFill>
+                  <a:schemeClr val="tx1"/>
+                </a:solidFill>
+                <a:latin typeface="Poppins" panose="00000800000000000000" pitchFamily="2" charset="0"/>
+                <a:cs typeface="Poppins" panose="00000800000000000000" pitchFamily="2" charset="0"/>
+              </a:rPr>
+            </a:br>
+            <a:r>
+              <a:rPr lang="en-US" sz="1200" dirty="0">
+                <a:solidFill>
+                  <a:schemeClr val="tx1"/>
+                </a:solidFill>
+                <a:latin typeface="Poppins" panose="00000800000000000000" pitchFamily="2" charset="0"/>
+                <a:cs typeface="Poppins" panose="00000800000000000000" pitchFamily="2" charset="0"/>
+              </a:rPr>
+              <a:t>Dense_units_1</a:t>
+            </a:r>
+            <a:br>
+              <a:rPr lang="en-US" sz="1200" dirty="0">
+                <a:solidFill>
+                  <a:schemeClr val="tx1"/>
+                </a:solidFill>
+                <a:latin typeface="Poppins" panose="00000800000000000000" pitchFamily="2" charset="0"/>
+                <a:cs typeface="Poppins" panose="00000800000000000000" pitchFamily="2" charset="0"/>
+              </a:rPr>
+            </a:br>
+            <a:r>
+              <a:rPr lang="en-US" sz="1200" dirty="0">
+                <a:solidFill>
+                  <a:schemeClr val="tx1"/>
+                </a:solidFill>
+                <a:latin typeface="Poppins" panose="00000800000000000000" pitchFamily="2" charset="0"/>
+                <a:cs typeface="Poppins" panose="00000800000000000000" pitchFamily="2" charset="0"/>
+              </a:rPr>
+              <a:t>Dense_units_2</a:t>
+            </a:r>
+            <a:br>
+              <a:rPr lang="en-US" sz="1200" dirty="0">
+                <a:solidFill>
+                  <a:schemeClr val="tx1"/>
+                </a:solidFill>
+                <a:latin typeface="Poppins" panose="00000800000000000000" pitchFamily="2" charset="0"/>
+                <a:cs typeface="Poppins" panose="00000800000000000000" pitchFamily="2" charset="0"/>
+              </a:rPr>
+            </a:br>
+            <a:r>
+              <a:rPr lang="en-US" sz="1200" dirty="0">
+                <a:solidFill>
+                  <a:schemeClr val="tx1"/>
+                </a:solidFill>
+                <a:latin typeface="Poppins" panose="00000800000000000000" pitchFamily="2" charset="0"/>
+                <a:cs typeface="Poppins" panose="00000800000000000000" pitchFamily="2" charset="0"/>
+              </a:rPr>
+              <a:t>Batch_size</a:t>
+            </a:r>
+            <a:br>
+              <a:rPr lang="en-US" sz="1200" dirty="0">
+                <a:solidFill>
+                  <a:schemeClr val="tx1"/>
+                </a:solidFill>
+                <a:latin typeface="Poppins" panose="00000800000000000000" pitchFamily="2" charset="0"/>
+                <a:cs typeface="Poppins" panose="00000800000000000000" pitchFamily="2" charset="0"/>
+              </a:rPr>
+            </a:br>
+            <a:r>
+              <a:rPr lang="en-US" sz="1200" dirty="0">
+                <a:solidFill>
+                  <a:schemeClr val="tx1"/>
+                </a:solidFill>
+                <a:latin typeface="Poppins" panose="00000800000000000000" pitchFamily="2" charset="0"/>
+                <a:cs typeface="Poppins" panose="00000800000000000000" pitchFamily="2" charset="0"/>
+              </a:rPr>
+              <a:t>Phase1_lr</a:t>
+            </a:r>
+            <a:br>
+              <a:rPr lang="en-US" sz="1200" dirty="0">
+                <a:solidFill>
+                  <a:schemeClr val="tx1"/>
+                </a:solidFill>
+                <a:latin typeface="Poppins" panose="00000800000000000000" pitchFamily="2" charset="0"/>
+                <a:cs typeface="Poppins" panose="00000800000000000000" pitchFamily="2" charset="0"/>
+              </a:rPr>
+            </a:br>
+            <a:r>
+              <a:rPr lang="en-US" sz="1200" dirty="0">
+                <a:solidFill>
+                  <a:schemeClr val="tx1"/>
+                </a:solidFill>
+                <a:latin typeface="Poppins" panose="00000800000000000000" pitchFamily="2" charset="0"/>
+                <a:cs typeface="Poppins" panose="00000800000000000000" pitchFamily="2" charset="0"/>
+              </a:rPr>
+              <a:t>Phase2_lr</a:t>
+            </a:r>
+          </a:p>
+        </p:txBody>
+      </p:sp>
+      <p:cxnSp>
+        <p:nvCxnSpPr>
+          <p:cNvPr id="264" name="Straight Arrow Connector 263">
+            <a:extLst>
+              <a:ext uri="{FF2B5EF4-FFF2-40B4-BE49-F238E27FC236}">
+                <a16:creationId xmlns:a16="http://schemas.microsoft.com/office/drawing/2014/main" id="{46B2F9A5-B96E-DAB2-D1DA-59FEFD558AC9}"/>
+              </a:ext>
+            </a:extLst>
+          </p:cNvPr>
+          <p:cNvCxnSpPr>
+            <a:cxnSpLocks/>
+            <a:stCxn id="254" idx="3"/>
+            <a:endCxn id="22" idx="1"/>
+          </p:cNvCxnSpPr>
+          <p:nvPr/>
+        </p:nvCxnSpPr>
+        <p:spPr>
+          <a:xfrm>
+            <a:off x="2338791" y="4024858"/>
+            <a:ext cx="421419" cy="0"/>
+          </a:xfrm>
+          <a:prstGeom prst="straightConnector1">
+            <a:avLst/>
+          </a:prstGeom>
+          <a:ln w="57150">
+            <a:tailEnd type="triangle"/>
+          </a:ln>
+        </p:spPr>
+        <p:style>
+          <a:lnRef idx="2">
+            <a:schemeClr val="dk1"/>
+          </a:lnRef>
+          <a:fillRef idx="0">
+            <a:schemeClr val="dk1"/>
+          </a:fillRef>
+          <a:effectRef idx="1">
+            <a:schemeClr val="dk1"/>
+          </a:effectRef>
+          <a:fontRef idx="minor">
+            <a:schemeClr val="tx1"/>
+          </a:fontRef>
+        </p:style>
+      </p:cxnSp>
+      <p:cxnSp>
+        <p:nvCxnSpPr>
+          <p:cNvPr id="341" name="Connector: Elbow 340">
+            <a:extLst>
+              <a:ext uri="{FF2B5EF4-FFF2-40B4-BE49-F238E27FC236}">
+                <a16:creationId xmlns:a16="http://schemas.microsoft.com/office/drawing/2014/main" id="{E6A51AAD-DC59-7BB2-AEDB-7E5B56BB434B}"/>
+              </a:ext>
+            </a:extLst>
+          </p:cNvPr>
+          <p:cNvCxnSpPr>
+            <a:cxnSpLocks/>
+            <a:stCxn id="8" idx="0"/>
+          </p:cNvCxnSpPr>
+          <p:nvPr/>
+        </p:nvCxnSpPr>
+        <p:spPr>
+          <a:xfrm rot="5400000" flipH="1" flipV="1">
+            <a:off x="936058" y="5194841"/>
+            <a:ext cx="551749" cy="2"/>
+          </a:xfrm>
+          <a:prstGeom prst="bentConnector3">
+            <a:avLst>
+              <a:gd name="adj1" fmla="val 50000"/>
+            </a:avLst>
+          </a:prstGeom>
+          <a:ln w="57150">
+            <a:solidFill>
+              <a:schemeClr val="tx1"/>
+            </a:solidFill>
+            <a:tailEnd type="triangle"/>
+          </a:ln>
+        </p:spPr>
+        <p:style>
+          <a:lnRef idx="2">
+            <a:schemeClr val="accent1"/>
+          </a:lnRef>
+          <a:fillRef idx="0">
+            <a:schemeClr val="accent1"/>
+          </a:fillRef>
+          <a:effectRef idx="1">
+            <a:schemeClr val="accent1"/>
+          </a:effectRef>
+          <a:fontRef idx="minor">
+            <a:schemeClr val="tx1"/>
+          </a:fontRef>
+        </p:style>
+      </p:cxnSp>
+      <p:cxnSp>
+        <p:nvCxnSpPr>
+          <p:cNvPr id="368" name="Straight Arrow Connector 367">
+            <a:extLst>
+              <a:ext uri="{FF2B5EF4-FFF2-40B4-BE49-F238E27FC236}">
+                <a16:creationId xmlns:a16="http://schemas.microsoft.com/office/drawing/2014/main" id="{40D92509-A897-9615-D051-E2E6D2D8E3B4}"/>
+              </a:ext>
+            </a:extLst>
+          </p:cNvPr>
+          <p:cNvCxnSpPr>
+            <a:cxnSpLocks/>
+          </p:cNvCxnSpPr>
+          <p:nvPr/>
+        </p:nvCxnSpPr>
+        <p:spPr>
+          <a:xfrm>
+            <a:off x="6654127" y="1130726"/>
+            <a:ext cx="403143" cy="0"/>
+          </a:xfrm>
+          <a:prstGeom prst="straightConnector1">
+            <a:avLst/>
+          </a:prstGeom>
+          <a:ln w="57150">
+            <a:tailEnd type="triangle"/>
+          </a:ln>
+        </p:spPr>
+        <p:style>
+          <a:lnRef idx="2">
+            <a:schemeClr val="dk1"/>
+          </a:lnRef>
+          <a:fillRef idx="0">
+            <a:schemeClr val="dk1"/>
+          </a:fillRef>
+          <a:effectRef idx="1">
+            <a:schemeClr val="dk1"/>
+          </a:effectRef>
+          <a:fontRef idx="minor">
+            <a:schemeClr val="tx1"/>
+          </a:fontRef>
+        </p:style>
+      </p:cxnSp>
+      <p:cxnSp>
+        <p:nvCxnSpPr>
+          <p:cNvPr id="386" name="Straight Arrow Connector 385">
+            <a:extLst>
+              <a:ext uri="{FF2B5EF4-FFF2-40B4-BE49-F238E27FC236}">
+                <a16:creationId xmlns:a16="http://schemas.microsoft.com/office/drawing/2014/main" id="{34031DD6-FFEE-9110-50B7-F60E4AFA91E3}"/>
+              </a:ext>
+            </a:extLst>
+          </p:cNvPr>
+          <p:cNvCxnSpPr>
+            <a:cxnSpLocks/>
+          </p:cNvCxnSpPr>
+          <p:nvPr/>
+        </p:nvCxnSpPr>
+        <p:spPr>
+          <a:xfrm flipV="1">
+            <a:off x="8364594" y="1155268"/>
+            <a:ext cx="585540" cy="12444"/>
+          </a:xfrm>
+          <a:prstGeom prst="straightConnector1">
+            <a:avLst/>
+          </a:prstGeom>
+          <a:ln w="57150">
+            <a:tailEnd type="triangle"/>
+          </a:ln>
+        </p:spPr>
+        <p:style>
+          <a:lnRef idx="2">
+            <a:schemeClr val="dk1"/>
+          </a:lnRef>
+          <a:fillRef idx="0">
+            <a:schemeClr val="dk1"/>
+          </a:fillRef>
+          <a:effectRef idx="1">
+            <a:schemeClr val="dk1"/>
+          </a:effectRef>
+          <a:fontRef idx="minor">
+            <a:schemeClr val="tx1"/>
+          </a:fontRef>
+        </p:style>
+      </p:cxnSp>
+      <p:sp>
+        <p:nvSpPr>
+          <p:cNvPr id="22" name="Rectangle: Rounded Corners 21">
+            <a:extLst>
+              <a:ext uri="{FF2B5EF4-FFF2-40B4-BE49-F238E27FC236}">
+                <a16:creationId xmlns:a16="http://schemas.microsoft.com/office/drawing/2014/main" id="{AD9D7D51-D36F-5AAF-3DB3-BC3A733132CE}"/>
+              </a:ext>
+            </a:extLst>
+          </p:cNvPr>
+          <p:cNvSpPr/>
+          <p:nvPr/>
+        </p:nvSpPr>
+        <p:spPr>
+          <a:xfrm>
+            <a:off x="2760210" y="3756448"/>
+            <a:ext cx="1827630" cy="536820"/>
+          </a:xfrm>
+          <a:prstGeom prst="roundRect">
+            <a:avLst/>
+          </a:prstGeom>
+          <a:ln w="19050"/>
+        </p:spPr>
+        <p:style>
+          <a:lnRef idx="2">
+            <a:schemeClr val="dk1"/>
+          </a:lnRef>
+          <a:fillRef idx="1">
+            <a:schemeClr val="lt1"/>
+          </a:fillRef>
+          <a:effectRef idx="0">
+            <a:schemeClr val="dk1"/>
+          </a:effectRef>
+          <a:fontRef idx="minor">
+            <a:schemeClr val="dk1"/>
+          </a:fontRef>
+        </p:style>
+        <p:txBody>
+          <a:bodyPr rtlCol="0" anchor="ctr"/>
+          <a:lstStyle/>
+          <a:p>
+            <a:pPr algn="ctr"/>
+            <a:r>
+              <a:rPr lang="en-US" sz="1200" dirty="0">
+                <a:latin typeface="Poppins" panose="00000800000000000000" pitchFamily="2" charset="0"/>
+                <a:cs typeface="Poppins" panose="00000800000000000000" pitchFamily="2" charset="0"/>
+              </a:rPr>
+              <a:t>5-fold CV with best hyperparameter</a:t>
+            </a:r>
+          </a:p>
+        </p:txBody>
+      </p:sp>
+      <p:sp>
+        <p:nvSpPr>
+          <p:cNvPr id="33" name="TextBox 32">
+            <a:extLst>
+              <a:ext uri="{FF2B5EF4-FFF2-40B4-BE49-F238E27FC236}">
+                <a16:creationId xmlns:a16="http://schemas.microsoft.com/office/drawing/2014/main" id="{D1AB29D7-2D9E-7312-E59A-A671CC9765EF}"/>
+              </a:ext>
+            </a:extLst>
+          </p:cNvPr>
+          <p:cNvSpPr txBox="1"/>
+          <p:nvPr/>
+        </p:nvSpPr>
+        <p:spPr>
+          <a:xfrm>
+            <a:off x="2850480" y="230737"/>
+            <a:ext cx="3474720" cy="276999"/>
+          </a:xfrm>
+          <a:prstGeom prst="rect">
+            <a:avLst/>
+          </a:prstGeom>
+          <a:noFill/>
+        </p:spPr>
+        <p:txBody>
+          <a:bodyPr wrap="square" rtlCol="0">
+            <a:spAutoFit/>
+          </a:bodyPr>
+          <a:lstStyle/>
+          <a:p>
+            <a:pPr algn="ctr"/>
+            <a:r>
+              <a:rPr lang="en-US" sz="1200" b="1" dirty="0">
+                <a:latin typeface="Poppins" panose="00000800000000000000" pitchFamily="2" charset="0"/>
+                <a:cs typeface="Poppins" panose="00000800000000000000" pitchFamily="2" charset="0"/>
+              </a:rPr>
+              <a:t>These average from results of 5-fold cv</a:t>
+            </a:r>
+            <a:endParaRPr lang="en-US" sz="1200" b="1" dirty="0">
+              <a:solidFill>
+                <a:srgbClr val="FF0000"/>
+              </a:solidFill>
+              <a:latin typeface="Poppins" panose="00000800000000000000" pitchFamily="2" charset="0"/>
+              <a:cs typeface="Poppins" panose="00000800000000000000" pitchFamily="2" charset="0"/>
+            </a:endParaRPr>
+          </a:p>
+        </p:txBody>
+      </p:sp>
+    </p:spTree>
+    <p:extLst>
+      <p:ext uri="{BB962C8B-B14F-4D97-AF65-F5344CB8AC3E}">
+        <p14:creationId xmlns:p14="http://schemas.microsoft.com/office/powerpoint/2010/main" val="1421825157"/>
+      </p:ext>
+    </p:extLst>
+  </p:cSld>
+  <p:clrMapOvr>
+    <a:masterClrMapping/>
+  </p:clrMapOvr>
+</p:sld>
+</file>
+
+<file path=ppt/slides/slide4.xml><?xml version="1.0" encoding="utf-8"?>
+<p:sld xmlns:a="http://schemas.openxmlformats.org/drawingml/2006/main" xmlns:r="http://schemas.openxmlformats.org/officeDocument/2006/relationships" xmlns:p="http://schemas.openxmlformats.org/presentationml/2006/main">
+  <p:cSld>
+    <p:spTree>
+      <p:nvGrpSpPr>
+        <p:cNvPr id="1" name=""/>
+        <p:cNvGrpSpPr/>
+        <p:nvPr/>
+      </p:nvGrpSpPr>
+      <p:grpSpPr>
+        <a:xfrm>
+          <a:off x="0" y="0"/>
+          <a:ext cx="0" cy="0"/>
+          <a:chOff x="0" y="0"/>
+          <a:chExt cx="0" cy="0"/>
+        </a:xfrm>
+      </p:grpSpPr>
+      <p:pic>
+        <p:nvPicPr>
+          <p:cNvPr id="16" name="Picture 15">
+            <a:extLst>
+              <a:ext uri="{FF2B5EF4-FFF2-40B4-BE49-F238E27FC236}">
+                <a16:creationId xmlns:a16="http://schemas.microsoft.com/office/drawing/2014/main" id="{57A5F70E-664A-98D9-CEE4-87CED74ECE02}"/>
+              </a:ext>
+            </a:extLst>
+          </p:cNvPr>
+          <p:cNvPicPr>
+            <a:picLocks noChangeAspect="1"/>
+          </p:cNvPicPr>
+          <p:nvPr/>
+        </p:nvPicPr>
+        <p:blipFill>
+          <a:blip r:embed="rId2"/>
+          <a:srcRect t="14350"/>
+          <a:stretch/>
+        </p:blipFill>
+        <p:spPr>
+          <a:xfrm>
+            <a:off x="0" y="2362200"/>
+            <a:ext cx="12192000" cy="2562986"/>
+          </a:xfrm>
+          <a:prstGeom prst="rect">
+            <a:avLst/>
+          </a:prstGeom>
+        </p:spPr>
+      </p:pic>
+      <p:sp>
+        <p:nvSpPr>
+          <p:cNvPr id="17" name="TextBox 16">
+            <a:extLst>
+              <a:ext uri="{FF2B5EF4-FFF2-40B4-BE49-F238E27FC236}">
+                <a16:creationId xmlns:a16="http://schemas.microsoft.com/office/drawing/2014/main" id="{188A4248-E330-8E32-2A09-606B9CBE52B3}"/>
+              </a:ext>
+            </a:extLst>
+          </p:cNvPr>
+          <p:cNvSpPr txBox="1"/>
+          <p:nvPr/>
+        </p:nvSpPr>
+        <p:spPr>
+          <a:xfrm>
+            <a:off x="2916967" y="1777425"/>
+            <a:ext cx="6358065" cy="584775"/>
+          </a:xfrm>
+          <a:prstGeom prst="rect">
+            <a:avLst/>
+          </a:prstGeom>
+          <a:noFill/>
+        </p:spPr>
+        <p:txBody>
+          <a:bodyPr wrap="square" rtlCol="0">
+            <a:spAutoFit/>
+          </a:bodyPr>
+          <a:lstStyle/>
+          <a:p>
+            <a:pPr algn="ctr"/>
+            <a:r>
+              <a:rPr lang="en-US" sz="3200" dirty="0">
+                <a:latin typeface="Poppins" panose="00000800000000000000" pitchFamily="2" charset="0"/>
+                <a:cs typeface="Poppins" panose="00000800000000000000" pitchFamily="2" charset="0"/>
+              </a:rPr>
+              <a:t>Baseline Model Architecture </a:t>
+            </a:r>
+          </a:p>
+        </p:txBody>
+      </p:sp>
+    </p:spTree>
+    <p:extLst>
+      <p:ext uri="{BB962C8B-B14F-4D97-AF65-F5344CB8AC3E}">
+        <p14:creationId xmlns:p14="http://schemas.microsoft.com/office/powerpoint/2010/main" val="3928834742"/>
+      </p:ext>
+    </p:extLst>
+  </p:cSld>
+  <p:clrMapOvr>
+    <a:masterClrMapping/>
+  </p:clrMapOvr>
+</p:sld>
+</file>
+
+<file path=ppt/slides/slide5.xml><?xml version="1.0" encoding="utf-8"?>
+<p:sld xmlns:a="http://schemas.openxmlformats.org/drawingml/2006/main" xmlns:r="http://schemas.openxmlformats.org/officeDocument/2006/relationships" xmlns:p="http://schemas.openxmlformats.org/presentationml/2006/main">
+  <p:cSld>
+    <p:spTree>
+      <p:nvGrpSpPr>
+        <p:cNvPr id="1" name=""/>
+        <p:cNvGrpSpPr/>
+        <p:nvPr/>
+      </p:nvGrpSpPr>
+      <p:grpSpPr>
+        <a:xfrm>
+          <a:off x="0" y="0"/>
+          <a:ext cx="0" cy="0"/>
+          <a:chOff x="0" y="0"/>
+          <a:chExt cx="0" cy="0"/>
+        </a:xfrm>
+      </p:grpSpPr>
+      <p:sp>
+        <p:nvSpPr>
+          <p:cNvPr id="29" name="Rectangle 28">
+            <a:extLst>
+              <a:ext uri="{FF2B5EF4-FFF2-40B4-BE49-F238E27FC236}">
+                <a16:creationId xmlns:a16="http://schemas.microsoft.com/office/drawing/2014/main" id="{8166C546-4320-DB48-1C1F-FA5662650635}"/>
+              </a:ext>
+            </a:extLst>
+          </p:cNvPr>
+          <p:cNvSpPr>
+            <a:spLocks/>
+          </p:cNvSpPr>
+          <p:nvPr/>
+        </p:nvSpPr>
+        <p:spPr>
+          <a:xfrm>
+            <a:off x="5375243" y="975761"/>
+            <a:ext cx="3475273" cy="1555905"/>
+          </a:xfrm>
+          <a:prstGeom prst="rect">
+            <a:avLst/>
+          </a:prstGeom>
+          <a:ln>
+            <a:prstDash val="sysDash"/>
+          </a:ln>
+        </p:spPr>
+        <p:style>
+          <a:lnRef idx="2">
+            <a:schemeClr val="dk1"/>
+          </a:lnRef>
+          <a:fillRef idx="1">
+            <a:schemeClr val="lt1"/>
+          </a:fillRef>
+          <a:effectRef idx="0">
+            <a:schemeClr val="dk1"/>
+          </a:effectRef>
+          <a:fontRef idx="minor">
+            <a:schemeClr val="dk1"/>
+          </a:fontRef>
+        </p:style>
+        <p:txBody>
+          <a:bodyPr rtlCol="0" anchor="ctr"/>
+          <a:lstStyle/>
+          <a:p>
+            <a:pPr algn="ctr"/>
+            <a:endParaRPr lang="en-US"/>
+          </a:p>
+        </p:txBody>
+      </p:sp>
+      <p:sp>
+        <p:nvSpPr>
+          <p:cNvPr id="30" name="TextBox 29">
+            <a:extLst>
+              <a:ext uri="{FF2B5EF4-FFF2-40B4-BE49-F238E27FC236}">
+                <a16:creationId xmlns:a16="http://schemas.microsoft.com/office/drawing/2014/main" id="{67F04354-8B7D-B448-03C4-003E47CD55D4}"/>
+              </a:ext>
+            </a:extLst>
+          </p:cNvPr>
+          <p:cNvSpPr txBox="1"/>
+          <p:nvPr/>
+        </p:nvSpPr>
+        <p:spPr>
+          <a:xfrm>
+            <a:off x="5293849" y="695154"/>
+            <a:ext cx="3556670" cy="276999"/>
+          </a:xfrm>
+          <a:prstGeom prst="rect">
+            <a:avLst/>
+          </a:prstGeom>
+          <a:noFill/>
+        </p:spPr>
+        <p:txBody>
+          <a:bodyPr wrap="square" rtlCol="0">
+            <a:spAutoFit/>
+          </a:bodyPr>
+          <a:lstStyle/>
+          <a:p>
+            <a:pPr algn="ctr"/>
+            <a:r>
+              <a:rPr lang="en-US" sz="1200" b="1" dirty="0">
+                <a:latin typeface="Poppins" panose="00000800000000000000" pitchFamily="2" charset="0"/>
+                <a:cs typeface="Poppins" panose="00000800000000000000" pitchFamily="2" charset="0"/>
+              </a:rPr>
+              <a:t>These average from results of 5-fold cv</a:t>
+            </a:r>
+            <a:endParaRPr lang="en-US" sz="1200" b="1" dirty="0">
+              <a:solidFill>
+                <a:srgbClr val="FF0000"/>
+              </a:solidFill>
+              <a:latin typeface="Poppins" panose="00000800000000000000" pitchFamily="2" charset="0"/>
+              <a:cs typeface="Poppins" panose="00000800000000000000" pitchFamily="2" charset="0"/>
+            </a:endParaRPr>
+          </a:p>
+        </p:txBody>
+      </p:sp>
+      <p:cxnSp>
+        <p:nvCxnSpPr>
+          <p:cNvPr id="43" name="Straight Arrow Connector 42">
+            <a:extLst>
+              <a:ext uri="{FF2B5EF4-FFF2-40B4-BE49-F238E27FC236}">
+                <a16:creationId xmlns:a16="http://schemas.microsoft.com/office/drawing/2014/main" id="{7DCDAE58-F066-0647-1C9C-1BA2FFA51BDF}"/>
+              </a:ext>
+            </a:extLst>
+          </p:cNvPr>
+          <p:cNvCxnSpPr>
+            <a:cxnSpLocks/>
+            <a:endCxn id="8" idx="3"/>
+          </p:cNvCxnSpPr>
+          <p:nvPr/>
+        </p:nvCxnSpPr>
+        <p:spPr>
+          <a:xfrm flipH="1">
+            <a:off x="2040163" y="3699475"/>
+            <a:ext cx="1490521" cy="0"/>
+          </a:xfrm>
+          <a:prstGeom prst="straightConnector1">
+            <a:avLst/>
+          </a:prstGeom>
+          <a:ln w="57150">
+            <a:tailEnd type="triangle"/>
+          </a:ln>
+        </p:spPr>
+        <p:style>
+          <a:lnRef idx="2">
+            <a:schemeClr val="dk1"/>
+          </a:lnRef>
+          <a:fillRef idx="0">
+            <a:schemeClr val="dk1"/>
+          </a:fillRef>
+          <a:effectRef idx="1">
+            <a:schemeClr val="dk1"/>
+          </a:effectRef>
+          <a:fontRef idx="minor">
+            <a:schemeClr val="tx1"/>
+          </a:fontRef>
+        </p:style>
+      </p:cxnSp>
+      <p:sp>
+        <p:nvSpPr>
+          <p:cNvPr id="4" name="Flowchart: Magnetic Disk 3">
+            <a:extLst>
+              <a:ext uri="{FF2B5EF4-FFF2-40B4-BE49-F238E27FC236}">
+                <a16:creationId xmlns:a16="http://schemas.microsoft.com/office/drawing/2014/main" id="{B15B1171-252B-47F1-F099-9463350302DA}"/>
+              </a:ext>
+            </a:extLst>
+          </p:cNvPr>
+          <p:cNvSpPr/>
+          <p:nvPr/>
+        </p:nvSpPr>
+        <p:spPr>
+          <a:xfrm>
+            <a:off x="584310" y="4521769"/>
+            <a:ext cx="1315092" cy="1027415"/>
+          </a:xfrm>
+          <a:prstGeom prst="flowChartMagneticDisk">
+            <a:avLst/>
+          </a:prstGeom>
+        </p:spPr>
+        <p:style>
+          <a:lnRef idx="2">
+            <a:schemeClr val="dk1"/>
+          </a:lnRef>
+          <a:fillRef idx="1">
+            <a:schemeClr val="lt1"/>
+          </a:fillRef>
+          <a:effectRef idx="0">
+            <a:schemeClr val="dk1"/>
+          </a:effectRef>
+          <a:fontRef idx="minor">
+            <a:schemeClr val="dk1"/>
+          </a:fontRef>
+        </p:style>
+        <p:txBody>
+          <a:bodyPr rtlCol="0" anchor="ctr"/>
+          <a:lstStyle/>
+          <a:p>
+            <a:pPr algn="ctr"/>
+            <a:endParaRPr lang="en-US"/>
+          </a:p>
+        </p:txBody>
+      </p:sp>
+      <p:sp>
+        <p:nvSpPr>
+          <p:cNvPr id="8" name="Rectangle: Rounded Corners 7">
+            <a:extLst>
+              <a:ext uri="{FF2B5EF4-FFF2-40B4-BE49-F238E27FC236}">
+                <a16:creationId xmlns:a16="http://schemas.microsoft.com/office/drawing/2014/main" id="{716059DD-607C-DFCA-E0F6-25CE59EBDEB8}"/>
+              </a:ext>
+            </a:extLst>
+          </p:cNvPr>
+          <p:cNvSpPr/>
+          <p:nvPr/>
+        </p:nvSpPr>
+        <p:spPr>
+          <a:xfrm>
+            <a:off x="546135" y="3431065"/>
+            <a:ext cx="1494028" cy="536820"/>
+          </a:xfrm>
+          <a:prstGeom prst="roundRect">
+            <a:avLst/>
+          </a:prstGeom>
+          <a:ln w="19050"/>
+        </p:spPr>
+        <p:style>
+          <a:lnRef idx="2">
+            <a:schemeClr val="dk1"/>
+          </a:lnRef>
+          <a:fillRef idx="1">
+            <a:schemeClr val="lt1"/>
+          </a:fillRef>
+          <a:effectRef idx="0">
+            <a:schemeClr val="dk1"/>
+          </a:effectRef>
+          <a:fontRef idx="minor">
+            <a:schemeClr val="dk1"/>
+          </a:fontRef>
+        </p:style>
+        <p:txBody>
+          <a:bodyPr rtlCol="0" anchor="ctr"/>
+          <a:lstStyle/>
+          <a:p>
+            <a:pPr algn="ctr"/>
+            <a:r>
+              <a:rPr lang="en-US" sz="1200" dirty="0">
+                <a:latin typeface="Poppins" panose="00000800000000000000" pitchFamily="2" charset="0"/>
+                <a:cs typeface="Poppins" panose="00000800000000000000" pitchFamily="2" charset="0"/>
+              </a:rPr>
+              <a:t>Train set 80%</a:t>
+            </a:r>
+          </a:p>
+        </p:txBody>
+      </p:sp>
+      <p:cxnSp>
+        <p:nvCxnSpPr>
+          <p:cNvPr id="12" name="Straight Arrow Connector 11">
+            <a:extLst>
+              <a:ext uri="{FF2B5EF4-FFF2-40B4-BE49-F238E27FC236}">
+                <a16:creationId xmlns:a16="http://schemas.microsoft.com/office/drawing/2014/main" id="{D63981B1-81C8-01B5-12DC-3BA0B93AC38F}"/>
+              </a:ext>
+            </a:extLst>
+          </p:cNvPr>
+          <p:cNvCxnSpPr>
+            <a:cxnSpLocks/>
+            <a:stCxn id="72" idx="3"/>
+            <a:endCxn id="39" idx="1"/>
+          </p:cNvCxnSpPr>
+          <p:nvPr/>
+        </p:nvCxnSpPr>
+        <p:spPr>
+          <a:xfrm>
+            <a:off x="2235645" y="1762301"/>
+            <a:ext cx="363063" cy="685"/>
+          </a:xfrm>
+          <a:prstGeom prst="straightConnector1">
+            <a:avLst/>
+          </a:prstGeom>
+          <a:ln w="57150">
+            <a:tailEnd type="triangle"/>
+          </a:ln>
+        </p:spPr>
+        <p:style>
+          <a:lnRef idx="2">
+            <a:schemeClr val="dk1"/>
+          </a:lnRef>
+          <a:fillRef idx="0">
+            <a:schemeClr val="dk1"/>
+          </a:fillRef>
+          <a:effectRef idx="1">
+            <a:schemeClr val="dk1"/>
+          </a:effectRef>
+          <a:fontRef idx="minor">
+            <a:schemeClr val="tx1"/>
+          </a:fontRef>
+        </p:style>
+      </p:cxnSp>
+      <p:sp>
+        <p:nvSpPr>
+          <p:cNvPr id="15" name="Rectangle 14">
+            <a:extLst>
+              <a:ext uri="{FF2B5EF4-FFF2-40B4-BE49-F238E27FC236}">
+                <a16:creationId xmlns:a16="http://schemas.microsoft.com/office/drawing/2014/main" id="{D5A6BA5C-5583-E3A3-A9E0-CDB02E5343E5}"/>
+              </a:ext>
+            </a:extLst>
+          </p:cNvPr>
+          <p:cNvSpPr/>
+          <p:nvPr/>
+        </p:nvSpPr>
+        <p:spPr>
+          <a:xfrm>
+            <a:off x="3493771" y="2937608"/>
+            <a:ext cx="4990550" cy="1746776"/>
+          </a:xfrm>
+          <a:prstGeom prst="rect">
+            <a:avLst/>
+          </a:prstGeom>
+        </p:spPr>
+        <p:style>
+          <a:lnRef idx="2">
+            <a:schemeClr val="dk1"/>
+          </a:lnRef>
+          <a:fillRef idx="1">
+            <a:schemeClr val="lt1"/>
+          </a:fillRef>
+          <a:effectRef idx="0">
+            <a:schemeClr val="dk1"/>
+          </a:effectRef>
+          <a:fontRef idx="minor">
+            <a:schemeClr val="dk1"/>
+          </a:fontRef>
+        </p:style>
+        <p:txBody>
+          <a:bodyPr rtlCol="0" anchor="ctr"/>
+          <a:lstStyle/>
+          <a:p>
+            <a:pPr algn="ctr"/>
+            <a:endParaRPr lang="en-US"/>
+          </a:p>
+        </p:txBody>
+      </p:sp>
+      <p:sp>
+        <p:nvSpPr>
+          <p:cNvPr id="16" name="TextBox 15">
+            <a:extLst>
+              <a:ext uri="{FF2B5EF4-FFF2-40B4-BE49-F238E27FC236}">
+                <a16:creationId xmlns:a16="http://schemas.microsoft.com/office/drawing/2014/main" id="{9157B6E7-5C4F-F806-90FA-2999289DD111}"/>
+              </a:ext>
+            </a:extLst>
+          </p:cNvPr>
+          <p:cNvSpPr txBox="1"/>
+          <p:nvPr/>
+        </p:nvSpPr>
+        <p:spPr>
+          <a:xfrm>
+            <a:off x="4544921" y="2583138"/>
+            <a:ext cx="2986290" cy="307777"/>
+          </a:xfrm>
+          <a:prstGeom prst="rect">
+            <a:avLst/>
+          </a:prstGeom>
+          <a:noFill/>
+        </p:spPr>
+        <p:txBody>
+          <a:bodyPr wrap="square" rtlCol="0">
+            <a:spAutoFit/>
+          </a:bodyPr>
+          <a:lstStyle/>
+          <a:p>
+            <a:pPr algn="ctr"/>
+            <a:r>
+              <a:rPr lang="en-US" sz="1400" b="1" dirty="0">
+                <a:latin typeface="Poppins" panose="00000800000000000000" pitchFamily="2" charset="0"/>
+                <a:cs typeface="Poppins" panose="00000800000000000000" pitchFamily="2" charset="0"/>
+              </a:rPr>
+              <a:t>Handcrafted</a:t>
+            </a:r>
+            <a:r>
+              <a:rPr lang="th-TH" sz="1400" b="1" dirty="0">
+                <a:latin typeface="Poppins" panose="00000800000000000000" pitchFamily="2" charset="0"/>
+                <a:cs typeface="Poppins" panose="00000800000000000000" pitchFamily="2" charset="0"/>
+              </a:rPr>
+              <a:t> </a:t>
+            </a:r>
+            <a:r>
+              <a:rPr lang="en-US" sz="1400" b="1" dirty="0">
+                <a:latin typeface="Poppins" panose="00000800000000000000" pitchFamily="2" charset="0"/>
+                <a:cs typeface="Poppins" panose="00000800000000000000" pitchFamily="2" charset="0"/>
+              </a:rPr>
+              <a:t>Feature Extractor</a:t>
+            </a:r>
+          </a:p>
+        </p:txBody>
+      </p:sp>
+      <p:sp>
+        <p:nvSpPr>
+          <p:cNvPr id="17" name="TextBox 16">
+            <a:extLst>
+              <a:ext uri="{FF2B5EF4-FFF2-40B4-BE49-F238E27FC236}">
+                <a16:creationId xmlns:a16="http://schemas.microsoft.com/office/drawing/2014/main" id="{1123F81B-F3F5-EAA8-7BF7-B52072F44763}"/>
+              </a:ext>
+            </a:extLst>
+          </p:cNvPr>
+          <p:cNvSpPr txBox="1"/>
+          <p:nvPr/>
+        </p:nvSpPr>
+        <p:spPr>
+          <a:xfrm>
+            <a:off x="3672974" y="3045374"/>
+            <a:ext cx="4777301" cy="1569660"/>
+          </a:xfrm>
+          <a:prstGeom prst="rect">
+            <a:avLst/>
+          </a:prstGeom>
+          <a:noFill/>
+        </p:spPr>
+        <p:txBody>
+          <a:bodyPr wrap="square" rtlCol="0">
+            <a:spAutoFit/>
+          </a:bodyPr>
+          <a:lstStyle/>
+          <a:p>
+            <a:r>
+              <a:rPr lang="en-US" sz="1200" b="1" i="0" dirty="0">
                 <a:solidFill>
                   <a:srgbClr val="C00000"/>
                 </a:solidFill>
@@ -5887,7 +8473,7 @@
               <a:t>Gray-Level Co-occurrence Matrix</a:t>
             </a:r>
             <a:r>
-              <a:rPr lang="th-TH" sz="1200" b="0" i="0" dirty="0">
+              <a:rPr lang="th-TH" sz="1200" b="1" i="0" dirty="0">
                 <a:solidFill>
                   <a:srgbClr val="C00000"/>
                 </a:solidFill>
@@ -5897,7 +8483,7 @@
               <a:t> </a:t>
             </a:r>
             <a:r>
-              <a:rPr lang="en-US" sz="1200" b="0" i="0" dirty="0">
+              <a:rPr lang="en-US" sz="1200" b="1" i="0" dirty="0">
                 <a:solidFill>
                   <a:srgbClr val="C00000"/>
                 </a:solidFill>
@@ -5908,7 +8494,7 @@
               <a:t>(</a:t>
             </a:r>
             <a:r>
-              <a:rPr lang="en-US" sz="1200" dirty="0">
+              <a:rPr lang="en-US" sz="1200" b="1" dirty="0">
                 <a:solidFill>
                   <a:srgbClr val="C00000"/>
                 </a:solidFill>
@@ -5918,7 +8504,7 @@
               <a:t>GLCM):</a:t>
             </a:r>
             <a:br>
-              <a:rPr lang="th-TH" sz="1200" dirty="0">
+              <a:rPr lang="th-TH" sz="1200" b="1" dirty="0">
                 <a:latin typeface="Poppins" panose="00000800000000000000" pitchFamily="2" charset="0"/>
                 <a:cs typeface="Poppins" panose="00000800000000000000" pitchFamily="2" charset="0"/>
               </a:rPr>
@@ -5952,7 +8538,7 @@
           </a:p>
           <a:p>
             <a:r>
-              <a:rPr lang="en-US" sz="1200" b="0" i="0" dirty="0">
+              <a:rPr lang="en-US" sz="1200" b="1" i="0" dirty="0">
                 <a:solidFill>
                   <a:srgbClr val="7030A0"/>
                 </a:solidFill>
@@ -6427,7 +9013,7 @@
           <a:p>
             <a:pPr algn="ctr"/>
             <a:r>
-              <a:rPr lang="en-US" sz="1200" dirty="0">
+              <a:rPr lang="en-US" sz="1200" b="1" dirty="0" err="1">
                 <a:solidFill>
                   <a:srgbClr val="0070C0"/>
                 </a:solidFill>
@@ -6437,7 +9023,7 @@
               <a:t>GridSearchCV</a:t>
             </a:r>
             <a:r>
-              <a:rPr lang="th-TH" sz="1200" dirty="0">
+              <a:rPr lang="th-TH" sz="1200" b="1" dirty="0">
                 <a:solidFill>
                   <a:srgbClr val="0070C0"/>
                 </a:solidFill>
@@ -6447,7 +9033,7 @@
               <a:t> </a:t>
             </a:r>
             <a:br>
-              <a:rPr lang="th-TH" sz="1200" dirty="0">
+              <a:rPr lang="th-TH" sz="1200" b="1" dirty="0">
                 <a:solidFill>
                   <a:srgbClr val="0070C0"/>
                 </a:solidFill>
@@ -6456,7 +9042,7 @@
               </a:rPr>
             </a:br>
             <a:r>
-              <a:rPr lang="en-US" sz="1200" dirty="0">
+              <a:rPr lang="en-US" sz="1200" b="1" dirty="0">
                 <a:solidFill>
                   <a:srgbClr val="0070C0"/>
                 </a:solidFill>
@@ -6524,7 +9110,7 @@
           <a:p>
             <a:pPr algn="ctr"/>
             <a:r>
-              <a:rPr lang="en-US" sz="1200" dirty="0">
+              <a:rPr lang="en-US" sz="1200" b="1" dirty="0">
                 <a:latin typeface="Poppins" panose="00000800000000000000" pitchFamily="2" charset="0"/>
                 <a:cs typeface="Poppins" panose="00000800000000000000" pitchFamily="2" charset="0"/>
               </a:rPr>
@@ -6618,14 +9204,14 @@
           <a:p>
             <a:pPr algn="ctr"/>
             <a:r>
-              <a:rPr lang="en-US" sz="1200" dirty="0">
+              <a:rPr lang="en-US" sz="1200" b="1" dirty="0">
                 <a:latin typeface="Poppins" panose="00000800000000000000" pitchFamily="2" charset="0"/>
                 <a:cs typeface="Poppins" panose="00000800000000000000" pitchFamily="2" charset="0"/>
               </a:rPr>
               <a:t>Performance Results:</a:t>
             </a:r>
             <a:br>
-              <a:rPr lang="en-US" sz="1200" dirty="0">
+              <a:rPr lang="en-US" sz="1200" b="1" dirty="0">
                 <a:latin typeface="Poppins" panose="00000800000000000000" pitchFamily="2" charset="0"/>
                 <a:cs typeface="Poppins" panose="00000800000000000000" pitchFamily="2" charset="0"/>
               </a:rPr>
@@ -6719,8 +9305,8 @@
         </p:nvSpPr>
         <p:spPr>
           <a:xfrm>
-            <a:off x="7545601" y="5953931"/>
-            <a:ext cx="4507237" cy="584775"/>
+            <a:off x="6797041" y="5953931"/>
+            <a:ext cx="5255798" cy="584775"/>
           </a:xfrm>
           <a:prstGeom prst="rect">
             <a:avLst/>
@@ -6734,11 +9320,11 @@
           <a:lstStyle/>
           <a:p>
             <a:r>
-              <a:rPr lang="en-US" sz="3200" dirty="0">
-                <a:latin typeface="Poppins" panose="00000800000000000000" pitchFamily="2" charset="0"/>
-                <a:cs typeface="Poppins" panose="00000800000000000000" pitchFamily="2" charset="0"/>
-              </a:rPr>
-              <a:t>BPNN Model Pipeline</a:t>
+              <a:rPr lang="en-US" sz="3200" b="1" dirty="0">
+                <a:latin typeface="Poppins" panose="00000800000000000000" pitchFamily="2" charset="0"/>
+                <a:cs typeface="Poppins" panose="00000800000000000000" pitchFamily="2" charset="0"/>
+              </a:rPr>
+              <a:t>Baseline Model Pipeline</a:t>
             </a:r>
           </a:p>
         </p:txBody>
@@ -6773,7 +9359,7 @@
           <a:p>
             <a:pPr algn="ctr"/>
             <a:r>
-              <a:rPr lang="en-US" sz="1200" dirty="0">
+              <a:rPr lang="en-US" sz="1200" b="1" dirty="0">
                 <a:latin typeface="Poppins" panose="00000800000000000000" pitchFamily="2" charset="0"/>
                 <a:cs typeface="Poppins" panose="00000800000000000000" pitchFamily="2" charset="0"/>
               </a:rPr>
@@ -6783,7 +9369,7 @@
           <a:p>
             <a:pPr algn="ctr"/>
             <a:r>
-              <a:rPr lang="en-US" sz="1200" dirty="0">
+              <a:rPr lang="en-US" sz="1200" b="1" dirty="0">
                 <a:latin typeface="Poppins" panose="00000800000000000000" pitchFamily="2" charset="0"/>
                 <a:cs typeface="Poppins" panose="00000800000000000000" pitchFamily="2" charset="0"/>
               </a:rPr>
